--- a/AI_ML_Prompt_Engineering_updated.pptx
+++ b/AI_ML_Prompt_Engineering_updated.pptx
@@ -5,7 +5,7 @@
     <p:sldMasterId id="2147483648" r:id="rId1"/>
   </p:sldMasterIdLst>
   <p:notesMasterIdLst>
-    <p:notesMasterId r:id="rId32"/>
+    <p:notesMasterId r:id="rId37"/>
   </p:notesMasterIdLst>
   <p:sldIdLst>
     <p:sldId id="256" r:id="rId2"/>
@@ -38,6 +38,11 @@
     <p:sldId id="283" r:id="rId29"/>
     <p:sldId id="285" r:id="rId30"/>
     <p:sldId id="284" r:id="rId31"/>
+    <p:sldId id="286" r:id="rId32"/>
+    <p:sldId id="287" r:id="rId33"/>
+    <p:sldId id="288" r:id="rId34"/>
+    <p:sldId id="289" r:id="rId35"/>
+    <p:sldId id="290" r:id="rId36"/>
   </p:sldIdLst>
   <p:sldSz cx="9144000" cy="5143500" type="screen16x9"/>
   <p:notesSz cx="5143500" cy="9144000"/>
@@ -359,7 +364,6 @@
               <a:rPr lang="en-US" dirty="0" smtClean="0"/>
               <a:t>Let me show you where we're headed for the next 90 minutes.</a:t>
             </a:r>
-            <a:endParaRPr lang="en-US" dirty="0" smtClean="0"/>
           </a:p>
         </p:txBody>
       </p:sp>
@@ -455,7 +459,6 @@
               <a:rPr lang="en-US" dirty="0" smtClean="0"/>
               <a:t> afterwards.</a:t>
             </a:r>
-            <a:endParaRPr lang="en-US" dirty="0" smtClean="0"/>
           </a:p>
           <a:p>
             <a:r>
@@ -473,7 +476,6 @@
               <a:rPr lang="en-US" dirty="0" smtClean="0"/>
               <a:t>You already know this tool. It's the autocomplete on your phone. The only difference is your phone read your text messages; this thing read a library the size of the internet. So its guesses are shockingly good.</a:t>
             </a:r>
-            <a:endParaRPr lang="en-US" dirty="0" smtClean="0"/>
           </a:p>
           <a:p>
             <a:r>
@@ -504,8 +506,28 @@
             </a:r>
             <a:r>
               <a:rPr lang="en-US" dirty="0"/>
-              <a:t>is NOT a database or a search engine — it generates language, it doesn't look up verified facts by default.</a:t>
-            </a:r>
+              <a:t>is NOT a database or a search engine — it generates language, it doesn't look up verified facts by default</a:t>
+            </a:r>
+            <a:r>
+              <a:rPr lang="en-US" dirty="0" smtClean="0"/>
+              <a:t>.</a:t>
+            </a:r>
+          </a:p>
+          <a:p>
+            <a:endParaRPr lang="en-US" dirty="0" smtClean="0"/>
+          </a:p>
+          <a:p>
+            <a:r>
+              <a:rPr lang="en-US" dirty="0" smtClean="0"/>
+              <a:t>https://chatgpt.com/share/6a458321-7e3c-83ee-a71e-14e1747eb47d</a:t>
+            </a:r>
+          </a:p>
+          <a:p>
+            <a:r>
+              <a:rPr lang="en-US" dirty="0" smtClean="0"/>
+              <a:t>https://chatgpt.com/share/6a458388-6b30-83ee-ab33-06402fa9513f</a:t>
+            </a:r>
+            <a:endParaRPr lang="en-US" dirty="0"/>
           </a:p>
         </p:txBody>
       </p:sp>
@@ -613,7 +635,6 @@
               <a:rPr lang="en-US" dirty="0" smtClean="0"/>
               <a:t>Newer models handle images, audio, and files too — not just text.</a:t>
             </a:r>
-            <a:endParaRPr lang="en-US" dirty="0" smtClean="0"/>
           </a:p>
           <a:p>
             <a:r>
@@ -626,11 +647,7 @@
             </a:r>
             <a:r>
               <a:rPr lang="en-US" dirty="0" smtClean="0"/>
-              <a:t> — a made-up statistic, a fake source, a law that doesn't exist. LLM predicts plausible words, it doesn't verify facts. So — </a:t>
-            </a:r>
-            <a:r>
-              <a:rPr lang="en-US" dirty="0" smtClean="0"/>
-              <a:t>confident </a:t>
+              <a:t> — a made-up statistic, a fake source, a law that doesn't exist. LLM predicts plausible words, it doesn't verify facts. So — confident </a:t>
             </a:r>
             <a:r>
               <a:rPr lang="en-US" dirty="0"/>
@@ -767,7 +784,6 @@
               <a:rPr lang="en-US" dirty="0" smtClean="0"/>
               <a:t>.</a:t>
             </a:r>
-            <a:endParaRPr lang="en-US" dirty="0" smtClean="0"/>
           </a:p>
           <a:p>
             <a:r>
@@ -793,7 +809,6 @@
               <a:rPr lang="en-US" dirty="0" smtClean="0"/>
               <a:t> about you. It's brilliant, but it has zero context. It doesn't know your client, your goal, your audience, or what 'good' looks like — unless you tell it. Most bad AI output isn't the AI being dumb; it's us giving a lazy brief.</a:t>
             </a:r>
-            <a:endParaRPr lang="en-US" dirty="0" smtClean="0"/>
           </a:p>
           <a:p>
             <a:r>
@@ -814,7 +829,6 @@
               <a:rPr lang="en-US" dirty="0" smtClean="0"/>
               <a:t>Let's break a good prompt into its ingredients.</a:t>
             </a:r>
-            <a:endParaRPr lang="en-US" dirty="0" smtClean="0"/>
           </a:p>
         </p:txBody>
       </p:sp>
@@ -1061,15 +1075,7 @@
           <a:p>
             <a:r>
               <a:rPr lang="en-US" dirty="0" smtClean="0"/>
-              <a:t>TAG version: </a:t>
-            </a:r>
-            <a:r>
-              <a:rPr lang="en-US" dirty="0" smtClean="0"/>
-              <a:t>'explain neural networks with </a:t>
-            </a:r>
-            <a:r>
-              <a:rPr lang="en-US" dirty="0" smtClean="0"/>
-              <a:t>instructions for beginners, use a real-world analogy, under 300 words, no </a:t>
+              <a:t>TAG version: 'explain neural networks with instructions for beginners, use a real-world analogy, under 300 words, no </a:t>
             </a:r>
             <a:r>
               <a:rPr lang="en-US" dirty="0" err="1" smtClean="0"/>
@@ -1766,7 +1772,40 @@
           <a:p>
             <a:r>
               <a:rPr lang="en-US" dirty="0" smtClean="0"/>
-              <a:t>Here are the mistakes I see constantly — and the fix for each.</a:t>
+              <a:t>Here are the mistakes I see constantly — and the fix for each</a:t>
+            </a:r>
+            <a:r>
+              <a:rPr lang="en-US" dirty="0" smtClean="0"/>
+              <a:t>.</a:t>
+            </a:r>
+          </a:p>
+          <a:p>
+            <a:endParaRPr lang="en-US" dirty="0" smtClean="0"/>
+          </a:p>
+          <a:p>
+            <a:r>
+              <a:rPr lang="en-US" dirty="0" smtClean="0"/>
+              <a:t>GST</a:t>
+            </a:r>
+          </a:p>
+          <a:p>
+            <a:r>
+              <a:rPr lang="en-US" dirty="0" smtClean="0"/>
+              <a:t>Bad</a:t>
+            </a:r>
+            <a:r>
+              <a:rPr lang="en-US" baseline="0" dirty="0" smtClean="0"/>
+              <a:t> - </a:t>
+            </a:r>
+            <a:r>
+              <a:rPr lang="en-US" dirty="0" smtClean="0"/>
+              <a:t>https://chatgpt.com/share/6a458847-5fc4-83e8-b903-250e2c3eb90c</a:t>
+            </a:r>
+          </a:p>
+          <a:p>
+            <a:r>
+              <a:rPr lang="en-US" dirty="0" smtClean="0"/>
+              <a:t>Good - https://chatgpt.com/share/6a458866-d61c-83ee-8d86-585c8e72fb59</a:t>
             </a:r>
             <a:endParaRPr lang="en-US" dirty="0"/>
           </a:p>
@@ -2099,6 +2138,19 @@
           <a:p>
             <a:endParaRPr lang="en-US" dirty="0" smtClean="0"/>
           </a:p>
+          <a:p>
+            <a:r>
+              <a:rPr lang="en-US" dirty="0" smtClean="0"/>
+              <a:t>Bad - https://chatgpt.com/share/6a458a36-d7c0-83ee-a6ec-6909387c7c90</a:t>
+            </a:r>
+          </a:p>
+          <a:p>
+            <a:r>
+              <a:rPr lang="en-US" dirty="0" smtClean="0"/>
+              <a:t>Good - https://chatgpt.com/share/6a458a4a-cecc-83e8-b4b8-ff4d594941d4</a:t>
+            </a:r>
+            <a:endParaRPr lang="en-US" dirty="0" smtClean="0"/>
+          </a:p>
         </p:txBody>
       </p:sp>
       <p:sp>
@@ -2512,7 +2564,6 @@
               <a:rPr lang="en-US" dirty="0" smtClean="0"/>
               <a:t>It hallucinates with a straight face. Check every fact, figure, name, and citation.</a:t>
             </a:r>
-            <a:endParaRPr lang="en-US" dirty="0" smtClean="0"/>
           </a:p>
           <a:p>
             <a:r>
@@ -2541,7 +2592,6 @@
               <a:rPr lang="en-US" dirty="0" smtClean="0"/>
               <a:t>The AI's name isn't on the deliverable. Yours is. You're accountable for every word you pass on.</a:t>
             </a:r>
-            <a:endParaRPr lang="en-US" dirty="0" smtClean="0"/>
           </a:p>
           <a:p>
             <a:r>
@@ -3042,11 +3092,7 @@
             </a:r>
             <a:r>
               <a:rPr lang="en-US" dirty="0" smtClean="0"/>
-              <a:t>. </a:t>
-            </a:r>
-            <a:r>
-              <a:rPr lang="en-US" dirty="0" smtClean="0"/>
-              <a:t>What most people never learn is how to use it </a:t>
+              <a:t>. What most people never learn is how to use it </a:t>
             </a:r>
             <a:r>
               <a:rPr lang="en-US" i="1" dirty="0" smtClean="0"/>
@@ -3064,7 +3110,6 @@
               <a:rPr lang="en-US" dirty="0" smtClean="0"/>
               <a:t>. That gap is exactly what this session will close.</a:t>
             </a:r>
-            <a:endParaRPr lang="en-US" dirty="0" smtClean="0"/>
           </a:p>
           <a:p>
             <a:r>
@@ -3212,6 +3257,441 @@
 </p:notes>
 </file>
 
+<file path=ppt/notesSlides/notesSlide31.xml><?xml version="1.0" encoding="utf-8"?>
+<p:notes xmlns:a="http://schemas.openxmlformats.org/drawingml/2006/main" xmlns:r="http://schemas.openxmlformats.org/officeDocument/2006/relationships" xmlns:p="http://schemas.openxmlformats.org/presentationml/2006/main">
+  <p:cSld>
+    <p:spTree>
+      <p:nvGrpSpPr>
+        <p:cNvPr id="1" name=""/>
+        <p:cNvGrpSpPr/>
+        <p:nvPr/>
+      </p:nvGrpSpPr>
+      <p:grpSpPr>
+        <a:xfrm>
+          <a:off x="0" y="0"/>
+          <a:ext cx="0" cy="0"/>
+          <a:chOff x="0" y="0"/>
+          <a:chExt cx="0" cy="0"/>
+        </a:xfrm>
+      </p:grpSpPr>
+      <p:sp>
+        <p:nvSpPr>
+          <p:cNvPr id="2" name="Slide Image Placeholder 1"/>
+          <p:cNvSpPr>
+            <a:spLocks noGrp="1" noRot="1" noChangeAspect="1"/>
+          </p:cNvSpPr>
+          <p:nvPr>
+            <p:ph type="sldImg"/>
+          </p:nvPr>
+        </p:nvSpPr>
+        <p:spPr/>
+      </p:sp>
+      <p:sp>
+        <p:nvSpPr>
+          <p:cNvPr id="3" name="Notes Placeholder 2"/>
+          <p:cNvSpPr>
+            <a:spLocks noGrp="1"/>
+          </p:cNvSpPr>
+          <p:nvPr>
+            <p:ph type="body" idx="1"/>
+          </p:nvPr>
+        </p:nvSpPr>
+        <p:spPr/>
+        <p:txBody>
+          <a:bodyPr/>
+          <a:lstStyle/>
+          <a:p>
+            <a:r>
+              <a:rPr lang="en-US" dirty="0"/>
+              <a:t>MERGE-IN slide (not a backup) — fits right after the 'What is an LLM' slide. Purpose: show these tools didn't appear overnight and aren't a novelty — there's a clear lineage (BERT to multimodal) and they already touch almost every business function. Talk track: 'Notice the timeline — BERT in 2018 could barely hold a sentence; by 2024 they handle text, images and audio together. That's five years. And look at the applications wheel — this isn't a chatbot toy, it's writing code, screening candidates, spotting fraud.' Tie the last characteristic — 'no task-specific training' — back to zero-shot: you can just ask, no retraining needed.</a:t>
+            </a:r>
+          </a:p>
+        </p:txBody>
+      </p:sp>
+      <p:sp>
+        <p:nvSpPr>
+          <p:cNvPr id="4" name="Slide Number Placeholder 3"/>
+          <p:cNvSpPr>
+            <a:spLocks noGrp="1"/>
+          </p:cNvSpPr>
+          <p:nvPr>
+            <p:ph type="sldNum" sz="quarter" idx="10"/>
+          </p:nvPr>
+        </p:nvSpPr>
+        <p:spPr/>
+        <p:txBody>
+          <a:bodyPr/>
+          <a:lstStyle/>
+          <a:p>
+            <a:fld id="{F7021451-1387-4CA6-816F-3879F97B5CBC}" type="slidenum">
+              <a:rPr lang="en-US"/>
+              <a:t>31</a:t>
+            </a:fld>
+            <a:endParaRPr lang="en-US"/>
+          </a:p>
+        </p:txBody>
+      </p:sp>
+    </p:spTree>
+    <p:extLst>
+      <p:ext uri="{BB962C8B-B14F-4D97-AF65-F5344CB8AC3E}">
+        <p14:creationId xmlns:p14="http://schemas.microsoft.com/office/powerpoint/2010/main" val="1172387633"/>
+      </p:ext>
+    </p:extLst>
+  </p:cSld>
+  <p:clrMapOvr>
+    <a:masterClrMapping/>
+  </p:clrMapOvr>
+</p:notes>
+</file>
+
+<file path=ppt/notesSlides/notesSlide32.xml><?xml version="1.0" encoding="utf-8"?>
+<p:notes xmlns:a="http://schemas.openxmlformats.org/drawingml/2006/main" xmlns:r="http://schemas.openxmlformats.org/officeDocument/2006/relationships" xmlns:p="http://schemas.openxmlformats.org/presentationml/2006/main">
+  <p:cSld>
+    <p:spTree>
+      <p:nvGrpSpPr>
+        <p:cNvPr id="1" name=""/>
+        <p:cNvGrpSpPr/>
+        <p:nvPr/>
+      </p:nvGrpSpPr>
+      <p:grpSpPr>
+        <a:xfrm>
+          <a:off x="0" y="0"/>
+          <a:ext cx="0" cy="0"/>
+          <a:chOff x="0" y="0"/>
+          <a:chExt cx="0" cy="0"/>
+        </a:xfrm>
+      </p:grpSpPr>
+      <p:sp>
+        <p:nvSpPr>
+          <p:cNvPr id="2" name="Slide Image Placeholder 1"/>
+          <p:cNvSpPr>
+            <a:spLocks noGrp="1" noRot="1" noChangeAspect="1"/>
+          </p:cNvSpPr>
+          <p:nvPr>
+            <p:ph type="sldImg"/>
+          </p:nvPr>
+        </p:nvSpPr>
+        <p:spPr/>
+      </p:sp>
+      <p:sp>
+        <p:nvSpPr>
+          <p:cNvPr id="3" name="Notes Placeholder 2"/>
+          <p:cNvSpPr>
+            <a:spLocks noGrp="1"/>
+          </p:cNvSpPr>
+          <p:nvPr>
+            <p:ph type="body" idx="1"/>
+          </p:nvPr>
+        </p:nvSpPr>
+        <p:spPr/>
+        <p:txBody>
+          <a:bodyPr/>
+          <a:lstStyle/>
+          <a:p>
+            <a:r>
+              <a:rPr lang="en-US" dirty="0"/>
+              <a:t>BACKUP slide — only show if someone asks how the model actually 'reads' text, or to set up embeddings. Keep it light: the model doesn't see letters, it chops text into tokens, swaps each for a number (an ID), then turns those numbers into vectors. Use the 'Apple is a fruit' example — four tokens, four IDs. Don't go near Byte-Pair Encoding unless a technical person pushes; for this audience 'it splits text into chunks and numbers them' is plenty. Hand off to the embeddings slide: 'those numbers aren't random — that's the clever part.'</a:t>
+            </a:r>
+          </a:p>
+        </p:txBody>
+      </p:sp>
+      <p:sp>
+        <p:nvSpPr>
+          <p:cNvPr id="4" name="Slide Number Placeholder 3"/>
+          <p:cNvSpPr>
+            <a:spLocks noGrp="1"/>
+          </p:cNvSpPr>
+          <p:nvPr>
+            <p:ph type="sldNum" sz="quarter" idx="10"/>
+          </p:nvPr>
+        </p:nvSpPr>
+        <p:spPr/>
+        <p:txBody>
+          <a:bodyPr/>
+          <a:lstStyle/>
+          <a:p>
+            <a:fld id="{F7021451-1387-4CA6-816F-3879F97B5CBC}" type="slidenum">
+              <a:rPr lang="en-US"/>
+              <a:t>32</a:t>
+            </a:fld>
+            <a:endParaRPr lang="en-US"/>
+          </a:p>
+        </p:txBody>
+      </p:sp>
+    </p:spTree>
+    <p:extLst>
+      <p:ext uri="{BB962C8B-B14F-4D97-AF65-F5344CB8AC3E}">
+        <p14:creationId xmlns:p14="http://schemas.microsoft.com/office/powerpoint/2010/main" val="896829921"/>
+      </p:ext>
+    </p:extLst>
+  </p:cSld>
+  <p:clrMapOvr>
+    <a:masterClrMapping/>
+  </p:clrMapOvr>
+</p:notes>
+</file>
+
+<file path=ppt/notesSlides/notesSlide33.xml><?xml version="1.0" encoding="utf-8"?>
+<p:notes xmlns:a="http://schemas.openxmlformats.org/drawingml/2006/main" xmlns:r="http://schemas.openxmlformats.org/officeDocument/2006/relationships" xmlns:p="http://schemas.openxmlformats.org/presentationml/2006/main">
+  <p:cSld>
+    <p:spTree>
+      <p:nvGrpSpPr>
+        <p:cNvPr id="1" name=""/>
+        <p:cNvGrpSpPr/>
+        <p:nvPr/>
+      </p:nvGrpSpPr>
+      <p:grpSpPr>
+        <a:xfrm>
+          <a:off x="0" y="0"/>
+          <a:ext cx="0" cy="0"/>
+          <a:chOff x="0" y="0"/>
+          <a:chExt cx="0" cy="0"/>
+        </a:xfrm>
+      </p:grpSpPr>
+      <p:sp>
+        <p:nvSpPr>
+          <p:cNvPr id="2" name="Slide Image Placeholder 1"/>
+          <p:cNvSpPr>
+            <a:spLocks noGrp="1" noRot="1" noChangeAspect="1"/>
+          </p:cNvSpPr>
+          <p:nvPr>
+            <p:ph type="sldImg"/>
+          </p:nvPr>
+        </p:nvSpPr>
+        <p:spPr/>
+      </p:sp>
+      <p:sp>
+        <p:nvSpPr>
+          <p:cNvPr id="3" name="Notes Placeholder 2"/>
+          <p:cNvSpPr>
+            <a:spLocks noGrp="1"/>
+          </p:cNvSpPr>
+          <p:nvPr>
+            <p:ph type="body" idx="1"/>
+          </p:nvPr>
+        </p:nvSpPr>
+        <p:spPr/>
+        <p:txBody>
+          <a:bodyPr/>
+          <a:lstStyle/>
+          <a:p>
+            <a:r>
+              <a:rPr lang="en-US" dirty="0"/>
+              <a:t>BACKUP slide — this is the one genuinely new concept from the Deloitte deck we hadn't covered. Only go here if asked 'how does it understand meaning?' or before RAG. The key intuition, not the maths: every word gets turned into a list of numbers (a vector), and words with similar meaning get similar numbers — so they sit close together in 'meaning space'. That's why AI knows 'king' and 'queen' are related, or can do semantic search (find by meaning, not exact words). Use the coffee/tea/concrete line — it lands instantly. Don't say 'high-dimensional vector space' unless the room is technical; 'a map of meaning' does the job.</a:t>
+            </a:r>
+          </a:p>
+        </p:txBody>
+      </p:sp>
+      <p:sp>
+        <p:nvSpPr>
+          <p:cNvPr id="4" name="Slide Number Placeholder 3"/>
+          <p:cNvSpPr>
+            <a:spLocks noGrp="1"/>
+          </p:cNvSpPr>
+          <p:nvPr>
+            <p:ph type="sldNum" sz="quarter" idx="10"/>
+          </p:nvPr>
+        </p:nvSpPr>
+        <p:spPr/>
+        <p:txBody>
+          <a:bodyPr/>
+          <a:lstStyle/>
+          <a:p>
+            <a:fld id="{F7021451-1387-4CA6-816F-3879F97B5CBC}" type="slidenum">
+              <a:rPr lang="en-US"/>
+              <a:t>33</a:t>
+            </a:fld>
+            <a:endParaRPr lang="en-US"/>
+          </a:p>
+        </p:txBody>
+      </p:sp>
+    </p:spTree>
+    <p:extLst>
+      <p:ext uri="{BB962C8B-B14F-4D97-AF65-F5344CB8AC3E}">
+        <p14:creationId xmlns:p14="http://schemas.microsoft.com/office/powerpoint/2010/main" val="3750198392"/>
+      </p:ext>
+    </p:extLst>
+  </p:cSld>
+  <p:clrMapOvr>
+    <a:masterClrMapping/>
+  </p:clrMapOvr>
+</p:notes>
+</file>
+
+<file path=ppt/notesSlides/notesSlide34.xml><?xml version="1.0" encoding="utf-8"?>
+<p:notes xmlns:a="http://schemas.openxmlformats.org/drawingml/2006/main" xmlns:r="http://schemas.openxmlformats.org/officeDocument/2006/relationships" xmlns:p="http://schemas.openxmlformats.org/presentationml/2006/main">
+  <p:cSld>
+    <p:spTree>
+      <p:nvGrpSpPr>
+        <p:cNvPr id="1" name=""/>
+        <p:cNvGrpSpPr/>
+        <p:nvPr/>
+      </p:nvGrpSpPr>
+      <p:grpSpPr>
+        <a:xfrm>
+          <a:off x="0" y="0"/>
+          <a:ext cx="0" cy="0"/>
+          <a:chOff x="0" y="0"/>
+          <a:chExt cx="0" cy="0"/>
+        </a:xfrm>
+      </p:grpSpPr>
+      <p:sp>
+        <p:nvSpPr>
+          <p:cNvPr id="2" name="Slide Image Placeholder 1"/>
+          <p:cNvSpPr>
+            <a:spLocks noGrp="1" noRot="1" noChangeAspect="1"/>
+          </p:cNvSpPr>
+          <p:nvPr>
+            <p:ph type="sldImg"/>
+          </p:nvPr>
+        </p:nvSpPr>
+        <p:spPr/>
+      </p:sp>
+      <p:sp>
+        <p:nvSpPr>
+          <p:cNvPr id="3" name="Notes Placeholder 2"/>
+          <p:cNvSpPr>
+            <a:spLocks noGrp="1"/>
+          </p:cNvSpPr>
+          <p:nvPr>
+            <p:ph type="body" idx="1"/>
+          </p:nvPr>
+        </p:nvSpPr>
+        <p:spPr/>
+        <p:txBody>
+          <a:bodyPr/>
+          <a:lstStyle/>
+          <a:p>
+            <a:r>
+              <a:rPr lang="en-US" dirty="0"/>
+              <a:t>BACKUP slide — a great one to have ready, because it directly answers two things interns will wonder: 'how does it know about MY company?' and 'how do we stop it making things up?' RAG = Retrieval-Augmented Generation. Three steps: retrieve relevant info from a trusted source, add it to the prompt, then generate an answer grounded in it. The open-book vs closed-book analogy is the fastest way in. Tie-backs: it uses embeddings (previous slide) to find the right info by meaning; and it's a real answer to hallucinations (our Responsible AI theme) — grounded, checkable answers. Keep it conceptual — no vector-database plumbing needed for this audience.</a:t>
+            </a:r>
+          </a:p>
+        </p:txBody>
+      </p:sp>
+      <p:sp>
+        <p:nvSpPr>
+          <p:cNvPr id="4" name="Slide Number Placeholder 3"/>
+          <p:cNvSpPr>
+            <a:spLocks noGrp="1"/>
+          </p:cNvSpPr>
+          <p:nvPr>
+            <p:ph type="sldNum" sz="quarter" idx="10"/>
+          </p:nvPr>
+        </p:nvSpPr>
+        <p:spPr/>
+        <p:txBody>
+          <a:bodyPr/>
+          <a:lstStyle/>
+          <a:p>
+            <a:fld id="{F7021451-1387-4CA6-816F-3879F97B5CBC}" type="slidenum">
+              <a:rPr lang="en-US"/>
+              <a:t>34</a:t>
+            </a:fld>
+            <a:endParaRPr lang="en-US"/>
+          </a:p>
+        </p:txBody>
+      </p:sp>
+    </p:spTree>
+    <p:extLst>
+      <p:ext uri="{BB962C8B-B14F-4D97-AF65-F5344CB8AC3E}">
+        <p14:creationId xmlns:p14="http://schemas.microsoft.com/office/powerpoint/2010/main" val="4190022506"/>
+      </p:ext>
+    </p:extLst>
+  </p:cSld>
+  <p:clrMapOvr>
+    <a:masterClrMapping/>
+  </p:clrMapOvr>
+</p:notes>
+</file>
+
+<file path=ppt/notesSlides/notesSlide35.xml><?xml version="1.0" encoding="utf-8"?>
+<p:notes xmlns:a="http://schemas.openxmlformats.org/drawingml/2006/main" xmlns:r="http://schemas.openxmlformats.org/officeDocument/2006/relationships" xmlns:p="http://schemas.openxmlformats.org/presentationml/2006/main">
+  <p:cSld>
+    <p:spTree>
+      <p:nvGrpSpPr>
+        <p:cNvPr id="1" name=""/>
+        <p:cNvGrpSpPr/>
+        <p:nvPr/>
+      </p:nvGrpSpPr>
+      <p:grpSpPr>
+        <a:xfrm>
+          <a:off x="0" y="0"/>
+          <a:ext cx="0" cy="0"/>
+          <a:chOff x="0" y="0"/>
+          <a:chExt cx="0" cy="0"/>
+        </a:xfrm>
+      </p:grpSpPr>
+      <p:sp>
+        <p:nvSpPr>
+          <p:cNvPr id="2" name="Slide Image Placeholder 1"/>
+          <p:cNvSpPr>
+            <a:spLocks noGrp="1" noRot="1" noChangeAspect="1"/>
+          </p:cNvSpPr>
+          <p:nvPr>
+            <p:ph type="sldImg"/>
+          </p:nvPr>
+        </p:nvSpPr>
+        <p:spPr/>
+      </p:sp>
+      <p:sp>
+        <p:nvSpPr>
+          <p:cNvPr id="3" name="Notes Placeholder 2"/>
+          <p:cNvSpPr>
+            <a:spLocks noGrp="1"/>
+          </p:cNvSpPr>
+          <p:nvPr>
+            <p:ph type="body" idx="1"/>
+          </p:nvPr>
+        </p:nvSpPr>
+        <p:spPr/>
+        <p:txBody>
+          <a:bodyPr/>
+          <a:lstStyle/>
+          <a:p>
+            <a:r>
+              <a:rPr lang="en-US" dirty="0"/>
+              <a:t>BACKUP slide — you said you won't present it by default, but it's here if you want to show the interns a concrete, Deloitte-flavoured before/after. It reinforces the same lesson as the main before/after slide, but with a consulting data example. If you do show it: read the bad prompt and its vague output, then the good prompt, and point out WHY the output improved — you asked for specific trends, risks, and actions, so you got specific trends, risks, and actions. The output is only as structured as the request. Pairs naturally with the Prompt Makeover activity.</a:t>
+            </a:r>
+          </a:p>
+        </p:txBody>
+      </p:sp>
+      <p:sp>
+        <p:nvSpPr>
+          <p:cNvPr id="4" name="Slide Number Placeholder 3"/>
+          <p:cNvSpPr>
+            <a:spLocks noGrp="1"/>
+          </p:cNvSpPr>
+          <p:nvPr>
+            <p:ph type="sldNum" sz="quarter" idx="10"/>
+          </p:nvPr>
+        </p:nvSpPr>
+        <p:spPr/>
+        <p:txBody>
+          <a:bodyPr/>
+          <a:lstStyle/>
+          <a:p>
+            <a:fld id="{F7021451-1387-4CA6-816F-3879F97B5CBC}" type="slidenum">
+              <a:rPr lang="en-US"/>
+              <a:t>35</a:t>
+            </a:fld>
+            <a:endParaRPr lang="en-US"/>
+          </a:p>
+        </p:txBody>
+      </p:sp>
+    </p:spTree>
+    <p:extLst>
+      <p:ext uri="{BB962C8B-B14F-4D97-AF65-F5344CB8AC3E}">
+        <p14:creationId xmlns:p14="http://schemas.microsoft.com/office/powerpoint/2010/main" val="1840419351"/>
+      </p:ext>
+    </p:extLst>
+  </p:cSld>
+  <p:clrMapOvr>
+    <a:masterClrMapping/>
+  </p:clrMapOvr>
+</p:notes>
+</file>
+
 <file path=ppt/notesSlides/notesSlide4.xml><?xml version="1.0" encoding="utf-8"?>
 <p:notes xmlns:a="http://schemas.openxmlformats.org/drawingml/2006/main" xmlns:r="http://schemas.openxmlformats.org/officeDocument/2006/relationships" xmlns:p="http://schemas.openxmlformats.org/presentationml/2006/main">
   <p:cSld>
@@ -3548,7 +4028,6 @@
               <a:rPr lang="en-US" dirty="0" smtClean="0"/>
               <a:t>If the email says free money and comes from a stranger, mark it spam.' The problem? Spammers change tactics daily, and you'd be writing rules forever and always one step behind.</a:t>
             </a:r>
-            <a:endParaRPr lang="en-US" dirty="0" smtClean="0"/>
           </a:p>
           <a:p>
             <a:r>
@@ -3567,11 +4046,7 @@
           <a:p>
             <a:r>
               <a:rPr lang="en-US" dirty="0" smtClean="0"/>
-              <a:t>quality and quantity of the examples drive quality of results — 'garbage in, garbage out.' </a:t>
-            </a:r>
-            <a:r>
-              <a:rPr lang="en-US" dirty="0" smtClean="0"/>
-              <a:t>And it means if you feed it biased or bad examples, it learns bad patterns.</a:t>
+              <a:t>quality and quantity of the examples drive quality of results — 'garbage in, garbage out.' And it means if you feed it biased or bad examples, it learns bad patterns.</a:t>
             </a:r>
           </a:p>
           <a:p>
@@ -3687,7 +4162,6 @@
               <a:rPr lang="en-US" dirty="0" smtClean="0"/>
               <a:t>You give it the answers to study from — labelled examples. 'These 10,000 emails are spam, these aren't.</a:t>
             </a:r>
-            <a:endParaRPr lang="en-US" dirty="0" smtClean="0"/>
           </a:p>
           <a:p>
             <a:r>
@@ -3710,7 +4184,6 @@
               <a:rPr lang="en-US" dirty="0" smtClean="0"/>
               <a:t> answers and say 'find the patterns.' It might cluster your customers into groups you never knew existed.</a:t>
             </a:r>
-            <a:endParaRPr lang="en-US" dirty="0" smtClean="0"/>
           </a:p>
           <a:p>
             <a:r>
@@ -3723,11 +4196,7 @@
             </a:r>
             <a:r>
               <a:rPr lang="en-US" dirty="0" smtClean="0"/>
-              <a:t>. </a:t>
-            </a:r>
-            <a:r>
-              <a:rPr lang="en-US" dirty="0" smtClean="0"/>
-              <a:t>Learning by trial and error with rewards — like training a dog with treats. It's how AI learns to play games or optimize a route.</a:t>
+              <a:t>. Learning by trial and error with rewards — like training a dog with treats. It's how AI learns to play games or optimize a route.</a:t>
             </a:r>
             <a:endParaRPr lang="en-US" dirty="0"/>
           </a:p>
@@ -13882,10 +14351,10 @@
                 <a:ea typeface="Calibri" pitchFamily="34" charset="-122"/>
                 <a:cs typeface="Calibri" pitchFamily="34" charset="-120"/>
               </a:rPr>
-              <a:t>chat  </a:t>
-            </a:r>
-            <a:r>
-              <a:rPr lang="en-US" sz="1200" dirty="0" smtClean="0">
+              <a:t>chat  ·  </a:t>
+            </a:r>
+            <a:r>
+              <a:rPr lang="en-US" sz="1200" dirty="0">
                 <a:solidFill>
                   <a:srgbClr val="44474A"/>
                 </a:solidFill>
@@ -13893,40 +14362,7 @@
                 <a:ea typeface="Calibri" pitchFamily="34" charset="-122"/>
                 <a:cs typeface="Calibri" pitchFamily="34" charset="-120"/>
               </a:rPr>
-              <a:t>·  </a:t>
-            </a:r>
-            <a:r>
-              <a:rPr lang="en-US" sz="1200" dirty="0">
-                <a:solidFill>
-                  <a:srgbClr val="44474A"/>
-                </a:solidFill>
-                <a:latin typeface="Calibri" pitchFamily="34" charset="0"/>
-                <a:ea typeface="Calibri" pitchFamily="34" charset="-122"/>
-                <a:cs typeface="Calibri" pitchFamily="34" charset="-120"/>
-              </a:rPr>
-              <a:t>emoji </a:t>
-            </a:r>
-            <a:r>
-              <a:rPr lang="en-US" sz="1200" dirty="0">
-                <a:solidFill>
-                  <a:srgbClr val="44474A"/>
-                </a:solidFill>
-                <a:latin typeface="Calibri" pitchFamily="34" charset="0"/>
-                <a:ea typeface="Calibri" pitchFamily="34" charset="-122"/>
-                <a:cs typeface="Calibri" pitchFamily="34" charset="-120"/>
-              </a:rPr>
-              <a:t>reactions ·  quizzes </a:t>
-            </a:r>
-            <a:r>
-              <a:rPr lang="en-US" sz="1200" dirty="0">
-                <a:solidFill>
-                  <a:srgbClr val="44474A"/>
-                </a:solidFill>
-                <a:latin typeface="Calibri" pitchFamily="34" charset="0"/>
-                <a:ea typeface="Calibri" pitchFamily="34" charset="-122"/>
-                <a:cs typeface="Calibri" pitchFamily="34" charset="-120"/>
-              </a:rPr>
-              <a:t>— jump in throughout.</a:t>
+              <a:t>emoji reactions ·  quizzes — jump in throughout.</a:t>
             </a:r>
             <a:endParaRPr lang="en-US" sz="1200" dirty="0"/>
           </a:p>
@@ -21748,6 +22184,4709 @@
 </p:sld>
 </file>
 
+<file path=ppt/slides/slide31.xml><?xml version="1.0" encoding="utf-8"?>
+<p:sld xmlns:a="http://schemas.openxmlformats.org/drawingml/2006/main" xmlns:r="http://schemas.openxmlformats.org/officeDocument/2006/relationships" xmlns:p="http://schemas.openxmlformats.org/presentationml/2006/main">
+  <p:cSld>
+    <p:spTree>
+      <p:nvGrpSpPr>
+        <p:cNvPr id="1" name=""/>
+        <p:cNvGrpSpPr/>
+        <p:nvPr/>
+      </p:nvGrpSpPr>
+      <p:grpSpPr>
+        <a:xfrm>
+          <a:off x="0" y="0"/>
+          <a:ext cx="0" cy="0"/>
+          <a:chOff x="0" y="0"/>
+          <a:chExt cx="0" cy="0"/>
+        </a:xfrm>
+      </p:grpSpPr>
+      <p:sp>
+        <p:nvSpPr>
+          <p:cNvPr id="2" name="Shape 0"/>
+          <p:cNvSpPr/>
+          <p:nvPr/>
+        </p:nvSpPr>
+        <p:spPr>
+          <a:xfrm>
+            <a:off x="457200" y="402336"/>
+            <a:ext cx="109728" cy="109728"/>
+          </a:xfrm>
+          <a:prstGeom prst="ellipse">
+            <a:avLst/>
+          </a:prstGeom>
+          <a:solidFill>
+            <a:srgbClr val="86BC25"/>
+          </a:solidFill>
+          <a:ln/>
+        </p:spPr>
+      </p:sp>
+      <p:sp>
+        <p:nvSpPr>
+          <p:cNvPr id="3" name="Text 1"/>
+          <p:cNvSpPr/>
+          <p:nvPr/>
+        </p:nvSpPr>
+        <p:spPr>
+          <a:xfrm>
+            <a:off x="658368" y="329184"/>
+            <a:ext cx="7955280" cy="256032"/>
+          </a:xfrm>
+          <a:prstGeom prst="rect">
+            <a:avLst/>
+          </a:prstGeom>
+          <a:noFill/>
+          <a:ln/>
+        </p:spPr>
+        <p:txBody>
+          <a:bodyPr wrap="square" lIns="0" tIns="0" rIns="0" bIns="0" rtlCol="0" anchor="ctr"/>
+          <a:lstStyle/>
+          <a:p>
+            <a:pPr marL="0" indent="0">
+              <a:buNone/>
+            </a:pPr>
+            <a:r>
+              <a:rPr lang="en-US" sz="1100" b="1" kern="0" spc="200" dirty="0">
+                <a:solidFill>
+                  <a:srgbClr val="5C8A1B"/>
+                </a:solidFill>
+                <a:latin typeface="Calibri" pitchFamily="34" charset="0"/>
+                <a:ea typeface="Calibri" pitchFamily="34" charset="-122"/>
+                <a:cs typeface="Calibri" pitchFamily="34" charset="-120"/>
+              </a:rPr>
+              <a:t>MODULE 3 · GENERATIVE AI &amp; LLMS</a:t>
+            </a:r>
+            <a:endParaRPr lang="en-US" sz="1100" dirty="0"/>
+          </a:p>
+        </p:txBody>
+      </p:sp>
+      <p:sp>
+        <p:nvSpPr>
+          <p:cNvPr id="4" name="Text 2"/>
+          <p:cNvSpPr/>
+          <p:nvPr/>
+        </p:nvSpPr>
+        <p:spPr>
+          <a:xfrm>
+            <a:off x="457200" y="603504"/>
+            <a:ext cx="8229600" cy="640080"/>
+          </a:xfrm>
+          <a:prstGeom prst="rect">
+            <a:avLst/>
+          </a:prstGeom>
+          <a:noFill/>
+          <a:ln/>
+        </p:spPr>
+        <p:txBody>
+          <a:bodyPr wrap="square" lIns="0" tIns="0" rIns="0" bIns="0" rtlCol="0" anchor="ctr"/>
+          <a:lstStyle/>
+          <a:p>
+            <a:pPr marL="0" indent="0">
+              <a:buNone/>
+            </a:pPr>
+            <a:r>
+              <a:rPr lang="en-US" sz="2900" b="1" dirty="0">
+                <a:solidFill>
+                  <a:srgbClr val="26282A"/>
+                </a:solidFill>
+                <a:latin typeface="Cambria" pitchFamily="34" charset="0"/>
+                <a:ea typeface="Cambria" pitchFamily="34" charset="-122"/>
+                <a:cs typeface="Cambria" pitchFamily="34" charset="-120"/>
+              </a:rPr>
+              <a:t>How LLMs evolved — and where they're used</a:t>
+            </a:r>
+            <a:endParaRPr lang="en-US" sz="2900" dirty="0"/>
+          </a:p>
+        </p:txBody>
+      </p:sp>
+      <p:sp>
+        <p:nvSpPr>
+          <p:cNvPr id="5" name="Text 3"/>
+          <p:cNvSpPr/>
+          <p:nvPr/>
+        </p:nvSpPr>
+        <p:spPr>
+          <a:xfrm>
+            <a:off x="457200" y="1371600"/>
+            <a:ext cx="8229600" cy="411480"/>
+          </a:xfrm>
+          <a:prstGeom prst="rect">
+            <a:avLst/>
+          </a:prstGeom>
+          <a:noFill/>
+          <a:ln/>
+        </p:spPr>
+        <p:txBody>
+          <a:bodyPr wrap="square" lIns="0" tIns="0" rIns="0" bIns="0" rtlCol="0" anchor="ctr"/>
+          <a:lstStyle/>
+          <a:p>
+            <a:pPr marL="0" indent="0">
+              <a:buNone/>
+            </a:pPr>
+            <a:r>
+              <a:rPr lang="en-US" sz="1300" dirty="0">
+                <a:solidFill>
+                  <a:srgbClr val="26282A"/>
+                </a:solidFill>
+                <a:latin typeface="Calibri" pitchFamily="34" charset="0"/>
+                <a:ea typeface="Calibri" pitchFamily="34" charset="-122"/>
+                <a:cs typeface="Calibri" pitchFamily="34" charset="-120"/>
+              </a:rPr>
+              <a:t>Same idea as before — trained on vast text to generate human-like language. Here's how fast they've grown, and how widely they're now used.</a:t>
+            </a:r>
+            <a:endParaRPr lang="en-US" sz="1300" dirty="0"/>
+          </a:p>
+        </p:txBody>
+      </p:sp>
+      <p:sp>
+        <p:nvSpPr>
+          <p:cNvPr id="6" name="Shape 4"/>
+          <p:cNvSpPr/>
+          <p:nvPr/>
+        </p:nvSpPr>
+        <p:spPr>
+          <a:xfrm>
+            <a:off x="457200" y="1874520"/>
+            <a:ext cx="4023360" cy="1417320"/>
+          </a:xfrm>
+          <a:prstGeom prst="roundRect">
+            <a:avLst>
+              <a:gd name="adj" fmla="val 5161"/>
+            </a:avLst>
+          </a:prstGeom>
+          <a:solidFill>
+            <a:srgbClr val="F4F5F6"/>
+          </a:solidFill>
+          <a:ln w="9525">
+            <a:solidFill>
+              <a:srgbClr val="DADDE0"/>
+            </a:solidFill>
+            <a:prstDash val="solid"/>
+          </a:ln>
+          <a:effectLst>
+            <a:outerShdw blurRad="88900" dist="25400" dir="5400000" algn="bl" rotWithShape="0">
+              <a:srgbClr val="000000">
+                <a:alpha val="10000"/>
+              </a:srgbClr>
+            </a:outerShdw>
+          </a:effectLst>
+        </p:spPr>
+      </p:sp>
+      <p:sp>
+        <p:nvSpPr>
+          <p:cNvPr id="7" name="Text 5"/>
+          <p:cNvSpPr/>
+          <p:nvPr/>
+        </p:nvSpPr>
+        <p:spPr>
+          <a:xfrm>
+            <a:off x="685800" y="1993392"/>
+            <a:ext cx="3657600" cy="274320"/>
+          </a:xfrm>
+          <a:prstGeom prst="rect">
+            <a:avLst/>
+          </a:prstGeom>
+          <a:noFill/>
+          <a:ln/>
+        </p:spPr>
+        <p:txBody>
+          <a:bodyPr wrap="square" lIns="0" tIns="0" rIns="0" bIns="0" rtlCol="0" anchor="ctr"/>
+          <a:lstStyle/>
+          <a:p>
+            <a:pPr marL="0" indent="0">
+              <a:buNone/>
+            </a:pPr>
+            <a:r>
+              <a:rPr lang="en-US" sz="1100" b="1" kern="0" spc="100" dirty="0">
+                <a:solidFill>
+                  <a:srgbClr val="5C8A1B"/>
+                </a:solidFill>
+                <a:latin typeface="Calibri" pitchFamily="34" charset="0"/>
+                <a:ea typeface="Calibri" pitchFamily="34" charset="-122"/>
+                <a:cs typeface="Calibri" pitchFamily="34" charset="-120"/>
+              </a:rPr>
+              <a:t>KEY CHARACTERISTICS</a:t>
+            </a:r>
+            <a:endParaRPr lang="en-US" sz="1100" dirty="0"/>
+          </a:p>
+        </p:txBody>
+      </p:sp>
+      <p:sp>
+        <p:nvSpPr>
+          <p:cNvPr id="8" name="Text 6"/>
+          <p:cNvSpPr/>
+          <p:nvPr/>
+        </p:nvSpPr>
+        <p:spPr>
+          <a:xfrm>
+            <a:off x="685800" y="2286000"/>
+            <a:ext cx="3611880" cy="914400"/>
+          </a:xfrm>
+          <a:prstGeom prst="rect">
+            <a:avLst/>
+          </a:prstGeom>
+          <a:noFill/>
+          <a:ln/>
+        </p:spPr>
+        <p:txBody>
+          <a:bodyPr wrap="square" lIns="0" tIns="0" rIns="0" bIns="0" rtlCol="0" anchor="ctr"/>
+          <a:lstStyle/>
+          <a:p>
+            <a:pPr marL="342900" indent="-342900">
+              <a:spcAft>
+                <a:spcPts val="600"/>
+              </a:spcAft>
+              <a:buSzPct val="100000"/>
+              <a:buChar char="•"/>
+            </a:pPr>
+            <a:r>
+              <a:rPr lang="en-US" sz="1200" dirty="0">
+                <a:solidFill>
+                  <a:srgbClr val="26282A"/>
+                </a:solidFill>
+                <a:latin typeface="Calibri" pitchFamily="34" charset="0"/>
+                <a:ea typeface="Calibri" pitchFamily="34" charset="-122"/>
+                <a:cs typeface="Calibri" pitchFamily="34" charset="-120"/>
+              </a:rPr>
+              <a:t>Trained on billions–trillions of parameters</a:t>
+            </a:r>
+            <a:endParaRPr lang="en-US" sz="1200" dirty="0"/>
+          </a:p>
+          <a:p>
+            <a:pPr marL="342900" indent="-342900">
+              <a:spcAft>
+                <a:spcPts val="600"/>
+              </a:spcAft>
+              <a:buSzPct val="100000"/>
+              <a:buChar char="•"/>
+            </a:pPr>
+            <a:r>
+              <a:rPr lang="en-US" sz="1200" dirty="0">
+                <a:solidFill>
+                  <a:srgbClr val="26282A"/>
+                </a:solidFill>
+                <a:latin typeface="Calibri" pitchFamily="34" charset="0"/>
+                <a:ea typeface="Calibri" pitchFamily="34" charset="-122"/>
+                <a:cs typeface="Calibri" pitchFamily="34" charset="-120"/>
+              </a:rPr>
+              <a:t>Understand context &amp; give coherent responses</a:t>
+            </a:r>
+            <a:endParaRPr lang="en-US" sz="1200" dirty="0"/>
+          </a:p>
+          <a:p>
+            <a:pPr marL="342900" indent="-342900">
+              <a:buSzPct val="100000"/>
+              <a:buChar char="•"/>
+            </a:pPr>
+            <a:r>
+              <a:rPr lang="en-US" sz="1200" dirty="0">
+                <a:solidFill>
+                  <a:srgbClr val="26282A"/>
+                </a:solidFill>
+                <a:latin typeface="Calibri" pitchFamily="34" charset="0"/>
+                <a:ea typeface="Calibri" pitchFamily="34" charset="-122"/>
+                <a:cs typeface="Calibri" pitchFamily="34" charset="-120"/>
+              </a:rPr>
+              <a:t>Handle many tasks with no task-specific training</a:t>
+            </a:r>
+            <a:endParaRPr lang="en-US" sz="1200" dirty="0"/>
+          </a:p>
+        </p:txBody>
+      </p:sp>
+      <p:sp>
+        <p:nvSpPr>
+          <p:cNvPr id="9" name="Shape 7"/>
+          <p:cNvSpPr/>
+          <p:nvPr/>
+        </p:nvSpPr>
+        <p:spPr>
+          <a:xfrm>
+            <a:off x="4663440" y="1874520"/>
+            <a:ext cx="4023360" cy="1417320"/>
+          </a:xfrm>
+          <a:prstGeom prst="roundRect">
+            <a:avLst>
+              <a:gd name="adj" fmla="val 5161"/>
+            </a:avLst>
+          </a:prstGeom>
+          <a:solidFill>
+            <a:srgbClr val="F4F5F6"/>
+          </a:solidFill>
+          <a:ln w="9525">
+            <a:solidFill>
+              <a:srgbClr val="DADDE0"/>
+            </a:solidFill>
+            <a:prstDash val="solid"/>
+          </a:ln>
+          <a:effectLst>
+            <a:outerShdw blurRad="88900" dist="25400" dir="5400000" algn="bl" rotWithShape="0">
+              <a:srgbClr val="000000">
+                <a:alpha val="10000"/>
+              </a:srgbClr>
+            </a:outerShdw>
+          </a:effectLst>
+        </p:spPr>
+      </p:sp>
+      <p:sp>
+        <p:nvSpPr>
+          <p:cNvPr id="10" name="Text 8"/>
+          <p:cNvSpPr/>
+          <p:nvPr/>
+        </p:nvSpPr>
+        <p:spPr>
+          <a:xfrm>
+            <a:off x="4892040" y="1993392"/>
+            <a:ext cx="3657600" cy="274320"/>
+          </a:xfrm>
+          <a:prstGeom prst="rect">
+            <a:avLst/>
+          </a:prstGeom>
+          <a:noFill/>
+          <a:ln/>
+        </p:spPr>
+        <p:txBody>
+          <a:bodyPr wrap="square" lIns="0" tIns="0" rIns="0" bIns="0" rtlCol="0" anchor="ctr"/>
+          <a:lstStyle/>
+          <a:p>
+            <a:pPr marL="0" indent="0">
+              <a:buNone/>
+            </a:pPr>
+            <a:r>
+              <a:rPr lang="en-US" sz="1100" b="1" kern="0" spc="100" dirty="0">
+                <a:solidFill>
+                  <a:srgbClr val="5C8A1B"/>
+                </a:solidFill>
+                <a:latin typeface="Calibri" pitchFamily="34" charset="0"/>
+                <a:ea typeface="Calibri" pitchFamily="34" charset="-122"/>
+                <a:cs typeface="Calibri" pitchFamily="34" charset="-120"/>
+              </a:rPr>
+              <a:t>REAL-WORLD APPLICATIONS</a:t>
+            </a:r>
+            <a:endParaRPr lang="en-US" sz="1100" dirty="0"/>
+          </a:p>
+        </p:txBody>
+      </p:sp>
+      <p:sp>
+        <p:nvSpPr>
+          <p:cNvPr id="11" name="Text 9"/>
+          <p:cNvSpPr/>
+          <p:nvPr/>
+        </p:nvSpPr>
+        <p:spPr>
+          <a:xfrm>
+            <a:off x="4892040" y="2286000"/>
+            <a:ext cx="1828800" cy="914400"/>
+          </a:xfrm>
+          <a:prstGeom prst="rect">
+            <a:avLst/>
+          </a:prstGeom>
+          <a:noFill/>
+          <a:ln/>
+        </p:spPr>
+        <p:txBody>
+          <a:bodyPr wrap="square" lIns="0" tIns="0" rIns="0" bIns="0" rtlCol="0" anchor="ctr"/>
+          <a:lstStyle/>
+          <a:p>
+            <a:pPr marL="342900" indent="-342900">
+              <a:spcAft>
+                <a:spcPts val="300"/>
+              </a:spcAft>
+              <a:buSzPct val="100000"/>
+              <a:buChar char="•"/>
+            </a:pPr>
+            <a:r>
+              <a:rPr lang="en-US" sz="1050" dirty="0">
+                <a:solidFill>
+                  <a:srgbClr val="26282A"/>
+                </a:solidFill>
+                <a:latin typeface="Calibri" pitchFamily="34" charset="0"/>
+                <a:ea typeface="Calibri" pitchFamily="34" charset="-122"/>
+                <a:cs typeface="Calibri" pitchFamily="34" charset="-120"/>
+              </a:rPr>
+              <a:t>Content creation</a:t>
+            </a:r>
+            <a:endParaRPr lang="en-US" sz="1050" dirty="0"/>
+          </a:p>
+          <a:p>
+            <a:pPr marL="342900" indent="-342900">
+              <a:spcAft>
+                <a:spcPts val="300"/>
+              </a:spcAft>
+              <a:buSzPct val="100000"/>
+              <a:buChar char="•"/>
+            </a:pPr>
+            <a:r>
+              <a:rPr lang="en-US" sz="1050" dirty="0">
+                <a:solidFill>
+                  <a:srgbClr val="26282A"/>
+                </a:solidFill>
+                <a:latin typeface="Calibri" pitchFamily="34" charset="0"/>
+                <a:ea typeface="Calibri" pitchFamily="34" charset="-122"/>
+                <a:cs typeface="Calibri" pitchFamily="34" charset="-120"/>
+              </a:rPr>
+              <a:t>Virtual assistants</a:t>
+            </a:r>
+            <a:endParaRPr lang="en-US" sz="1050" dirty="0"/>
+          </a:p>
+          <a:p>
+            <a:pPr marL="342900" indent="-342900">
+              <a:spcAft>
+                <a:spcPts val="300"/>
+              </a:spcAft>
+              <a:buSzPct val="100000"/>
+              <a:buChar char="•"/>
+            </a:pPr>
+            <a:r>
+              <a:rPr lang="en-US" sz="1050" dirty="0">
+                <a:solidFill>
+                  <a:srgbClr val="26282A"/>
+                </a:solidFill>
+                <a:latin typeface="Calibri" pitchFamily="34" charset="0"/>
+                <a:ea typeface="Calibri" pitchFamily="34" charset="-122"/>
+                <a:cs typeface="Calibri" pitchFamily="34" charset="-120"/>
+              </a:rPr>
+              <a:t>Sales automation</a:t>
+            </a:r>
+            <a:endParaRPr lang="en-US" sz="1050" dirty="0"/>
+          </a:p>
+          <a:p>
+            <a:pPr marL="342900" indent="-342900">
+              <a:spcAft>
+                <a:spcPts val="300"/>
+              </a:spcAft>
+              <a:buSzPct val="100000"/>
+              <a:buChar char="•"/>
+            </a:pPr>
+            <a:r>
+              <a:rPr lang="en-US" sz="1050" dirty="0">
+                <a:solidFill>
+                  <a:srgbClr val="26282A"/>
+                </a:solidFill>
+                <a:latin typeface="Calibri" pitchFamily="34" charset="0"/>
+                <a:ea typeface="Calibri" pitchFamily="34" charset="-122"/>
+                <a:cs typeface="Calibri" pitchFamily="34" charset="-120"/>
+              </a:rPr>
+              <a:t>Storytelling</a:t>
+            </a:r>
+            <a:endParaRPr lang="en-US" sz="1050" dirty="0"/>
+          </a:p>
+          <a:p>
+            <a:pPr marL="342900" indent="-342900">
+              <a:buSzPct val="100000"/>
+              <a:buChar char="•"/>
+            </a:pPr>
+            <a:r>
+              <a:rPr lang="en-US" sz="1050" dirty="0">
+                <a:solidFill>
+                  <a:srgbClr val="26282A"/>
+                </a:solidFill>
+                <a:latin typeface="Calibri" pitchFamily="34" charset="0"/>
+                <a:ea typeface="Calibri" pitchFamily="34" charset="-122"/>
+                <a:cs typeface="Calibri" pitchFamily="34" charset="-120"/>
+              </a:rPr>
+              <a:t>Translation</a:t>
+            </a:r>
+            <a:endParaRPr lang="en-US" sz="1050" dirty="0"/>
+          </a:p>
+        </p:txBody>
+      </p:sp>
+      <p:sp>
+        <p:nvSpPr>
+          <p:cNvPr id="12" name="Text 10"/>
+          <p:cNvSpPr/>
+          <p:nvPr/>
+        </p:nvSpPr>
+        <p:spPr>
+          <a:xfrm>
+            <a:off x="6812280" y="2286000"/>
+            <a:ext cx="1828800" cy="914400"/>
+          </a:xfrm>
+          <a:prstGeom prst="rect">
+            <a:avLst/>
+          </a:prstGeom>
+          <a:noFill/>
+          <a:ln/>
+        </p:spPr>
+        <p:txBody>
+          <a:bodyPr wrap="square" lIns="0" tIns="0" rIns="0" bIns="0" rtlCol="0" anchor="ctr"/>
+          <a:lstStyle/>
+          <a:p>
+            <a:pPr marL="342900" indent="-342900">
+              <a:spcAft>
+                <a:spcPts val="300"/>
+              </a:spcAft>
+              <a:buSzPct val="100000"/>
+              <a:buChar char="•"/>
+            </a:pPr>
+            <a:r>
+              <a:rPr lang="en-US" sz="1050" dirty="0">
+                <a:solidFill>
+                  <a:srgbClr val="26282A"/>
+                </a:solidFill>
+                <a:latin typeface="Calibri" pitchFamily="34" charset="0"/>
+                <a:ea typeface="Calibri" pitchFamily="34" charset="-122"/>
+                <a:cs typeface="Calibri" pitchFamily="34" charset="-120"/>
+              </a:rPr>
+              <a:t>Code generation</a:t>
+            </a:r>
+            <a:endParaRPr lang="en-US" sz="1050" dirty="0"/>
+          </a:p>
+          <a:p>
+            <a:pPr marL="342900" indent="-342900">
+              <a:spcAft>
+                <a:spcPts val="300"/>
+              </a:spcAft>
+              <a:buSzPct val="100000"/>
+              <a:buChar char="•"/>
+            </a:pPr>
+            <a:r>
+              <a:rPr lang="en-US" sz="1050" dirty="0">
+                <a:solidFill>
+                  <a:srgbClr val="26282A"/>
+                </a:solidFill>
+                <a:latin typeface="Calibri" pitchFamily="34" charset="0"/>
+                <a:ea typeface="Calibri" pitchFamily="34" charset="-122"/>
+                <a:cs typeface="Calibri" pitchFamily="34" charset="-120"/>
+              </a:rPr>
+              <a:t>Sentiment analysis</a:t>
+            </a:r>
+            <a:endParaRPr lang="en-US" sz="1050" dirty="0"/>
+          </a:p>
+          <a:p>
+            <a:pPr marL="342900" indent="-342900">
+              <a:spcAft>
+                <a:spcPts val="300"/>
+              </a:spcAft>
+              <a:buSzPct val="100000"/>
+              <a:buChar char="•"/>
+            </a:pPr>
+            <a:r>
+              <a:rPr lang="en-US" sz="1050" dirty="0">
+                <a:solidFill>
+                  <a:srgbClr val="26282A"/>
+                </a:solidFill>
+                <a:latin typeface="Calibri" pitchFamily="34" charset="0"/>
+                <a:ea typeface="Calibri" pitchFamily="34" charset="-122"/>
+                <a:cs typeface="Calibri" pitchFamily="34" charset="-120"/>
+              </a:rPr>
+              <a:t>Transcription</a:t>
+            </a:r>
+            <a:endParaRPr lang="en-US" sz="1050" dirty="0"/>
+          </a:p>
+          <a:p>
+            <a:pPr marL="342900" indent="-342900">
+              <a:spcAft>
+                <a:spcPts val="300"/>
+              </a:spcAft>
+              <a:buSzPct val="100000"/>
+              <a:buChar char="•"/>
+            </a:pPr>
+            <a:r>
+              <a:rPr lang="en-US" sz="1050" dirty="0">
+                <a:solidFill>
+                  <a:srgbClr val="26282A"/>
+                </a:solidFill>
+                <a:latin typeface="Calibri" pitchFamily="34" charset="0"/>
+                <a:ea typeface="Calibri" pitchFamily="34" charset="-122"/>
+                <a:cs typeface="Calibri" pitchFamily="34" charset="-120"/>
+              </a:rPr>
+              <a:t>Candidate screening</a:t>
+            </a:r>
+            <a:endParaRPr lang="en-US" sz="1050" dirty="0"/>
+          </a:p>
+          <a:p>
+            <a:pPr marL="342900" indent="-342900">
+              <a:buSzPct val="100000"/>
+              <a:buChar char="•"/>
+            </a:pPr>
+            <a:r>
+              <a:rPr lang="en-US" sz="1050" dirty="0">
+                <a:solidFill>
+                  <a:srgbClr val="26282A"/>
+                </a:solidFill>
+                <a:latin typeface="Calibri" pitchFamily="34" charset="0"/>
+                <a:ea typeface="Calibri" pitchFamily="34" charset="-122"/>
+                <a:cs typeface="Calibri" pitchFamily="34" charset="-120"/>
+              </a:rPr>
+              <a:t>Cyber-attack prevention</a:t>
+            </a:r>
+            <a:endParaRPr lang="en-US" sz="1050" dirty="0"/>
+          </a:p>
+        </p:txBody>
+      </p:sp>
+      <p:sp>
+        <p:nvSpPr>
+          <p:cNvPr id="13" name="Text 11"/>
+          <p:cNvSpPr/>
+          <p:nvPr/>
+        </p:nvSpPr>
+        <p:spPr>
+          <a:xfrm>
+            <a:off x="457200" y="3429000"/>
+            <a:ext cx="8229600" cy="228600"/>
+          </a:xfrm>
+          <a:prstGeom prst="rect">
+            <a:avLst/>
+          </a:prstGeom>
+          <a:noFill/>
+          <a:ln/>
+        </p:spPr>
+        <p:txBody>
+          <a:bodyPr wrap="square" lIns="0" tIns="0" rIns="0" bIns="0" rtlCol="0" anchor="ctr"/>
+          <a:lstStyle/>
+          <a:p>
+            <a:pPr marL="0" indent="0" algn="ctr">
+              <a:buNone/>
+            </a:pPr>
+            <a:r>
+              <a:rPr lang="en-US" sz="1100" b="1" kern="0" spc="100" dirty="0">
+                <a:solidFill>
+                  <a:srgbClr val="5C8A1B"/>
+                </a:solidFill>
+                <a:latin typeface="Calibri" pitchFamily="34" charset="0"/>
+                <a:ea typeface="Calibri" pitchFamily="34" charset="-122"/>
+                <a:cs typeface="Calibri" pitchFamily="34" charset="-120"/>
+              </a:rPr>
+              <a:t>HOW LLMs HAVE EVOLVED</a:t>
+            </a:r>
+            <a:endParaRPr lang="en-US" sz="1100" dirty="0"/>
+          </a:p>
+        </p:txBody>
+      </p:sp>
+      <p:sp>
+        <p:nvSpPr>
+          <p:cNvPr id="14" name="Shape 12"/>
+          <p:cNvSpPr/>
+          <p:nvPr/>
+        </p:nvSpPr>
+        <p:spPr>
+          <a:xfrm>
+            <a:off x="1188720" y="4114800"/>
+            <a:ext cx="6675120" cy="0"/>
+          </a:xfrm>
+          <a:prstGeom prst="line">
+            <a:avLst/>
+          </a:prstGeom>
+          <a:noFill/>
+          <a:ln w="25400">
+            <a:solidFill>
+              <a:srgbClr val="86BC25"/>
+            </a:solidFill>
+            <a:prstDash val="solid"/>
+          </a:ln>
+        </p:spPr>
+      </p:sp>
+      <p:sp>
+        <p:nvSpPr>
+          <p:cNvPr id="15" name="Text 13"/>
+          <p:cNvSpPr/>
+          <p:nvPr/>
+        </p:nvSpPr>
+        <p:spPr>
+          <a:xfrm>
+            <a:off x="411480" y="3767328"/>
+            <a:ext cx="1554480" cy="274320"/>
+          </a:xfrm>
+          <a:prstGeom prst="rect">
+            <a:avLst/>
+          </a:prstGeom>
+          <a:noFill/>
+          <a:ln/>
+        </p:spPr>
+        <p:txBody>
+          <a:bodyPr wrap="square" lIns="0" tIns="0" rIns="0" bIns="0" rtlCol="0" anchor="ctr"/>
+          <a:lstStyle/>
+          <a:p>
+            <a:pPr marL="0" indent="0" algn="ctr">
+              <a:buNone/>
+            </a:pPr>
+            <a:r>
+              <a:rPr lang="en-US" sz="1200" b="1" dirty="0">
+                <a:solidFill>
+                  <a:srgbClr val="26282A"/>
+                </a:solidFill>
+                <a:latin typeface="Calibri" pitchFamily="34" charset="0"/>
+                <a:ea typeface="Calibri" pitchFamily="34" charset="-122"/>
+                <a:cs typeface="Calibri" pitchFamily="34" charset="-120"/>
+              </a:rPr>
+              <a:t>BERT</a:t>
+            </a:r>
+            <a:endParaRPr lang="en-US" sz="1200" dirty="0"/>
+          </a:p>
+        </p:txBody>
+      </p:sp>
+      <p:sp>
+        <p:nvSpPr>
+          <p:cNvPr id="16" name="Shape 14"/>
+          <p:cNvSpPr/>
+          <p:nvPr/>
+        </p:nvSpPr>
+        <p:spPr>
+          <a:xfrm>
+            <a:off x="1115568" y="4041648"/>
+            <a:ext cx="146304" cy="146304"/>
+          </a:xfrm>
+          <a:prstGeom prst="ellipse">
+            <a:avLst/>
+          </a:prstGeom>
+          <a:solidFill>
+            <a:srgbClr val="86BC25"/>
+          </a:solidFill>
+          <a:ln w="19050">
+            <a:solidFill>
+              <a:srgbClr val="FFFFFF"/>
+            </a:solidFill>
+            <a:prstDash val="solid"/>
+          </a:ln>
+        </p:spPr>
+      </p:sp>
+      <p:sp>
+        <p:nvSpPr>
+          <p:cNvPr id="17" name="Text 15"/>
+          <p:cNvSpPr/>
+          <p:nvPr/>
+        </p:nvSpPr>
+        <p:spPr>
+          <a:xfrm>
+            <a:off x="411480" y="4206240"/>
+            <a:ext cx="1554480" cy="256032"/>
+          </a:xfrm>
+          <a:prstGeom prst="rect">
+            <a:avLst/>
+          </a:prstGeom>
+          <a:noFill/>
+          <a:ln/>
+        </p:spPr>
+        <p:txBody>
+          <a:bodyPr wrap="square" lIns="0" tIns="0" rIns="0" bIns="0" rtlCol="0" anchor="ctr"/>
+          <a:lstStyle/>
+          <a:p>
+            <a:pPr marL="0" indent="0" algn="ctr">
+              <a:buNone/>
+            </a:pPr>
+            <a:r>
+              <a:rPr lang="en-US" sz="1100" dirty="0">
+                <a:solidFill>
+                  <a:srgbClr val="44474A"/>
+                </a:solidFill>
+                <a:latin typeface="Calibri" pitchFamily="34" charset="0"/>
+                <a:ea typeface="Calibri" pitchFamily="34" charset="-122"/>
+                <a:cs typeface="Calibri" pitchFamily="34" charset="-120"/>
+              </a:rPr>
+              <a:t>2018</a:t>
+            </a:r>
+            <a:endParaRPr lang="en-US" sz="1100" dirty="0"/>
+          </a:p>
+        </p:txBody>
+      </p:sp>
+      <p:sp>
+        <p:nvSpPr>
+          <p:cNvPr id="18" name="Text 16"/>
+          <p:cNvSpPr/>
+          <p:nvPr/>
+        </p:nvSpPr>
+        <p:spPr>
+          <a:xfrm>
+            <a:off x="2080260" y="3767328"/>
+            <a:ext cx="1554480" cy="274320"/>
+          </a:xfrm>
+          <a:prstGeom prst="rect">
+            <a:avLst/>
+          </a:prstGeom>
+          <a:noFill/>
+          <a:ln/>
+        </p:spPr>
+        <p:txBody>
+          <a:bodyPr wrap="square" lIns="0" tIns="0" rIns="0" bIns="0" rtlCol="0" anchor="ctr"/>
+          <a:lstStyle/>
+          <a:p>
+            <a:pPr marL="0" indent="0" algn="ctr">
+              <a:buNone/>
+            </a:pPr>
+            <a:r>
+              <a:rPr lang="en-US" sz="1200" b="1" dirty="0">
+                <a:solidFill>
+                  <a:srgbClr val="26282A"/>
+                </a:solidFill>
+                <a:latin typeface="Calibri" pitchFamily="34" charset="0"/>
+                <a:ea typeface="Calibri" pitchFamily="34" charset="-122"/>
+                <a:cs typeface="Calibri" pitchFamily="34" charset="-120"/>
+              </a:rPr>
+              <a:t>GPT-3</a:t>
+            </a:r>
+            <a:endParaRPr lang="en-US" sz="1200" dirty="0"/>
+          </a:p>
+        </p:txBody>
+      </p:sp>
+      <p:sp>
+        <p:nvSpPr>
+          <p:cNvPr id="19" name="Shape 17"/>
+          <p:cNvSpPr/>
+          <p:nvPr/>
+        </p:nvSpPr>
+        <p:spPr>
+          <a:xfrm>
+            <a:off x="2784348" y="4041648"/>
+            <a:ext cx="146304" cy="146304"/>
+          </a:xfrm>
+          <a:prstGeom prst="ellipse">
+            <a:avLst/>
+          </a:prstGeom>
+          <a:solidFill>
+            <a:srgbClr val="86BC25"/>
+          </a:solidFill>
+          <a:ln w="19050">
+            <a:solidFill>
+              <a:srgbClr val="FFFFFF"/>
+            </a:solidFill>
+            <a:prstDash val="solid"/>
+          </a:ln>
+        </p:spPr>
+      </p:sp>
+      <p:sp>
+        <p:nvSpPr>
+          <p:cNvPr id="20" name="Text 18"/>
+          <p:cNvSpPr/>
+          <p:nvPr/>
+        </p:nvSpPr>
+        <p:spPr>
+          <a:xfrm>
+            <a:off x="2080260" y="4206240"/>
+            <a:ext cx="1554480" cy="256032"/>
+          </a:xfrm>
+          <a:prstGeom prst="rect">
+            <a:avLst/>
+          </a:prstGeom>
+          <a:noFill/>
+          <a:ln/>
+        </p:spPr>
+        <p:txBody>
+          <a:bodyPr wrap="square" lIns="0" tIns="0" rIns="0" bIns="0" rtlCol="0" anchor="ctr"/>
+          <a:lstStyle/>
+          <a:p>
+            <a:pPr marL="0" indent="0" algn="ctr">
+              <a:buNone/>
+            </a:pPr>
+            <a:r>
+              <a:rPr lang="en-US" sz="1100" dirty="0">
+                <a:solidFill>
+                  <a:srgbClr val="44474A"/>
+                </a:solidFill>
+                <a:latin typeface="Calibri" pitchFamily="34" charset="0"/>
+                <a:ea typeface="Calibri" pitchFamily="34" charset="-122"/>
+                <a:cs typeface="Calibri" pitchFamily="34" charset="-120"/>
+              </a:rPr>
+              <a:t>2020</a:t>
+            </a:r>
+            <a:endParaRPr lang="en-US" sz="1100" dirty="0"/>
+          </a:p>
+        </p:txBody>
+      </p:sp>
+      <p:sp>
+        <p:nvSpPr>
+          <p:cNvPr id="21" name="Text 19"/>
+          <p:cNvSpPr/>
+          <p:nvPr/>
+        </p:nvSpPr>
+        <p:spPr>
+          <a:xfrm>
+            <a:off x="3749040" y="3767328"/>
+            <a:ext cx="1554480" cy="274320"/>
+          </a:xfrm>
+          <a:prstGeom prst="rect">
+            <a:avLst/>
+          </a:prstGeom>
+          <a:noFill/>
+          <a:ln/>
+        </p:spPr>
+        <p:txBody>
+          <a:bodyPr wrap="square" lIns="0" tIns="0" rIns="0" bIns="0" rtlCol="0" anchor="ctr"/>
+          <a:lstStyle/>
+          <a:p>
+            <a:pPr marL="0" indent="0" algn="ctr">
+              <a:buNone/>
+            </a:pPr>
+            <a:r>
+              <a:rPr lang="en-US" sz="1200" b="1" dirty="0">
+                <a:solidFill>
+                  <a:srgbClr val="26282A"/>
+                </a:solidFill>
+                <a:latin typeface="Calibri" pitchFamily="34" charset="0"/>
+                <a:ea typeface="Calibri" pitchFamily="34" charset="-122"/>
+                <a:cs typeface="Calibri" pitchFamily="34" charset="-120"/>
+              </a:rPr>
+              <a:t>ChatGPT</a:t>
+            </a:r>
+            <a:endParaRPr lang="en-US" sz="1200" dirty="0"/>
+          </a:p>
+        </p:txBody>
+      </p:sp>
+      <p:sp>
+        <p:nvSpPr>
+          <p:cNvPr id="22" name="Shape 20"/>
+          <p:cNvSpPr/>
+          <p:nvPr/>
+        </p:nvSpPr>
+        <p:spPr>
+          <a:xfrm>
+            <a:off x="4453128" y="4041648"/>
+            <a:ext cx="146304" cy="146304"/>
+          </a:xfrm>
+          <a:prstGeom prst="ellipse">
+            <a:avLst/>
+          </a:prstGeom>
+          <a:solidFill>
+            <a:srgbClr val="86BC25"/>
+          </a:solidFill>
+          <a:ln w="19050">
+            <a:solidFill>
+              <a:srgbClr val="FFFFFF"/>
+            </a:solidFill>
+            <a:prstDash val="solid"/>
+          </a:ln>
+        </p:spPr>
+      </p:sp>
+      <p:sp>
+        <p:nvSpPr>
+          <p:cNvPr id="23" name="Text 21"/>
+          <p:cNvSpPr/>
+          <p:nvPr/>
+        </p:nvSpPr>
+        <p:spPr>
+          <a:xfrm>
+            <a:off x="3749040" y="4206240"/>
+            <a:ext cx="1554480" cy="256032"/>
+          </a:xfrm>
+          <a:prstGeom prst="rect">
+            <a:avLst/>
+          </a:prstGeom>
+          <a:noFill/>
+          <a:ln/>
+        </p:spPr>
+        <p:txBody>
+          <a:bodyPr wrap="square" lIns="0" tIns="0" rIns="0" bIns="0" rtlCol="0" anchor="ctr"/>
+          <a:lstStyle/>
+          <a:p>
+            <a:pPr marL="0" indent="0" algn="ctr">
+              <a:buNone/>
+            </a:pPr>
+            <a:r>
+              <a:rPr lang="en-US" sz="1100" dirty="0">
+                <a:solidFill>
+                  <a:srgbClr val="44474A"/>
+                </a:solidFill>
+                <a:latin typeface="Calibri" pitchFamily="34" charset="0"/>
+                <a:ea typeface="Calibri" pitchFamily="34" charset="-122"/>
+                <a:cs typeface="Calibri" pitchFamily="34" charset="-120"/>
+              </a:rPr>
+              <a:t>2022</a:t>
+            </a:r>
+            <a:endParaRPr lang="en-US" sz="1100" dirty="0"/>
+          </a:p>
+        </p:txBody>
+      </p:sp>
+      <p:sp>
+        <p:nvSpPr>
+          <p:cNvPr id="24" name="Text 22"/>
+          <p:cNvSpPr/>
+          <p:nvPr/>
+        </p:nvSpPr>
+        <p:spPr>
+          <a:xfrm>
+            <a:off x="5417820" y="3767328"/>
+            <a:ext cx="1554480" cy="274320"/>
+          </a:xfrm>
+          <a:prstGeom prst="rect">
+            <a:avLst/>
+          </a:prstGeom>
+          <a:noFill/>
+          <a:ln/>
+        </p:spPr>
+        <p:txBody>
+          <a:bodyPr wrap="square" lIns="0" tIns="0" rIns="0" bIns="0" rtlCol="0" anchor="ctr"/>
+          <a:lstStyle/>
+          <a:p>
+            <a:pPr marL="0" indent="0" algn="ctr">
+              <a:buNone/>
+            </a:pPr>
+            <a:r>
+              <a:rPr lang="en-US" sz="1200" b="1" dirty="0">
+                <a:solidFill>
+                  <a:srgbClr val="26282A"/>
+                </a:solidFill>
+                <a:latin typeface="Calibri" pitchFamily="34" charset="0"/>
+                <a:ea typeface="Calibri" pitchFamily="34" charset="-122"/>
+                <a:cs typeface="Calibri" pitchFamily="34" charset="-120"/>
+              </a:rPr>
+              <a:t>GPT-4</a:t>
+            </a:r>
+            <a:endParaRPr lang="en-US" sz="1200" dirty="0"/>
+          </a:p>
+        </p:txBody>
+      </p:sp>
+      <p:sp>
+        <p:nvSpPr>
+          <p:cNvPr id="25" name="Shape 23"/>
+          <p:cNvSpPr/>
+          <p:nvPr/>
+        </p:nvSpPr>
+        <p:spPr>
+          <a:xfrm>
+            <a:off x="6121908" y="4041648"/>
+            <a:ext cx="146304" cy="146304"/>
+          </a:xfrm>
+          <a:prstGeom prst="ellipse">
+            <a:avLst/>
+          </a:prstGeom>
+          <a:solidFill>
+            <a:srgbClr val="86BC25"/>
+          </a:solidFill>
+          <a:ln w="19050">
+            <a:solidFill>
+              <a:srgbClr val="FFFFFF"/>
+            </a:solidFill>
+            <a:prstDash val="solid"/>
+          </a:ln>
+        </p:spPr>
+      </p:sp>
+      <p:sp>
+        <p:nvSpPr>
+          <p:cNvPr id="26" name="Text 24"/>
+          <p:cNvSpPr/>
+          <p:nvPr/>
+        </p:nvSpPr>
+        <p:spPr>
+          <a:xfrm>
+            <a:off x="5417820" y="4206240"/>
+            <a:ext cx="1554480" cy="256032"/>
+          </a:xfrm>
+          <a:prstGeom prst="rect">
+            <a:avLst/>
+          </a:prstGeom>
+          <a:noFill/>
+          <a:ln/>
+        </p:spPr>
+        <p:txBody>
+          <a:bodyPr wrap="square" lIns="0" tIns="0" rIns="0" bIns="0" rtlCol="0" anchor="ctr"/>
+          <a:lstStyle/>
+          <a:p>
+            <a:pPr marL="0" indent="0" algn="ctr">
+              <a:buNone/>
+            </a:pPr>
+            <a:r>
+              <a:rPr lang="en-US" sz="1100" dirty="0">
+                <a:solidFill>
+                  <a:srgbClr val="44474A"/>
+                </a:solidFill>
+                <a:latin typeface="Calibri" pitchFamily="34" charset="0"/>
+                <a:ea typeface="Calibri" pitchFamily="34" charset="-122"/>
+                <a:cs typeface="Calibri" pitchFamily="34" charset="-120"/>
+              </a:rPr>
+              <a:t>2023</a:t>
+            </a:r>
+            <a:endParaRPr lang="en-US" sz="1100" dirty="0"/>
+          </a:p>
+        </p:txBody>
+      </p:sp>
+      <p:sp>
+        <p:nvSpPr>
+          <p:cNvPr id="27" name="Text 25"/>
+          <p:cNvSpPr/>
+          <p:nvPr/>
+        </p:nvSpPr>
+        <p:spPr>
+          <a:xfrm>
+            <a:off x="7086600" y="3767328"/>
+            <a:ext cx="1554480" cy="274320"/>
+          </a:xfrm>
+          <a:prstGeom prst="rect">
+            <a:avLst/>
+          </a:prstGeom>
+          <a:noFill/>
+          <a:ln/>
+        </p:spPr>
+        <p:txBody>
+          <a:bodyPr wrap="square" lIns="0" tIns="0" rIns="0" bIns="0" rtlCol="0" anchor="ctr"/>
+          <a:lstStyle/>
+          <a:p>
+            <a:pPr marL="0" indent="0" algn="ctr">
+              <a:buNone/>
+            </a:pPr>
+            <a:r>
+              <a:rPr lang="en-US" sz="1200" b="1" dirty="0">
+                <a:solidFill>
+                  <a:srgbClr val="26282A"/>
+                </a:solidFill>
+                <a:latin typeface="Calibri" pitchFamily="34" charset="0"/>
+                <a:ea typeface="Calibri" pitchFamily="34" charset="-122"/>
+                <a:cs typeface="Calibri" pitchFamily="34" charset="-120"/>
+              </a:rPr>
+              <a:t>Multimodal</a:t>
+            </a:r>
+            <a:endParaRPr lang="en-US" sz="1200" dirty="0"/>
+          </a:p>
+        </p:txBody>
+      </p:sp>
+      <p:sp>
+        <p:nvSpPr>
+          <p:cNvPr id="28" name="Shape 26"/>
+          <p:cNvSpPr/>
+          <p:nvPr/>
+        </p:nvSpPr>
+        <p:spPr>
+          <a:xfrm>
+            <a:off x="7790688" y="4041648"/>
+            <a:ext cx="146304" cy="146304"/>
+          </a:xfrm>
+          <a:prstGeom prst="ellipse">
+            <a:avLst/>
+          </a:prstGeom>
+          <a:solidFill>
+            <a:srgbClr val="86BC25"/>
+          </a:solidFill>
+          <a:ln w="19050">
+            <a:solidFill>
+              <a:srgbClr val="FFFFFF"/>
+            </a:solidFill>
+            <a:prstDash val="solid"/>
+          </a:ln>
+        </p:spPr>
+      </p:sp>
+      <p:sp>
+        <p:nvSpPr>
+          <p:cNvPr id="29" name="Text 27"/>
+          <p:cNvSpPr/>
+          <p:nvPr/>
+        </p:nvSpPr>
+        <p:spPr>
+          <a:xfrm>
+            <a:off x="7086600" y="4206240"/>
+            <a:ext cx="1554480" cy="256032"/>
+          </a:xfrm>
+          <a:prstGeom prst="rect">
+            <a:avLst/>
+          </a:prstGeom>
+          <a:noFill/>
+          <a:ln/>
+        </p:spPr>
+        <p:txBody>
+          <a:bodyPr wrap="square" lIns="0" tIns="0" rIns="0" bIns="0" rtlCol="0" anchor="ctr"/>
+          <a:lstStyle/>
+          <a:p>
+            <a:pPr marL="0" indent="0" algn="ctr">
+              <a:buNone/>
+            </a:pPr>
+            <a:r>
+              <a:rPr lang="en-US" sz="1100" dirty="0">
+                <a:solidFill>
+                  <a:srgbClr val="44474A"/>
+                </a:solidFill>
+                <a:latin typeface="Calibri" pitchFamily="34" charset="0"/>
+                <a:ea typeface="Calibri" pitchFamily="34" charset="-122"/>
+                <a:cs typeface="Calibri" pitchFamily="34" charset="-120"/>
+              </a:rPr>
+              <a:t>2024–25</a:t>
+            </a:r>
+            <a:endParaRPr lang="en-US" sz="1100" dirty="0"/>
+          </a:p>
+        </p:txBody>
+      </p:sp>
+      <p:sp>
+        <p:nvSpPr>
+          <p:cNvPr id="30" name="Text 28"/>
+          <p:cNvSpPr/>
+          <p:nvPr/>
+        </p:nvSpPr>
+        <p:spPr>
+          <a:xfrm>
+            <a:off x="457200" y="4873752"/>
+            <a:ext cx="5486400" cy="228600"/>
+          </a:xfrm>
+          <a:prstGeom prst="rect">
+            <a:avLst/>
+          </a:prstGeom>
+          <a:noFill/>
+          <a:ln/>
+        </p:spPr>
+        <p:txBody>
+          <a:bodyPr wrap="square" lIns="0" tIns="0" rIns="0" bIns="0" rtlCol="0" anchor="ctr"/>
+          <a:lstStyle/>
+          <a:p>
+            <a:pPr marL="0" indent="0">
+              <a:buNone/>
+            </a:pPr>
+            <a:r>
+              <a:rPr lang="en-US" sz="800" dirty="0">
+                <a:solidFill>
+                  <a:srgbClr val="7A7D81"/>
+                </a:solidFill>
+                <a:latin typeface="Calibri" pitchFamily="34" charset="0"/>
+                <a:ea typeface="Calibri" pitchFamily="34" charset="-122"/>
+                <a:cs typeface="Calibri" pitchFamily="34" charset="-120"/>
+              </a:rPr>
+              <a:t>Basics of AI/ML &amp; Prompt Engineering</a:t>
+            </a:r>
+            <a:endParaRPr lang="en-US" sz="800" dirty="0"/>
+          </a:p>
+        </p:txBody>
+      </p:sp>
+      <p:sp>
+        <p:nvSpPr>
+          <p:cNvPr id="31" name="Text 29"/>
+          <p:cNvSpPr/>
+          <p:nvPr/>
+        </p:nvSpPr>
+        <p:spPr>
+          <a:xfrm>
+            <a:off x="8321040" y="4873752"/>
+            <a:ext cx="365760" cy="228600"/>
+          </a:xfrm>
+          <a:prstGeom prst="rect">
+            <a:avLst/>
+          </a:prstGeom>
+          <a:noFill/>
+          <a:ln/>
+        </p:spPr>
+        <p:txBody>
+          <a:bodyPr wrap="square" lIns="0" tIns="0" rIns="0" bIns="0" rtlCol="0" anchor="ctr"/>
+          <a:lstStyle/>
+          <a:p>
+            <a:pPr marL="0" indent="0" algn="r">
+              <a:buNone/>
+            </a:pPr>
+            <a:r>
+              <a:rPr lang="en-US" sz="800" dirty="0" smtClean="0">
+                <a:solidFill>
+                  <a:srgbClr val="7A7D81"/>
+                </a:solidFill>
+                <a:latin typeface="Calibri" pitchFamily="34" charset="0"/>
+                <a:ea typeface="Calibri" pitchFamily="34" charset="-122"/>
+                <a:cs typeface="Calibri" pitchFamily="34" charset="-120"/>
+              </a:rPr>
+              <a:t>11</a:t>
+            </a:r>
+            <a:endParaRPr lang="en-US" sz="800" dirty="0"/>
+          </a:p>
+        </p:txBody>
+      </p:sp>
+    </p:spTree>
+    <p:extLst>
+      <p:ext uri="{BB962C8B-B14F-4D97-AF65-F5344CB8AC3E}">
+        <p14:creationId xmlns:p14="http://schemas.microsoft.com/office/powerpoint/2010/main" val="3492420104"/>
+      </p:ext>
+    </p:extLst>
+  </p:cSld>
+  <p:clrMapOvr>
+    <a:masterClrMapping/>
+  </p:clrMapOvr>
+</p:sld>
+</file>
+
+<file path=ppt/slides/slide32.xml><?xml version="1.0" encoding="utf-8"?>
+<p:sld xmlns:a="http://schemas.openxmlformats.org/drawingml/2006/main" xmlns:r="http://schemas.openxmlformats.org/officeDocument/2006/relationships" xmlns:p="http://schemas.openxmlformats.org/presentationml/2006/main">
+  <p:cSld>
+    <p:spTree>
+      <p:nvGrpSpPr>
+        <p:cNvPr id="1" name=""/>
+        <p:cNvGrpSpPr/>
+        <p:nvPr/>
+      </p:nvGrpSpPr>
+      <p:grpSpPr>
+        <a:xfrm>
+          <a:off x="0" y="0"/>
+          <a:ext cx="0" cy="0"/>
+          <a:chOff x="0" y="0"/>
+          <a:chExt cx="0" cy="0"/>
+        </a:xfrm>
+      </p:grpSpPr>
+      <p:sp>
+        <p:nvSpPr>
+          <p:cNvPr id="2" name="Shape 0"/>
+          <p:cNvSpPr/>
+          <p:nvPr/>
+        </p:nvSpPr>
+        <p:spPr>
+          <a:xfrm>
+            <a:off x="457200" y="402336"/>
+            <a:ext cx="109728" cy="109728"/>
+          </a:xfrm>
+          <a:prstGeom prst="ellipse">
+            <a:avLst/>
+          </a:prstGeom>
+          <a:solidFill>
+            <a:srgbClr val="86BC25"/>
+          </a:solidFill>
+          <a:ln/>
+        </p:spPr>
+      </p:sp>
+      <p:sp>
+        <p:nvSpPr>
+          <p:cNvPr id="3" name="Text 1"/>
+          <p:cNvSpPr/>
+          <p:nvPr/>
+        </p:nvSpPr>
+        <p:spPr>
+          <a:xfrm>
+            <a:off x="658368" y="329184"/>
+            <a:ext cx="7955280" cy="256032"/>
+          </a:xfrm>
+          <a:prstGeom prst="rect">
+            <a:avLst/>
+          </a:prstGeom>
+          <a:noFill/>
+          <a:ln/>
+        </p:spPr>
+        <p:txBody>
+          <a:bodyPr wrap="square" lIns="0" tIns="0" rIns="0" bIns="0" rtlCol="0" anchor="ctr"/>
+          <a:lstStyle/>
+          <a:p>
+            <a:pPr marL="0" indent="0">
+              <a:buNone/>
+            </a:pPr>
+            <a:r>
+              <a:rPr lang="en-US" sz="1100" b="1" kern="0" spc="200" dirty="0">
+                <a:solidFill>
+                  <a:srgbClr val="5C8A1B"/>
+                </a:solidFill>
+                <a:latin typeface="Calibri" pitchFamily="34" charset="0"/>
+                <a:ea typeface="Calibri" pitchFamily="34" charset="-122"/>
+                <a:cs typeface="Calibri" pitchFamily="34" charset="-120"/>
+              </a:rPr>
+              <a:t>MODULE 3 · GENERATIVE AI &amp; LLMS</a:t>
+            </a:r>
+            <a:endParaRPr lang="en-US" sz="1100" dirty="0"/>
+          </a:p>
+        </p:txBody>
+      </p:sp>
+      <p:sp>
+        <p:nvSpPr>
+          <p:cNvPr id="4" name="Text 2"/>
+          <p:cNvSpPr/>
+          <p:nvPr/>
+        </p:nvSpPr>
+        <p:spPr>
+          <a:xfrm>
+            <a:off x="457200" y="603504"/>
+            <a:ext cx="8229600" cy="640080"/>
+          </a:xfrm>
+          <a:prstGeom prst="rect">
+            <a:avLst/>
+          </a:prstGeom>
+          <a:noFill/>
+          <a:ln/>
+        </p:spPr>
+        <p:txBody>
+          <a:bodyPr wrap="square" lIns="0" tIns="0" rIns="0" bIns="0" rtlCol="0" anchor="ctr"/>
+          <a:lstStyle/>
+          <a:p>
+            <a:pPr marL="0" indent="0">
+              <a:buNone/>
+            </a:pPr>
+            <a:r>
+              <a:rPr lang="en-US" sz="2900" b="1" dirty="0">
+                <a:solidFill>
+                  <a:srgbClr val="26282A"/>
+                </a:solidFill>
+                <a:latin typeface="Cambria" pitchFamily="34" charset="0"/>
+                <a:ea typeface="Cambria" pitchFamily="34" charset="-122"/>
+                <a:cs typeface="Cambria" pitchFamily="34" charset="-120"/>
+              </a:rPr>
+              <a:t>Tokenization — how text becomes numbers</a:t>
+            </a:r>
+            <a:endParaRPr lang="en-US" sz="2900" dirty="0"/>
+          </a:p>
+        </p:txBody>
+      </p:sp>
+      <p:sp>
+        <p:nvSpPr>
+          <p:cNvPr id="5" name="Shape 3"/>
+          <p:cNvSpPr/>
+          <p:nvPr/>
+        </p:nvSpPr>
+        <p:spPr>
+          <a:xfrm>
+            <a:off x="457200" y="1828800"/>
+            <a:ext cx="1920240" cy="1600200"/>
+          </a:xfrm>
+          <a:prstGeom prst="roundRect">
+            <a:avLst>
+              <a:gd name="adj" fmla="val 4571"/>
+            </a:avLst>
+          </a:prstGeom>
+          <a:solidFill>
+            <a:srgbClr val="F4F5F6"/>
+          </a:solidFill>
+          <a:ln w="9525">
+            <a:solidFill>
+              <a:srgbClr val="DADDE0"/>
+            </a:solidFill>
+            <a:prstDash val="solid"/>
+          </a:ln>
+          <a:effectLst>
+            <a:outerShdw blurRad="88900" dist="25400" dir="5400000" algn="bl" rotWithShape="0">
+              <a:srgbClr val="000000">
+                <a:alpha val="10000"/>
+              </a:srgbClr>
+            </a:outerShdw>
+          </a:effectLst>
+        </p:spPr>
+      </p:sp>
+      <p:sp>
+        <p:nvSpPr>
+          <p:cNvPr id="6" name="Shape 4"/>
+          <p:cNvSpPr/>
+          <p:nvPr/>
+        </p:nvSpPr>
+        <p:spPr>
+          <a:xfrm>
+            <a:off x="1211580" y="1993392"/>
+            <a:ext cx="411480" cy="411480"/>
+          </a:xfrm>
+          <a:prstGeom prst="ellipse">
+            <a:avLst/>
+          </a:prstGeom>
+          <a:solidFill>
+            <a:srgbClr val="86BC25"/>
+          </a:solidFill>
+          <a:ln/>
+        </p:spPr>
+      </p:sp>
+      <p:sp>
+        <p:nvSpPr>
+          <p:cNvPr id="7" name="Text 5"/>
+          <p:cNvSpPr/>
+          <p:nvPr/>
+        </p:nvSpPr>
+        <p:spPr>
+          <a:xfrm>
+            <a:off x="1211580" y="1993392"/>
+            <a:ext cx="411480" cy="411480"/>
+          </a:xfrm>
+          <a:prstGeom prst="rect">
+            <a:avLst/>
+          </a:prstGeom>
+          <a:noFill/>
+          <a:ln/>
+        </p:spPr>
+        <p:txBody>
+          <a:bodyPr wrap="square" lIns="0" tIns="0" rIns="0" bIns="0" rtlCol="0" anchor="ctr"/>
+          <a:lstStyle/>
+          <a:p>
+            <a:pPr marL="0" indent="0" algn="ctr">
+              <a:buNone/>
+            </a:pPr>
+            <a:r>
+              <a:rPr lang="en-US" sz="1800" b="1" dirty="0">
+                <a:solidFill>
+                  <a:srgbClr val="FFFFFF"/>
+                </a:solidFill>
+                <a:latin typeface="Cambria" pitchFamily="34" charset="0"/>
+                <a:ea typeface="Cambria" pitchFamily="34" charset="-122"/>
+                <a:cs typeface="Cambria" pitchFamily="34" charset="-120"/>
+              </a:rPr>
+              <a:t>1</a:t>
+            </a:r>
+            <a:endParaRPr lang="en-US" sz="1800" dirty="0"/>
+          </a:p>
+        </p:txBody>
+      </p:sp>
+      <p:sp>
+        <p:nvSpPr>
+          <p:cNvPr id="8" name="Text 6"/>
+          <p:cNvSpPr/>
+          <p:nvPr/>
+        </p:nvSpPr>
+        <p:spPr>
+          <a:xfrm>
+            <a:off x="502920" y="2468880"/>
+            <a:ext cx="1828800" cy="274320"/>
+          </a:xfrm>
+          <a:prstGeom prst="rect">
+            <a:avLst/>
+          </a:prstGeom>
+          <a:noFill/>
+          <a:ln/>
+        </p:spPr>
+        <p:txBody>
+          <a:bodyPr wrap="square" lIns="0" tIns="0" rIns="0" bIns="0" rtlCol="0" anchor="ctr"/>
+          <a:lstStyle/>
+          <a:p>
+            <a:pPr marL="0" indent="0" algn="ctr">
+              <a:buNone/>
+            </a:pPr>
+            <a:r>
+              <a:rPr lang="en-US" sz="1250" b="1" dirty="0">
+                <a:solidFill>
+                  <a:srgbClr val="26282A"/>
+                </a:solidFill>
+                <a:latin typeface="Calibri" pitchFamily="34" charset="0"/>
+                <a:ea typeface="Calibri" pitchFamily="34" charset="-122"/>
+                <a:cs typeface="Calibri" pitchFamily="34" charset="-120"/>
+              </a:rPr>
+              <a:t>Input text</a:t>
+            </a:r>
+            <a:endParaRPr lang="en-US" sz="1250" dirty="0"/>
+          </a:p>
+        </p:txBody>
+      </p:sp>
+      <p:sp>
+        <p:nvSpPr>
+          <p:cNvPr id="9" name="Text 7"/>
+          <p:cNvSpPr/>
+          <p:nvPr/>
+        </p:nvSpPr>
+        <p:spPr>
+          <a:xfrm>
+            <a:off x="548640" y="2743200"/>
+            <a:ext cx="1737360" cy="640080"/>
+          </a:xfrm>
+          <a:prstGeom prst="rect">
+            <a:avLst/>
+          </a:prstGeom>
+          <a:noFill/>
+          <a:ln/>
+        </p:spPr>
+        <p:txBody>
+          <a:bodyPr wrap="square" lIns="0" tIns="0" rIns="0" bIns="0" rtlCol="0" anchor="ctr"/>
+          <a:lstStyle/>
+          <a:p>
+            <a:pPr marL="0" indent="0" algn="ctr">
+              <a:buNone/>
+            </a:pPr>
+            <a:r>
+              <a:rPr lang="en-US" sz="950" dirty="0">
+                <a:solidFill>
+                  <a:srgbClr val="44474A"/>
+                </a:solidFill>
+                <a:latin typeface="Calibri" pitchFamily="34" charset="0"/>
+                <a:ea typeface="Calibri" pitchFamily="34" charset="-122"/>
+                <a:cs typeface="Calibri" pitchFamily="34" charset="-120"/>
+              </a:rPr>
+              <a:t>Raw text goes into the tokenizer</a:t>
+            </a:r>
+            <a:endParaRPr lang="en-US" sz="950" dirty="0"/>
+          </a:p>
+        </p:txBody>
+      </p:sp>
+      <p:sp>
+        <p:nvSpPr>
+          <p:cNvPr id="10" name="Shape 8"/>
+          <p:cNvSpPr/>
+          <p:nvPr/>
+        </p:nvSpPr>
+        <p:spPr>
+          <a:xfrm>
+            <a:off x="2560320" y="1828800"/>
+            <a:ext cx="1920240" cy="1600200"/>
+          </a:xfrm>
+          <a:prstGeom prst="roundRect">
+            <a:avLst>
+              <a:gd name="adj" fmla="val 4571"/>
+            </a:avLst>
+          </a:prstGeom>
+          <a:solidFill>
+            <a:srgbClr val="F4F5F6"/>
+          </a:solidFill>
+          <a:ln w="9525">
+            <a:solidFill>
+              <a:srgbClr val="DADDE0"/>
+            </a:solidFill>
+            <a:prstDash val="solid"/>
+          </a:ln>
+          <a:effectLst>
+            <a:outerShdw blurRad="88900" dist="25400" dir="5400000" algn="bl" rotWithShape="0">
+              <a:srgbClr val="000000">
+                <a:alpha val="10000"/>
+              </a:srgbClr>
+            </a:outerShdw>
+          </a:effectLst>
+        </p:spPr>
+      </p:sp>
+      <p:sp>
+        <p:nvSpPr>
+          <p:cNvPr id="11" name="Shape 9"/>
+          <p:cNvSpPr/>
+          <p:nvPr/>
+        </p:nvSpPr>
+        <p:spPr>
+          <a:xfrm>
+            <a:off x="3314700" y="1993392"/>
+            <a:ext cx="411480" cy="411480"/>
+          </a:xfrm>
+          <a:prstGeom prst="ellipse">
+            <a:avLst/>
+          </a:prstGeom>
+          <a:solidFill>
+            <a:srgbClr val="86BC25"/>
+          </a:solidFill>
+          <a:ln/>
+        </p:spPr>
+      </p:sp>
+      <p:sp>
+        <p:nvSpPr>
+          <p:cNvPr id="12" name="Text 10"/>
+          <p:cNvSpPr/>
+          <p:nvPr/>
+        </p:nvSpPr>
+        <p:spPr>
+          <a:xfrm>
+            <a:off x="3314700" y="1993392"/>
+            <a:ext cx="411480" cy="411480"/>
+          </a:xfrm>
+          <a:prstGeom prst="rect">
+            <a:avLst/>
+          </a:prstGeom>
+          <a:noFill/>
+          <a:ln/>
+        </p:spPr>
+        <p:txBody>
+          <a:bodyPr wrap="square" lIns="0" tIns="0" rIns="0" bIns="0" rtlCol="0" anchor="ctr"/>
+          <a:lstStyle/>
+          <a:p>
+            <a:pPr marL="0" indent="0" algn="ctr">
+              <a:buNone/>
+            </a:pPr>
+            <a:r>
+              <a:rPr lang="en-US" sz="1800" b="1" dirty="0">
+                <a:solidFill>
+                  <a:srgbClr val="FFFFFF"/>
+                </a:solidFill>
+                <a:latin typeface="Cambria" pitchFamily="34" charset="0"/>
+                <a:ea typeface="Cambria" pitchFamily="34" charset="-122"/>
+                <a:cs typeface="Cambria" pitchFamily="34" charset="-120"/>
+              </a:rPr>
+              <a:t>2</a:t>
+            </a:r>
+            <a:endParaRPr lang="en-US" sz="1800" dirty="0"/>
+          </a:p>
+        </p:txBody>
+      </p:sp>
+      <p:sp>
+        <p:nvSpPr>
+          <p:cNvPr id="13" name="Text 11"/>
+          <p:cNvSpPr/>
+          <p:nvPr/>
+        </p:nvSpPr>
+        <p:spPr>
+          <a:xfrm>
+            <a:off x="2606040" y="2468880"/>
+            <a:ext cx="1828800" cy="274320"/>
+          </a:xfrm>
+          <a:prstGeom prst="rect">
+            <a:avLst/>
+          </a:prstGeom>
+          <a:noFill/>
+          <a:ln/>
+        </p:spPr>
+        <p:txBody>
+          <a:bodyPr wrap="square" lIns="0" tIns="0" rIns="0" bIns="0" rtlCol="0" anchor="ctr"/>
+          <a:lstStyle/>
+          <a:p>
+            <a:pPr marL="0" indent="0" algn="ctr">
+              <a:buNone/>
+            </a:pPr>
+            <a:r>
+              <a:rPr lang="en-US" sz="1250" b="1" dirty="0">
+                <a:solidFill>
+                  <a:srgbClr val="26282A"/>
+                </a:solidFill>
+                <a:latin typeface="Calibri" pitchFamily="34" charset="0"/>
+                <a:ea typeface="Calibri" pitchFamily="34" charset="-122"/>
+                <a:cs typeface="Calibri" pitchFamily="34" charset="-120"/>
+              </a:rPr>
+              <a:t>Tokenization</a:t>
+            </a:r>
+            <a:endParaRPr lang="en-US" sz="1250" dirty="0"/>
+          </a:p>
+        </p:txBody>
+      </p:sp>
+      <p:sp>
+        <p:nvSpPr>
+          <p:cNvPr id="14" name="Text 12"/>
+          <p:cNvSpPr/>
+          <p:nvPr/>
+        </p:nvSpPr>
+        <p:spPr>
+          <a:xfrm>
+            <a:off x="2651760" y="2743200"/>
+            <a:ext cx="1737360" cy="640080"/>
+          </a:xfrm>
+          <a:prstGeom prst="rect">
+            <a:avLst/>
+          </a:prstGeom>
+          <a:noFill/>
+          <a:ln/>
+        </p:spPr>
+        <p:txBody>
+          <a:bodyPr wrap="square" lIns="0" tIns="0" rIns="0" bIns="0" rtlCol="0" anchor="ctr"/>
+          <a:lstStyle/>
+          <a:p>
+            <a:pPr marL="0" indent="0" algn="ctr">
+              <a:buNone/>
+            </a:pPr>
+            <a:r>
+              <a:rPr lang="en-US" sz="950" dirty="0">
+                <a:solidFill>
+                  <a:srgbClr val="44474A"/>
+                </a:solidFill>
+                <a:latin typeface="Calibri" pitchFamily="34" charset="0"/>
+                <a:ea typeface="Calibri" pitchFamily="34" charset="-122"/>
+                <a:cs typeface="Calibri" pitchFamily="34" charset="-120"/>
+              </a:rPr>
+              <a:t>Split into tokens: words, sub-words or characters</a:t>
+            </a:r>
+            <a:endParaRPr lang="en-US" sz="950" dirty="0"/>
+          </a:p>
+        </p:txBody>
+      </p:sp>
+      <p:sp>
+        <p:nvSpPr>
+          <p:cNvPr id="15" name="Shape 13"/>
+          <p:cNvSpPr/>
+          <p:nvPr/>
+        </p:nvSpPr>
+        <p:spPr>
+          <a:xfrm>
+            <a:off x="4663440" y="1828800"/>
+            <a:ext cx="1920240" cy="1600200"/>
+          </a:xfrm>
+          <a:prstGeom prst="roundRect">
+            <a:avLst>
+              <a:gd name="adj" fmla="val 4571"/>
+            </a:avLst>
+          </a:prstGeom>
+          <a:solidFill>
+            <a:srgbClr val="F4F5F6"/>
+          </a:solidFill>
+          <a:ln w="9525">
+            <a:solidFill>
+              <a:srgbClr val="DADDE0"/>
+            </a:solidFill>
+            <a:prstDash val="solid"/>
+          </a:ln>
+          <a:effectLst>
+            <a:outerShdw blurRad="88900" dist="25400" dir="5400000" algn="bl" rotWithShape="0">
+              <a:srgbClr val="000000">
+                <a:alpha val="10000"/>
+              </a:srgbClr>
+            </a:outerShdw>
+          </a:effectLst>
+        </p:spPr>
+      </p:sp>
+      <p:sp>
+        <p:nvSpPr>
+          <p:cNvPr id="16" name="Shape 14"/>
+          <p:cNvSpPr/>
+          <p:nvPr/>
+        </p:nvSpPr>
+        <p:spPr>
+          <a:xfrm>
+            <a:off x="5417820" y="1993392"/>
+            <a:ext cx="411480" cy="411480"/>
+          </a:xfrm>
+          <a:prstGeom prst="ellipse">
+            <a:avLst/>
+          </a:prstGeom>
+          <a:solidFill>
+            <a:srgbClr val="86BC25"/>
+          </a:solidFill>
+          <a:ln/>
+        </p:spPr>
+      </p:sp>
+      <p:sp>
+        <p:nvSpPr>
+          <p:cNvPr id="17" name="Text 15"/>
+          <p:cNvSpPr/>
+          <p:nvPr/>
+        </p:nvSpPr>
+        <p:spPr>
+          <a:xfrm>
+            <a:off x="5417820" y="1993392"/>
+            <a:ext cx="411480" cy="411480"/>
+          </a:xfrm>
+          <a:prstGeom prst="rect">
+            <a:avLst/>
+          </a:prstGeom>
+          <a:noFill/>
+          <a:ln/>
+        </p:spPr>
+        <p:txBody>
+          <a:bodyPr wrap="square" lIns="0" tIns="0" rIns="0" bIns="0" rtlCol="0" anchor="ctr"/>
+          <a:lstStyle/>
+          <a:p>
+            <a:pPr marL="0" indent="0" algn="ctr">
+              <a:buNone/>
+            </a:pPr>
+            <a:r>
+              <a:rPr lang="en-US" sz="1800" b="1" dirty="0">
+                <a:solidFill>
+                  <a:srgbClr val="FFFFFF"/>
+                </a:solidFill>
+                <a:latin typeface="Cambria" pitchFamily="34" charset="0"/>
+                <a:ea typeface="Cambria" pitchFamily="34" charset="-122"/>
+                <a:cs typeface="Cambria" pitchFamily="34" charset="-120"/>
+              </a:rPr>
+              <a:t>3</a:t>
+            </a:r>
+            <a:endParaRPr lang="en-US" sz="1800" dirty="0"/>
+          </a:p>
+        </p:txBody>
+      </p:sp>
+      <p:sp>
+        <p:nvSpPr>
+          <p:cNvPr id="18" name="Text 16"/>
+          <p:cNvSpPr/>
+          <p:nvPr/>
+        </p:nvSpPr>
+        <p:spPr>
+          <a:xfrm>
+            <a:off x="4709160" y="2468880"/>
+            <a:ext cx="1828800" cy="274320"/>
+          </a:xfrm>
+          <a:prstGeom prst="rect">
+            <a:avLst/>
+          </a:prstGeom>
+          <a:noFill/>
+          <a:ln/>
+        </p:spPr>
+        <p:txBody>
+          <a:bodyPr wrap="square" lIns="0" tIns="0" rIns="0" bIns="0" rtlCol="0" anchor="ctr"/>
+          <a:lstStyle/>
+          <a:p>
+            <a:pPr marL="0" indent="0" algn="ctr">
+              <a:buNone/>
+            </a:pPr>
+            <a:r>
+              <a:rPr lang="en-US" sz="1250" b="1" dirty="0">
+                <a:solidFill>
+                  <a:srgbClr val="26282A"/>
+                </a:solidFill>
+                <a:latin typeface="Calibri" pitchFamily="34" charset="0"/>
+                <a:ea typeface="Calibri" pitchFamily="34" charset="-122"/>
+                <a:cs typeface="Calibri" pitchFamily="34" charset="-120"/>
+              </a:rPr>
+              <a:t>Token IDs</a:t>
+            </a:r>
+            <a:endParaRPr lang="en-US" sz="1250" dirty="0"/>
+          </a:p>
+        </p:txBody>
+      </p:sp>
+      <p:sp>
+        <p:nvSpPr>
+          <p:cNvPr id="19" name="Text 17"/>
+          <p:cNvSpPr/>
+          <p:nvPr/>
+        </p:nvSpPr>
+        <p:spPr>
+          <a:xfrm>
+            <a:off x="4754880" y="2743200"/>
+            <a:ext cx="1737360" cy="640080"/>
+          </a:xfrm>
+          <a:prstGeom prst="rect">
+            <a:avLst/>
+          </a:prstGeom>
+          <a:noFill/>
+          <a:ln/>
+        </p:spPr>
+        <p:txBody>
+          <a:bodyPr wrap="square" lIns="0" tIns="0" rIns="0" bIns="0" rtlCol="0" anchor="ctr"/>
+          <a:lstStyle/>
+          <a:p>
+            <a:pPr marL="0" indent="0" algn="ctr">
+              <a:buNone/>
+            </a:pPr>
+            <a:r>
+              <a:rPr lang="en-US" sz="950" dirty="0">
+                <a:solidFill>
+                  <a:srgbClr val="44474A"/>
+                </a:solidFill>
+                <a:latin typeface="Calibri" pitchFamily="34" charset="0"/>
+                <a:ea typeface="Calibri" pitchFamily="34" charset="-122"/>
+                <a:cs typeface="Calibri" pitchFamily="34" charset="-120"/>
+              </a:rPr>
+              <a:t>Each token becomes a unique number</a:t>
+            </a:r>
+            <a:endParaRPr lang="en-US" sz="950" dirty="0"/>
+          </a:p>
+        </p:txBody>
+      </p:sp>
+      <p:sp>
+        <p:nvSpPr>
+          <p:cNvPr id="20" name="Shape 18"/>
+          <p:cNvSpPr/>
+          <p:nvPr/>
+        </p:nvSpPr>
+        <p:spPr>
+          <a:xfrm>
+            <a:off x="6766560" y="1828800"/>
+            <a:ext cx="1920240" cy="1600200"/>
+          </a:xfrm>
+          <a:prstGeom prst="roundRect">
+            <a:avLst>
+              <a:gd name="adj" fmla="val 4571"/>
+            </a:avLst>
+          </a:prstGeom>
+          <a:solidFill>
+            <a:srgbClr val="F4F5F6"/>
+          </a:solidFill>
+          <a:ln w="9525">
+            <a:solidFill>
+              <a:srgbClr val="DADDE0"/>
+            </a:solidFill>
+            <a:prstDash val="solid"/>
+          </a:ln>
+          <a:effectLst>
+            <a:outerShdw blurRad="88900" dist="25400" dir="5400000" algn="bl" rotWithShape="0">
+              <a:srgbClr val="000000">
+                <a:alpha val="10000"/>
+              </a:srgbClr>
+            </a:outerShdw>
+          </a:effectLst>
+        </p:spPr>
+      </p:sp>
+      <p:sp>
+        <p:nvSpPr>
+          <p:cNvPr id="21" name="Shape 19"/>
+          <p:cNvSpPr/>
+          <p:nvPr/>
+        </p:nvSpPr>
+        <p:spPr>
+          <a:xfrm>
+            <a:off x="7520940" y="1993392"/>
+            <a:ext cx="411480" cy="411480"/>
+          </a:xfrm>
+          <a:prstGeom prst="ellipse">
+            <a:avLst/>
+          </a:prstGeom>
+          <a:solidFill>
+            <a:srgbClr val="86BC25"/>
+          </a:solidFill>
+          <a:ln/>
+        </p:spPr>
+      </p:sp>
+      <p:sp>
+        <p:nvSpPr>
+          <p:cNvPr id="22" name="Text 20"/>
+          <p:cNvSpPr/>
+          <p:nvPr/>
+        </p:nvSpPr>
+        <p:spPr>
+          <a:xfrm>
+            <a:off x="7520940" y="1993392"/>
+            <a:ext cx="411480" cy="411480"/>
+          </a:xfrm>
+          <a:prstGeom prst="rect">
+            <a:avLst/>
+          </a:prstGeom>
+          <a:noFill/>
+          <a:ln/>
+        </p:spPr>
+        <p:txBody>
+          <a:bodyPr wrap="square" lIns="0" tIns="0" rIns="0" bIns="0" rtlCol="0" anchor="ctr"/>
+          <a:lstStyle/>
+          <a:p>
+            <a:pPr marL="0" indent="0" algn="ctr">
+              <a:buNone/>
+            </a:pPr>
+            <a:r>
+              <a:rPr lang="en-US" sz="1800" b="1" dirty="0">
+                <a:solidFill>
+                  <a:srgbClr val="FFFFFF"/>
+                </a:solidFill>
+                <a:latin typeface="Cambria" pitchFamily="34" charset="0"/>
+                <a:ea typeface="Cambria" pitchFamily="34" charset="-122"/>
+                <a:cs typeface="Cambria" pitchFamily="34" charset="-120"/>
+              </a:rPr>
+              <a:t>4</a:t>
+            </a:r>
+            <a:endParaRPr lang="en-US" sz="1800" dirty="0"/>
+          </a:p>
+        </p:txBody>
+      </p:sp>
+      <p:sp>
+        <p:nvSpPr>
+          <p:cNvPr id="23" name="Text 21"/>
+          <p:cNvSpPr/>
+          <p:nvPr/>
+        </p:nvSpPr>
+        <p:spPr>
+          <a:xfrm>
+            <a:off x="6812280" y="2468880"/>
+            <a:ext cx="1828800" cy="274320"/>
+          </a:xfrm>
+          <a:prstGeom prst="rect">
+            <a:avLst/>
+          </a:prstGeom>
+          <a:noFill/>
+          <a:ln/>
+        </p:spPr>
+        <p:txBody>
+          <a:bodyPr wrap="square" lIns="0" tIns="0" rIns="0" bIns="0" rtlCol="0" anchor="ctr"/>
+          <a:lstStyle/>
+          <a:p>
+            <a:pPr marL="0" indent="0" algn="ctr">
+              <a:buNone/>
+            </a:pPr>
+            <a:r>
+              <a:rPr lang="en-US" sz="1250" b="1" dirty="0">
+                <a:solidFill>
+                  <a:srgbClr val="26282A"/>
+                </a:solidFill>
+                <a:latin typeface="Calibri" pitchFamily="34" charset="0"/>
+                <a:ea typeface="Calibri" pitchFamily="34" charset="-122"/>
+                <a:cs typeface="Calibri" pitchFamily="34" charset="-120"/>
+              </a:rPr>
+              <a:t>Embeddings</a:t>
+            </a:r>
+            <a:endParaRPr lang="en-US" sz="1250" dirty="0"/>
+          </a:p>
+        </p:txBody>
+      </p:sp>
+      <p:sp>
+        <p:nvSpPr>
+          <p:cNvPr id="24" name="Text 22"/>
+          <p:cNvSpPr/>
+          <p:nvPr/>
+        </p:nvSpPr>
+        <p:spPr>
+          <a:xfrm>
+            <a:off x="6858000" y="2743200"/>
+            <a:ext cx="1737360" cy="640080"/>
+          </a:xfrm>
+          <a:prstGeom prst="rect">
+            <a:avLst/>
+          </a:prstGeom>
+          <a:noFill/>
+          <a:ln/>
+        </p:spPr>
+        <p:txBody>
+          <a:bodyPr wrap="square" lIns="0" tIns="0" rIns="0" bIns="0" rtlCol="0" anchor="ctr"/>
+          <a:lstStyle/>
+          <a:p>
+            <a:pPr marL="0" indent="0" algn="ctr">
+              <a:buNone/>
+            </a:pPr>
+            <a:r>
+              <a:rPr lang="en-US" sz="950" dirty="0">
+                <a:solidFill>
+                  <a:srgbClr val="44474A"/>
+                </a:solidFill>
+                <a:latin typeface="Calibri" pitchFamily="34" charset="0"/>
+                <a:ea typeface="Calibri" pitchFamily="34" charset="-122"/>
+                <a:cs typeface="Calibri" pitchFamily="34" charset="-120"/>
+              </a:rPr>
+              <a:t>Numbers become vectors that capture meaning</a:t>
+            </a:r>
+            <a:endParaRPr lang="en-US" sz="950" dirty="0"/>
+          </a:p>
+        </p:txBody>
+      </p:sp>
+      <p:sp>
+        <p:nvSpPr>
+          <p:cNvPr id="25" name="Text 23"/>
+          <p:cNvSpPr/>
+          <p:nvPr/>
+        </p:nvSpPr>
+        <p:spPr>
+          <a:xfrm>
+            <a:off x="2377440" y="2377440"/>
+            <a:ext cx="274320" cy="365760"/>
+          </a:xfrm>
+          <a:prstGeom prst="rect">
+            <a:avLst/>
+          </a:prstGeom>
+          <a:noFill/>
+          <a:ln/>
+        </p:spPr>
+        <p:txBody>
+          <a:bodyPr wrap="square" lIns="0" tIns="0" rIns="0" bIns="0" rtlCol="0" anchor="ctr"/>
+          <a:lstStyle/>
+          <a:p>
+            <a:pPr marL="0" indent="0" algn="ctr">
+              <a:buNone/>
+            </a:pPr>
+            <a:r>
+              <a:rPr lang="en-US" sz="1800" b="1" dirty="0">
+                <a:solidFill>
+                  <a:srgbClr val="86BC25"/>
+                </a:solidFill>
+                <a:latin typeface="Calibri" pitchFamily="34" charset="0"/>
+                <a:ea typeface="Calibri" pitchFamily="34" charset="-122"/>
+                <a:cs typeface="Calibri" pitchFamily="34" charset="-120"/>
+              </a:rPr>
+              <a:t>→</a:t>
+            </a:r>
+            <a:endParaRPr lang="en-US" sz="1800" dirty="0"/>
+          </a:p>
+        </p:txBody>
+      </p:sp>
+      <p:sp>
+        <p:nvSpPr>
+          <p:cNvPr id="26" name="Text 24"/>
+          <p:cNvSpPr/>
+          <p:nvPr/>
+        </p:nvSpPr>
+        <p:spPr>
+          <a:xfrm>
+            <a:off x="4480560" y="2377440"/>
+            <a:ext cx="274320" cy="365760"/>
+          </a:xfrm>
+          <a:prstGeom prst="rect">
+            <a:avLst/>
+          </a:prstGeom>
+          <a:noFill/>
+          <a:ln/>
+        </p:spPr>
+        <p:txBody>
+          <a:bodyPr wrap="square" lIns="0" tIns="0" rIns="0" bIns="0" rtlCol="0" anchor="ctr"/>
+          <a:lstStyle/>
+          <a:p>
+            <a:pPr marL="0" indent="0" algn="ctr">
+              <a:buNone/>
+            </a:pPr>
+            <a:r>
+              <a:rPr lang="en-US" sz="1800" b="1" dirty="0">
+                <a:solidFill>
+                  <a:srgbClr val="86BC25"/>
+                </a:solidFill>
+                <a:latin typeface="Calibri" pitchFamily="34" charset="0"/>
+                <a:ea typeface="Calibri" pitchFamily="34" charset="-122"/>
+                <a:cs typeface="Calibri" pitchFamily="34" charset="-120"/>
+              </a:rPr>
+              <a:t>→</a:t>
+            </a:r>
+            <a:endParaRPr lang="en-US" sz="1800" dirty="0"/>
+          </a:p>
+        </p:txBody>
+      </p:sp>
+      <p:sp>
+        <p:nvSpPr>
+          <p:cNvPr id="27" name="Text 25"/>
+          <p:cNvSpPr/>
+          <p:nvPr/>
+        </p:nvSpPr>
+        <p:spPr>
+          <a:xfrm>
+            <a:off x="6583680" y="2377440"/>
+            <a:ext cx="274320" cy="365760"/>
+          </a:xfrm>
+          <a:prstGeom prst="rect">
+            <a:avLst/>
+          </a:prstGeom>
+          <a:noFill/>
+          <a:ln/>
+        </p:spPr>
+        <p:txBody>
+          <a:bodyPr wrap="square" lIns="0" tIns="0" rIns="0" bIns="0" rtlCol="0" anchor="ctr"/>
+          <a:lstStyle/>
+          <a:p>
+            <a:pPr marL="0" indent="0" algn="ctr">
+              <a:buNone/>
+            </a:pPr>
+            <a:r>
+              <a:rPr lang="en-US" sz="1800" b="1" dirty="0">
+                <a:solidFill>
+                  <a:srgbClr val="86BC25"/>
+                </a:solidFill>
+                <a:latin typeface="Calibri" pitchFamily="34" charset="0"/>
+                <a:ea typeface="Calibri" pitchFamily="34" charset="-122"/>
+                <a:cs typeface="Calibri" pitchFamily="34" charset="-120"/>
+              </a:rPr>
+              <a:t>→</a:t>
+            </a:r>
+            <a:endParaRPr lang="en-US" sz="1800" dirty="0"/>
+          </a:p>
+        </p:txBody>
+      </p:sp>
+      <p:sp>
+        <p:nvSpPr>
+          <p:cNvPr id="28" name="Shape 26"/>
+          <p:cNvSpPr/>
+          <p:nvPr/>
+        </p:nvSpPr>
+        <p:spPr>
+          <a:xfrm>
+            <a:off x="457200" y="3611880"/>
+            <a:ext cx="8229600" cy="960120"/>
+          </a:xfrm>
+          <a:prstGeom prst="roundRect">
+            <a:avLst>
+              <a:gd name="adj" fmla="val 7619"/>
+            </a:avLst>
+          </a:prstGeom>
+          <a:solidFill>
+            <a:srgbClr val="F4F5F6"/>
+          </a:solidFill>
+          <a:ln w="9525">
+            <a:solidFill>
+              <a:srgbClr val="DADDE0"/>
+            </a:solidFill>
+            <a:prstDash val="solid"/>
+          </a:ln>
+          <a:effectLst>
+            <a:outerShdw blurRad="88900" dist="25400" dir="5400000" algn="bl" rotWithShape="0">
+              <a:srgbClr val="000000">
+                <a:alpha val="10000"/>
+              </a:srgbClr>
+            </a:outerShdw>
+          </a:effectLst>
+        </p:spPr>
+      </p:sp>
+      <p:sp>
+        <p:nvSpPr>
+          <p:cNvPr id="29" name="Text 27"/>
+          <p:cNvSpPr/>
+          <p:nvPr/>
+        </p:nvSpPr>
+        <p:spPr>
+          <a:xfrm>
+            <a:off x="685800" y="3712464"/>
+            <a:ext cx="3657600" cy="228600"/>
+          </a:xfrm>
+          <a:prstGeom prst="rect">
+            <a:avLst/>
+          </a:prstGeom>
+          <a:noFill/>
+          <a:ln/>
+        </p:spPr>
+        <p:txBody>
+          <a:bodyPr wrap="square" lIns="0" tIns="0" rIns="0" bIns="0" rtlCol="0" anchor="ctr"/>
+          <a:lstStyle/>
+          <a:p>
+            <a:pPr marL="0" indent="0">
+              <a:buNone/>
+            </a:pPr>
+            <a:r>
+              <a:rPr lang="en-US" sz="1000" b="1" kern="0" spc="100" dirty="0">
+                <a:solidFill>
+                  <a:srgbClr val="5C8A1B"/>
+                </a:solidFill>
+                <a:latin typeface="Calibri" pitchFamily="34" charset="0"/>
+                <a:ea typeface="Calibri" pitchFamily="34" charset="-122"/>
+                <a:cs typeface="Calibri" pitchFamily="34" charset="-120"/>
+              </a:rPr>
+              <a:t>EXAMPLE</a:t>
+            </a:r>
+            <a:endParaRPr lang="en-US" sz="1000" dirty="0"/>
+          </a:p>
+        </p:txBody>
+      </p:sp>
+      <p:sp>
+        <p:nvSpPr>
+          <p:cNvPr id="30" name="Text 28"/>
+          <p:cNvSpPr/>
+          <p:nvPr/>
+        </p:nvSpPr>
+        <p:spPr>
+          <a:xfrm>
+            <a:off x="685800" y="3950208"/>
+            <a:ext cx="7772400" cy="320040"/>
+          </a:xfrm>
+          <a:prstGeom prst="rect">
+            <a:avLst/>
+          </a:prstGeom>
+          <a:noFill/>
+          <a:ln/>
+        </p:spPr>
+        <p:txBody>
+          <a:bodyPr wrap="square" lIns="0" tIns="0" rIns="0" bIns="0" rtlCol="0" anchor="ctr"/>
+          <a:lstStyle/>
+          <a:p>
+            <a:pPr marL="0" indent="0">
+              <a:buNone/>
+            </a:pPr>
+            <a:r>
+              <a:rPr lang="en-US" sz="1250" b="1" dirty="0">
+                <a:solidFill>
+                  <a:srgbClr val="26282A"/>
+                </a:solidFill>
+                <a:latin typeface="Calibri" pitchFamily="34" charset="0"/>
+                <a:ea typeface="Calibri" pitchFamily="34" charset="-122"/>
+                <a:cs typeface="Calibri" pitchFamily="34" charset="-120"/>
+              </a:rPr>
+              <a:t>Input: </a:t>
+            </a:r>
+            <a:r>
+              <a:rPr lang="en-US" sz="1250" dirty="0">
+                <a:solidFill>
+                  <a:srgbClr val="26282A"/>
+                </a:solidFill>
+                <a:latin typeface="Calibri" pitchFamily="34" charset="0"/>
+                <a:ea typeface="Calibri" pitchFamily="34" charset="-122"/>
+                <a:cs typeface="Calibri" pitchFamily="34" charset="-120"/>
+              </a:rPr>
+              <a:t>“Apple is a fruit”    →    </a:t>
+            </a:r>
+            <a:r>
+              <a:rPr lang="en-US" sz="1250" b="1" dirty="0">
+                <a:solidFill>
+                  <a:srgbClr val="26282A"/>
+                </a:solidFill>
+                <a:latin typeface="Calibri" pitchFamily="34" charset="0"/>
+                <a:ea typeface="Calibri" pitchFamily="34" charset="-122"/>
+                <a:cs typeface="Calibri" pitchFamily="34" charset="-120"/>
+              </a:rPr>
+              <a:t>Tokens: </a:t>
+            </a:r>
+            <a:r>
+              <a:rPr lang="en-US" sz="1250" dirty="0">
+                <a:solidFill>
+                  <a:srgbClr val="26282A"/>
+                </a:solidFill>
+                <a:latin typeface="Calibri" pitchFamily="34" charset="0"/>
+                <a:ea typeface="Calibri" pitchFamily="34" charset="-122"/>
+                <a:cs typeface="Calibri" pitchFamily="34" charset="-120"/>
+              </a:rPr>
+              <a:t>Apple · is · a · fruit    →    </a:t>
+            </a:r>
+            <a:r>
+              <a:rPr lang="en-US" sz="1250" b="1" dirty="0">
+                <a:solidFill>
+                  <a:srgbClr val="26282A"/>
+                </a:solidFill>
+                <a:latin typeface="Calibri" pitchFamily="34" charset="0"/>
+                <a:ea typeface="Calibri" pitchFamily="34" charset="-122"/>
+                <a:cs typeface="Calibri" pitchFamily="34" charset="-120"/>
+              </a:rPr>
+              <a:t>Token IDs: </a:t>
+            </a:r>
+            <a:r>
+              <a:rPr lang="en-US" sz="1250" dirty="0">
+                <a:solidFill>
+                  <a:srgbClr val="26282A"/>
+                </a:solidFill>
+                <a:latin typeface="Calibri" pitchFamily="34" charset="0"/>
+                <a:ea typeface="Calibri" pitchFamily="34" charset="-122"/>
+                <a:cs typeface="Calibri" pitchFamily="34" charset="-120"/>
+              </a:rPr>
+              <a:t>[1015, 318, 257, 4083]</a:t>
+            </a:r>
+            <a:endParaRPr lang="en-US" sz="1250" dirty="0"/>
+          </a:p>
+        </p:txBody>
+      </p:sp>
+      <p:sp>
+        <p:nvSpPr>
+          <p:cNvPr id="31" name="Text 29"/>
+          <p:cNvSpPr/>
+          <p:nvPr/>
+        </p:nvSpPr>
+        <p:spPr>
+          <a:xfrm>
+            <a:off x="685800" y="4279392"/>
+            <a:ext cx="7772400" cy="256032"/>
+          </a:xfrm>
+          <a:prstGeom prst="rect">
+            <a:avLst/>
+          </a:prstGeom>
+          <a:noFill/>
+          <a:ln/>
+        </p:spPr>
+        <p:txBody>
+          <a:bodyPr wrap="square" lIns="0" tIns="0" rIns="0" bIns="0" rtlCol="0" anchor="ctr"/>
+          <a:lstStyle/>
+          <a:p>
+            <a:pPr marL="0" indent="0">
+              <a:buNone/>
+            </a:pPr>
+            <a:r>
+              <a:rPr lang="en-US" sz="1100" i="1" dirty="0">
+                <a:solidFill>
+                  <a:srgbClr val="44474A"/>
+                </a:solidFill>
+                <a:latin typeface="Calibri" pitchFamily="34" charset="0"/>
+                <a:ea typeface="Calibri" pitchFamily="34" charset="-122"/>
+                <a:cs typeface="Calibri" pitchFamily="34" charset="-120"/>
+              </a:rPr>
+              <a:t>Those IDs then become embeddings — vectors that capture meaning (next slide).</a:t>
+            </a:r>
+            <a:endParaRPr lang="en-US" sz="1100" dirty="0"/>
+          </a:p>
+        </p:txBody>
+      </p:sp>
+      <p:sp>
+        <p:nvSpPr>
+          <p:cNvPr id="32" name="Text 30"/>
+          <p:cNvSpPr/>
+          <p:nvPr/>
+        </p:nvSpPr>
+        <p:spPr>
+          <a:xfrm>
+            <a:off x="457200" y="4873752"/>
+            <a:ext cx="5486400" cy="228600"/>
+          </a:xfrm>
+          <a:prstGeom prst="rect">
+            <a:avLst/>
+          </a:prstGeom>
+          <a:noFill/>
+          <a:ln/>
+        </p:spPr>
+        <p:txBody>
+          <a:bodyPr wrap="square" lIns="0" tIns="0" rIns="0" bIns="0" rtlCol="0" anchor="ctr"/>
+          <a:lstStyle/>
+          <a:p>
+            <a:pPr marL="0" indent="0">
+              <a:buNone/>
+            </a:pPr>
+            <a:r>
+              <a:rPr lang="en-US" sz="800" dirty="0">
+                <a:solidFill>
+                  <a:srgbClr val="7A7D81"/>
+                </a:solidFill>
+                <a:latin typeface="Calibri" pitchFamily="34" charset="0"/>
+                <a:ea typeface="Calibri" pitchFamily="34" charset="-122"/>
+                <a:cs typeface="Calibri" pitchFamily="34" charset="-120"/>
+              </a:rPr>
+              <a:t>Basics of AI/ML &amp; Prompt Engineering</a:t>
+            </a:r>
+            <a:endParaRPr lang="en-US" sz="800" dirty="0"/>
+          </a:p>
+        </p:txBody>
+      </p:sp>
+      <p:sp>
+        <p:nvSpPr>
+          <p:cNvPr id="33" name="Text 31"/>
+          <p:cNvSpPr/>
+          <p:nvPr/>
+        </p:nvSpPr>
+        <p:spPr>
+          <a:xfrm>
+            <a:off x="8321040" y="4873752"/>
+            <a:ext cx="365760" cy="228600"/>
+          </a:xfrm>
+          <a:prstGeom prst="rect">
+            <a:avLst/>
+          </a:prstGeom>
+          <a:noFill/>
+          <a:ln/>
+        </p:spPr>
+        <p:txBody>
+          <a:bodyPr wrap="square" lIns="0" tIns="0" rIns="0" bIns="0" rtlCol="0" anchor="ctr"/>
+          <a:lstStyle/>
+          <a:p>
+            <a:pPr marL="0" indent="0" algn="r">
+              <a:buNone/>
+            </a:pPr>
+            <a:r>
+              <a:rPr lang="en-US" sz="800" dirty="0">
+                <a:solidFill>
+                  <a:srgbClr val="7A7D81"/>
+                </a:solidFill>
+                <a:latin typeface="Calibri" pitchFamily="34" charset="0"/>
+                <a:ea typeface="Calibri" pitchFamily="34" charset="-122"/>
+                <a:cs typeface="Calibri" pitchFamily="34" charset="-120"/>
+              </a:rPr>
+              <a:t>2</a:t>
+            </a:r>
+            <a:endParaRPr lang="en-US" sz="800" dirty="0"/>
+          </a:p>
+        </p:txBody>
+      </p:sp>
+    </p:spTree>
+    <p:extLst>
+      <p:ext uri="{BB962C8B-B14F-4D97-AF65-F5344CB8AC3E}">
+        <p14:creationId xmlns:p14="http://schemas.microsoft.com/office/powerpoint/2010/main" val="3218049918"/>
+      </p:ext>
+    </p:extLst>
+  </p:cSld>
+  <p:clrMapOvr>
+    <a:masterClrMapping/>
+  </p:clrMapOvr>
+</p:sld>
+</file>
+
+<file path=ppt/slides/slide33.xml><?xml version="1.0" encoding="utf-8"?>
+<p:sld xmlns:a="http://schemas.openxmlformats.org/drawingml/2006/main" xmlns:r="http://schemas.openxmlformats.org/officeDocument/2006/relationships" xmlns:p="http://schemas.openxmlformats.org/presentationml/2006/main">
+  <p:cSld>
+    <p:spTree>
+      <p:nvGrpSpPr>
+        <p:cNvPr id="1" name=""/>
+        <p:cNvGrpSpPr/>
+        <p:nvPr/>
+      </p:nvGrpSpPr>
+      <p:grpSpPr>
+        <a:xfrm>
+          <a:off x="0" y="0"/>
+          <a:ext cx="0" cy="0"/>
+          <a:chOff x="0" y="0"/>
+          <a:chExt cx="0" cy="0"/>
+        </a:xfrm>
+      </p:grpSpPr>
+      <p:sp>
+        <p:nvSpPr>
+          <p:cNvPr id="2" name="Shape 0"/>
+          <p:cNvSpPr/>
+          <p:nvPr/>
+        </p:nvSpPr>
+        <p:spPr>
+          <a:xfrm>
+            <a:off x="457200" y="402336"/>
+            <a:ext cx="109728" cy="109728"/>
+          </a:xfrm>
+          <a:prstGeom prst="ellipse">
+            <a:avLst/>
+          </a:prstGeom>
+          <a:solidFill>
+            <a:srgbClr val="86BC25"/>
+          </a:solidFill>
+          <a:ln/>
+        </p:spPr>
+      </p:sp>
+      <p:sp>
+        <p:nvSpPr>
+          <p:cNvPr id="3" name="Text 1"/>
+          <p:cNvSpPr/>
+          <p:nvPr/>
+        </p:nvSpPr>
+        <p:spPr>
+          <a:xfrm>
+            <a:off x="658368" y="329184"/>
+            <a:ext cx="7955280" cy="256032"/>
+          </a:xfrm>
+          <a:prstGeom prst="rect">
+            <a:avLst/>
+          </a:prstGeom>
+          <a:noFill/>
+          <a:ln/>
+        </p:spPr>
+        <p:txBody>
+          <a:bodyPr wrap="square" lIns="0" tIns="0" rIns="0" bIns="0" rtlCol="0" anchor="ctr"/>
+          <a:lstStyle/>
+          <a:p>
+            <a:pPr marL="0" indent="0">
+              <a:buNone/>
+            </a:pPr>
+            <a:r>
+              <a:rPr lang="en-US" sz="1100" b="1" kern="0" spc="200" dirty="0">
+                <a:solidFill>
+                  <a:srgbClr val="5C8A1B"/>
+                </a:solidFill>
+                <a:latin typeface="Calibri" pitchFamily="34" charset="0"/>
+                <a:ea typeface="Calibri" pitchFamily="34" charset="-122"/>
+                <a:cs typeface="Calibri" pitchFamily="34" charset="-120"/>
+              </a:rPr>
+              <a:t>MODULE 3 · GENERATIVE AI &amp; LLMS</a:t>
+            </a:r>
+            <a:endParaRPr lang="en-US" sz="1100" dirty="0"/>
+          </a:p>
+        </p:txBody>
+      </p:sp>
+      <p:sp>
+        <p:nvSpPr>
+          <p:cNvPr id="4" name="Text 2"/>
+          <p:cNvSpPr/>
+          <p:nvPr/>
+        </p:nvSpPr>
+        <p:spPr>
+          <a:xfrm>
+            <a:off x="457200" y="603504"/>
+            <a:ext cx="8229600" cy="640080"/>
+          </a:xfrm>
+          <a:prstGeom prst="rect">
+            <a:avLst/>
+          </a:prstGeom>
+          <a:noFill/>
+          <a:ln/>
+        </p:spPr>
+        <p:txBody>
+          <a:bodyPr wrap="square" lIns="0" tIns="0" rIns="0" bIns="0" rtlCol="0" anchor="ctr"/>
+          <a:lstStyle/>
+          <a:p>
+            <a:pPr marL="0" indent="0">
+              <a:buNone/>
+            </a:pPr>
+            <a:r>
+              <a:rPr lang="en-US" sz="2900" b="1" dirty="0">
+                <a:solidFill>
+                  <a:srgbClr val="26282A"/>
+                </a:solidFill>
+                <a:latin typeface="Cambria" pitchFamily="34" charset="0"/>
+                <a:ea typeface="Cambria" pitchFamily="34" charset="-122"/>
+                <a:cs typeface="Cambria" pitchFamily="34" charset="-120"/>
+              </a:rPr>
+              <a:t>Embeddings — how AI captures meaning</a:t>
+            </a:r>
+            <a:endParaRPr lang="en-US" sz="2900" dirty="0"/>
+          </a:p>
+        </p:txBody>
+      </p:sp>
+      <p:sp>
+        <p:nvSpPr>
+          <p:cNvPr id="5" name="Shape 3"/>
+          <p:cNvSpPr/>
+          <p:nvPr/>
+        </p:nvSpPr>
+        <p:spPr>
+          <a:xfrm>
+            <a:off x="457200" y="1417320"/>
+            <a:ext cx="4023360" cy="1325880"/>
+          </a:xfrm>
+          <a:prstGeom prst="roundRect">
+            <a:avLst>
+              <a:gd name="adj" fmla="val 5517"/>
+            </a:avLst>
+          </a:prstGeom>
+          <a:solidFill>
+            <a:srgbClr val="F4F5F6"/>
+          </a:solidFill>
+          <a:ln w="9525">
+            <a:solidFill>
+              <a:srgbClr val="DADDE0"/>
+            </a:solidFill>
+            <a:prstDash val="solid"/>
+          </a:ln>
+          <a:effectLst>
+            <a:outerShdw blurRad="88900" dist="25400" dir="5400000" algn="bl" rotWithShape="0">
+              <a:srgbClr val="000000">
+                <a:alpha val="10000"/>
+              </a:srgbClr>
+            </a:outerShdw>
+          </a:effectLst>
+        </p:spPr>
+      </p:sp>
+      <p:sp>
+        <p:nvSpPr>
+          <p:cNvPr id="6" name="Text 4"/>
+          <p:cNvSpPr/>
+          <p:nvPr/>
+        </p:nvSpPr>
+        <p:spPr>
+          <a:xfrm>
+            <a:off x="685800" y="1536192"/>
+            <a:ext cx="3657600" cy="274320"/>
+          </a:xfrm>
+          <a:prstGeom prst="rect">
+            <a:avLst/>
+          </a:prstGeom>
+          <a:noFill/>
+          <a:ln/>
+        </p:spPr>
+        <p:txBody>
+          <a:bodyPr wrap="square" lIns="0" tIns="0" rIns="0" bIns="0" rtlCol="0" anchor="ctr"/>
+          <a:lstStyle/>
+          <a:p>
+            <a:pPr marL="0" indent="0">
+              <a:buNone/>
+            </a:pPr>
+            <a:r>
+              <a:rPr lang="en-US" sz="1100" b="1" dirty="0">
+                <a:solidFill>
+                  <a:srgbClr val="5C8A1B"/>
+                </a:solidFill>
+                <a:latin typeface="Calibri" pitchFamily="34" charset="0"/>
+                <a:ea typeface="Calibri" pitchFamily="34" charset="-122"/>
+                <a:cs typeface="Calibri" pitchFamily="34" charset="-120"/>
+              </a:rPr>
+              <a:t>TOKENS  (recap)</a:t>
+            </a:r>
+            <a:endParaRPr lang="en-US" sz="1100" dirty="0"/>
+          </a:p>
+        </p:txBody>
+      </p:sp>
+      <p:sp>
+        <p:nvSpPr>
+          <p:cNvPr id="7" name="Text 5"/>
+          <p:cNvSpPr/>
+          <p:nvPr/>
+        </p:nvSpPr>
+        <p:spPr>
+          <a:xfrm>
+            <a:off x="685800" y="1828800"/>
+            <a:ext cx="3611880" cy="822960"/>
+          </a:xfrm>
+          <a:prstGeom prst="rect">
+            <a:avLst/>
+          </a:prstGeom>
+          <a:noFill/>
+          <a:ln/>
+        </p:spPr>
+        <p:txBody>
+          <a:bodyPr wrap="square" lIns="0" tIns="0" rIns="0" bIns="0" rtlCol="0" anchor="ctr"/>
+          <a:lstStyle/>
+          <a:p>
+            <a:pPr marL="0" indent="0">
+              <a:buNone/>
+            </a:pPr>
+            <a:r>
+              <a:rPr lang="en-US" sz="1250" dirty="0">
+                <a:solidFill>
+                  <a:srgbClr val="26282A"/>
+                </a:solidFill>
+                <a:latin typeface="Calibri" pitchFamily="34" charset="0"/>
+                <a:ea typeface="Calibri" pitchFamily="34" charset="-122"/>
+                <a:cs typeface="Calibri" pitchFamily="34" charset="-120"/>
+              </a:rPr>
+              <a:t>The basic units an LLM reads — a word, part of a word, or a single character.</a:t>
+            </a:r>
+            <a:endParaRPr lang="en-US" sz="1250" dirty="0"/>
+          </a:p>
+        </p:txBody>
+      </p:sp>
+      <p:sp>
+        <p:nvSpPr>
+          <p:cNvPr id="8" name="Shape 6"/>
+          <p:cNvSpPr/>
+          <p:nvPr/>
+        </p:nvSpPr>
+        <p:spPr>
+          <a:xfrm>
+            <a:off x="4663440" y="1417320"/>
+            <a:ext cx="4023360" cy="1325880"/>
+          </a:xfrm>
+          <a:prstGeom prst="roundRect">
+            <a:avLst>
+              <a:gd name="adj" fmla="val 5517"/>
+            </a:avLst>
+          </a:prstGeom>
+          <a:solidFill>
+            <a:srgbClr val="EDF4DF"/>
+          </a:solidFill>
+          <a:ln w="9525">
+            <a:solidFill>
+              <a:srgbClr val="DADDE0"/>
+            </a:solidFill>
+            <a:prstDash val="solid"/>
+          </a:ln>
+          <a:effectLst>
+            <a:outerShdw blurRad="88900" dist="25400" dir="5400000" algn="bl" rotWithShape="0">
+              <a:srgbClr val="000000">
+                <a:alpha val="10000"/>
+              </a:srgbClr>
+            </a:outerShdw>
+          </a:effectLst>
+        </p:spPr>
+      </p:sp>
+      <p:sp>
+        <p:nvSpPr>
+          <p:cNvPr id="9" name="Text 7"/>
+          <p:cNvSpPr/>
+          <p:nvPr/>
+        </p:nvSpPr>
+        <p:spPr>
+          <a:xfrm>
+            <a:off x="4892040" y="1536192"/>
+            <a:ext cx="3657600" cy="274320"/>
+          </a:xfrm>
+          <a:prstGeom prst="rect">
+            <a:avLst/>
+          </a:prstGeom>
+          <a:noFill/>
+          <a:ln/>
+        </p:spPr>
+        <p:txBody>
+          <a:bodyPr wrap="square" lIns="0" tIns="0" rIns="0" bIns="0" rtlCol="0" anchor="ctr"/>
+          <a:lstStyle/>
+          <a:p>
+            <a:pPr marL="0" indent="0">
+              <a:buNone/>
+            </a:pPr>
+            <a:r>
+              <a:rPr lang="en-US" sz="1100" b="1" dirty="0">
+                <a:solidFill>
+                  <a:srgbClr val="5C8A1B"/>
+                </a:solidFill>
+                <a:latin typeface="Calibri" pitchFamily="34" charset="0"/>
+                <a:ea typeface="Calibri" pitchFamily="34" charset="-122"/>
+                <a:cs typeface="Calibri" pitchFamily="34" charset="-120"/>
+              </a:rPr>
+              <a:t>EMBEDDINGS  (new)</a:t>
+            </a:r>
+            <a:endParaRPr lang="en-US" sz="1100" dirty="0"/>
+          </a:p>
+        </p:txBody>
+      </p:sp>
+      <p:sp>
+        <p:nvSpPr>
+          <p:cNvPr id="10" name="Text 8"/>
+          <p:cNvSpPr/>
+          <p:nvPr/>
+        </p:nvSpPr>
+        <p:spPr>
+          <a:xfrm>
+            <a:off x="4892040" y="1828800"/>
+            <a:ext cx="3611880" cy="868680"/>
+          </a:xfrm>
+          <a:prstGeom prst="rect">
+            <a:avLst/>
+          </a:prstGeom>
+          <a:noFill/>
+          <a:ln/>
+        </p:spPr>
+        <p:txBody>
+          <a:bodyPr wrap="square" lIns="0" tIns="0" rIns="0" bIns="0" rtlCol="0" anchor="ctr"/>
+          <a:lstStyle/>
+          <a:p>
+            <a:pPr marL="0" indent="0">
+              <a:buNone/>
+            </a:pPr>
+            <a:r>
+              <a:rPr lang="en-US" sz="1250" dirty="0">
+                <a:solidFill>
+                  <a:srgbClr val="26282A"/>
+                </a:solidFill>
+                <a:latin typeface="Calibri" pitchFamily="34" charset="0"/>
+                <a:ea typeface="Calibri" pitchFamily="34" charset="-122"/>
+                <a:cs typeface="Calibri" pitchFamily="34" charset="-120"/>
+              </a:rPr>
+              <a:t>Numbers that place each token as a point in a huge “meaning space” — capturing what it means and how it relates to other words.</a:t>
+            </a:r>
+            <a:endParaRPr lang="en-US" sz="1250" dirty="0"/>
+          </a:p>
+        </p:txBody>
+      </p:sp>
+      <p:sp>
+        <p:nvSpPr>
+          <p:cNvPr id="11" name="Text 9"/>
+          <p:cNvSpPr/>
+          <p:nvPr/>
+        </p:nvSpPr>
+        <p:spPr>
+          <a:xfrm>
+            <a:off x="502920" y="2880360"/>
+            <a:ext cx="8229600" cy="1051560"/>
+          </a:xfrm>
+          <a:prstGeom prst="rect">
+            <a:avLst/>
+          </a:prstGeom>
+          <a:noFill/>
+          <a:ln/>
+        </p:spPr>
+        <p:txBody>
+          <a:bodyPr wrap="square" lIns="0" tIns="0" rIns="0" bIns="0" rtlCol="0" anchor="ctr"/>
+          <a:lstStyle/>
+          <a:p>
+            <a:pPr marL="342900" indent="-342900">
+              <a:spcAft>
+                <a:spcPts val="600"/>
+              </a:spcAft>
+              <a:buSzPct val="100000"/>
+              <a:buChar char="•"/>
+            </a:pPr>
+            <a:r>
+              <a:rPr lang="en-US" sz="1200" dirty="0">
+                <a:solidFill>
+                  <a:srgbClr val="26282A"/>
+                </a:solidFill>
+                <a:latin typeface="Calibri" pitchFamily="34" charset="0"/>
+                <a:ea typeface="Calibri" pitchFamily="34" charset="-122"/>
+                <a:cs typeface="Calibri" pitchFamily="34" charset="-120"/>
+              </a:rPr>
+              <a:t>Tokens are the words; embeddings are their mathematical form (vectors).</a:t>
+            </a:r>
+            <a:endParaRPr lang="en-US" sz="1200" dirty="0"/>
+          </a:p>
+          <a:p>
+            <a:pPr marL="342900" indent="-342900">
+              <a:spcAft>
+                <a:spcPts val="600"/>
+              </a:spcAft>
+              <a:buSzPct val="100000"/>
+              <a:buChar char="•"/>
+            </a:pPr>
+            <a:r>
+              <a:rPr lang="en-US" sz="1200" dirty="0">
+                <a:solidFill>
+                  <a:srgbClr val="26282A"/>
+                </a:solidFill>
+                <a:latin typeface="Calibri" pitchFamily="34" charset="0"/>
+                <a:ea typeface="Calibri" pitchFamily="34" charset="-122"/>
+                <a:cs typeface="Calibri" pitchFamily="34" charset="-120"/>
+              </a:rPr>
+              <a:t>They keep semantic context — so the model grasps meaning and relationships, not just spelling.</a:t>
+            </a:r>
+            <a:endParaRPr lang="en-US" sz="1200" dirty="0"/>
+          </a:p>
+          <a:p>
+            <a:pPr marL="342900" indent="-342900">
+              <a:spcAft>
+                <a:spcPts val="600"/>
+              </a:spcAft>
+              <a:buSzPct val="100000"/>
+              <a:buChar char="•"/>
+            </a:pPr>
+            <a:r>
+              <a:rPr lang="en-US" sz="1200" dirty="0">
+                <a:solidFill>
+                  <a:srgbClr val="26282A"/>
+                </a:solidFill>
+                <a:latin typeface="Calibri" pitchFamily="34" charset="0"/>
+                <a:ea typeface="Calibri" pitchFamily="34" charset="-122"/>
+                <a:cs typeface="Calibri" pitchFamily="34" charset="-120"/>
+              </a:rPr>
+              <a:t>Similar meanings sit closer together in that space.</a:t>
+            </a:r>
+            <a:endParaRPr lang="en-US" sz="1200" dirty="0"/>
+          </a:p>
+          <a:p>
+            <a:pPr marL="342900" indent="-342900">
+              <a:buSzPct val="100000"/>
+              <a:buChar char="•"/>
+            </a:pPr>
+            <a:r>
+              <a:rPr lang="en-US" sz="1200" dirty="0">
+                <a:solidFill>
+                  <a:srgbClr val="26282A"/>
+                </a:solidFill>
+                <a:latin typeface="Calibri" pitchFamily="34" charset="0"/>
+                <a:ea typeface="Calibri" pitchFamily="34" charset="-122"/>
+                <a:cs typeface="Calibri" pitchFamily="34" charset="-120"/>
+              </a:rPr>
+              <a:t>They're the foundation of modern LLMs and power things like semantic search.</a:t>
+            </a:r>
+            <a:endParaRPr lang="en-US" sz="1200" dirty="0"/>
+          </a:p>
+        </p:txBody>
+      </p:sp>
+      <p:sp>
+        <p:nvSpPr>
+          <p:cNvPr id="12" name="Shape 10"/>
+          <p:cNvSpPr/>
+          <p:nvPr/>
+        </p:nvSpPr>
+        <p:spPr>
+          <a:xfrm>
+            <a:off x="457200" y="4041648"/>
+            <a:ext cx="8229600" cy="566928"/>
+          </a:xfrm>
+          <a:prstGeom prst="roundRect">
+            <a:avLst>
+              <a:gd name="adj" fmla="val 12903"/>
+            </a:avLst>
+          </a:prstGeom>
+          <a:solidFill>
+            <a:srgbClr val="EDF4DF"/>
+          </a:solidFill>
+          <a:ln w="9525">
+            <a:solidFill>
+              <a:srgbClr val="DADDE0"/>
+            </a:solidFill>
+            <a:prstDash val="solid"/>
+          </a:ln>
+          <a:effectLst>
+            <a:outerShdw blurRad="88900" dist="25400" dir="5400000" algn="bl" rotWithShape="0">
+              <a:srgbClr val="000000">
+                <a:alpha val="10000"/>
+              </a:srgbClr>
+            </a:outerShdw>
+          </a:effectLst>
+        </p:spPr>
+      </p:sp>
+      <p:sp>
+        <p:nvSpPr>
+          <p:cNvPr id="13" name="Text 11"/>
+          <p:cNvSpPr/>
+          <p:nvPr/>
+        </p:nvSpPr>
+        <p:spPr>
+          <a:xfrm>
+            <a:off x="685800" y="4142232"/>
+            <a:ext cx="7772400" cy="365760"/>
+          </a:xfrm>
+          <a:prstGeom prst="rect">
+            <a:avLst/>
+          </a:prstGeom>
+          <a:noFill/>
+          <a:ln/>
+        </p:spPr>
+        <p:txBody>
+          <a:bodyPr wrap="square" lIns="0" tIns="0" rIns="0" bIns="0" rtlCol="0" anchor="ctr"/>
+          <a:lstStyle/>
+          <a:p>
+            <a:pPr marL="0" indent="0">
+              <a:buNone/>
+            </a:pPr>
+            <a:r>
+              <a:rPr lang="en-US" sz="1200" b="1" dirty="0">
+                <a:solidFill>
+                  <a:srgbClr val="5C8A1B"/>
+                </a:solidFill>
+                <a:latin typeface="Calibri" pitchFamily="34" charset="0"/>
+                <a:ea typeface="Calibri" pitchFamily="34" charset="-122"/>
+                <a:cs typeface="Calibri" pitchFamily="34" charset="-120"/>
+              </a:rPr>
+              <a:t>Picture a map of meaning:  </a:t>
+            </a:r>
+            <a:r>
+              <a:rPr lang="en-US" sz="1200" dirty="0">
+                <a:solidFill>
+                  <a:srgbClr val="26282A"/>
+                </a:solidFill>
+                <a:latin typeface="Calibri" pitchFamily="34" charset="0"/>
+                <a:ea typeface="Calibri" pitchFamily="34" charset="-122"/>
+                <a:cs typeface="Calibri" pitchFamily="34" charset="-120"/>
+              </a:rPr>
+              <a:t>“coffee” and “tea” are neighbours; “coffee” and “concrete” are far apart. Embeddings are the coordinates.</a:t>
+            </a:r>
+            <a:endParaRPr lang="en-US" sz="1200" dirty="0"/>
+          </a:p>
+        </p:txBody>
+      </p:sp>
+      <p:sp>
+        <p:nvSpPr>
+          <p:cNvPr id="14" name="Text 12"/>
+          <p:cNvSpPr/>
+          <p:nvPr/>
+        </p:nvSpPr>
+        <p:spPr>
+          <a:xfrm>
+            <a:off x="457200" y="4873752"/>
+            <a:ext cx="5486400" cy="228600"/>
+          </a:xfrm>
+          <a:prstGeom prst="rect">
+            <a:avLst/>
+          </a:prstGeom>
+          <a:noFill/>
+          <a:ln/>
+        </p:spPr>
+        <p:txBody>
+          <a:bodyPr wrap="square" lIns="0" tIns="0" rIns="0" bIns="0" rtlCol="0" anchor="ctr"/>
+          <a:lstStyle/>
+          <a:p>
+            <a:pPr marL="0" indent="0">
+              <a:buNone/>
+            </a:pPr>
+            <a:r>
+              <a:rPr lang="en-US" sz="800" dirty="0">
+                <a:solidFill>
+                  <a:srgbClr val="7A7D81"/>
+                </a:solidFill>
+                <a:latin typeface="Calibri" pitchFamily="34" charset="0"/>
+                <a:ea typeface="Calibri" pitchFamily="34" charset="-122"/>
+                <a:cs typeface="Calibri" pitchFamily="34" charset="-120"/>
+              </a:rPr>
+              <a:t>Basics of AI/ML &amp; Prompt Engineering</a:t>
+            </a:r>
+            <a:endParaRPr lang="en-US" sz="800" dirty="0"/>
+          </a:p>
+        </p:txBody>
+      </p:sp>
+      <p:sp>
+        <p:nvSpPr>
+          <p:cNvPr id="15" name="Text 13"/>
+          <p:cNvSpPr/>
+          <p:nvPr/>
+        </p:nvSpPr>
+        <p:spPr>
+          <a:xfrm>
+            <a:off x="8321040" y="4873752"/>
+            <a:ext cx="365760" cy="228600"/>
+          </a:xfrm>
+          <a:prstGeom prst="rect">
+            <a:avLst/>
+          </a:prstGeom>
+          <a:noFill/>
+          <a:ln/>
+        </p:spPr>
+        <p:txBody>
+          <a:bodyPr wrap="square" lIns="0" tIns="0" rIns="0" bIns="0" rtlCol="0" anchor="ctr"/>
+          <a:lstStyle/>
+          <a:p>
+            <a:pPr marL="0" indent="0" algn="r">
+              <a:buNone/>
+            </a:pPr>
+            <a:r>
+              <a:rPr lang="en-US" sz="800" dirty="0">
+                <a:solidFill>
+                  <a:srgbClr val="7A7D81"/>
+                </a:solidFill>
+                <a:latin typeface="Calibri" pitchFamily="34" charset="0"/>
+                <a:ea typeface="Calibri" pitchFamily="34" charset="-122"/>
+                <a:cs typeface="Calibri" pitchFamily="34" charset="-120"/>
+              </a:rPr>
+              <a:t>3</a:t>
+            </a:r>
+            <a:endParaRPr lang="en-US" sz="800" dirty="0"/>
+          </a:p>
+        </p:txBody>
+      </p:sp>
+    </p:spTree>
+    <p:extLst>
+      <p:ext uri="{BB962C8B-B14F-4D97-AF65-F5344CB8AC3E}">
+        <p14:creationId xmlns:p14="http://schemas.microsoft.com/office/powerpoint/2010/main" val="77349219"/>
+      </p:ext>
+    </p:extLst>
+  </p:cSld>
+  <p:clrMapOvr>
+    <a:masterClrMapping/>
+  </p:clrMapOvr>
+</p:sld>
+</file>
+
+<file path=ppt/slides/slide34.xml><?xml version="1.0" encoding="utf-8"?>
+<p:sld xmlns:a="http://schemas.openxmlformats.org/drawingml/2006/main" xmlns:r="http://schemas.openxmlformats.org/officeDocument/2006/relationships" xmlns:p="http://schemas.openxmlformats.org/presentationml/2006/main">
+  <p:cSld>
+    <p:spTree>
+      <p:nvGrpSpPr>
+        <p:cNvPr id="1" name=""/>
+        <p:cNvGrpSpPr/>
+        <p:nvPr/>
+      </p:nvGrpSpPr>
+      <p:grpSpPr>
+        <a:xfrm>
+          <a:off x="0" y="0"/>
+          <a:ext cx="0" cy="0"/>
+          <a:chOff x="0" y="0"/>
+          <a:chExt cx="0" cy="0"/>
+        </a:xfrm>
+      </p:grpSpPr>
+      <p:sp>
+        <p:nvSpPr>
+          <p:cNvPr id="2" name="Shape 0"/>
+          <p:cNvSpPr/>
+          <p:nvPr/>
+        </p:nvSpPr>
+        <p:spPr>
+          <a:xfrm>
+            <a:off x="457200" y="402336"/>
+            <a:ext cx="109728" cy="109728"/>
+          </a:xfrm>
+          <a:prstGeom prst="ellipse">
+            <a:avLst/>
+          </a:prstGeom>
+          <a:solidFill>
+            <a:srgbClr val="86BC25"/>
+          </a:solidFill>
+          <a:ln/>
+        </p:spPr>
+      </p:sp>
+      <p:sp>
+        <p:nvSpPr>
+          <p:cNvPr id="3" name="Text 1"/>
+          <p:cNvSpPr/>
+          <p:nvPr/>
+        </p:nvSpPr>
+        <p:spPr>
+          <a:xfrm>
+            <a:off x="658368" y="329184"/>
+            <a:ext cx="7955280" cy="256032"/>
+          </a:xfrm>
+          <a:prstGeom prst="rect">
+            <a:avLst/>
+          </a:prstGeom>
+          <a:noFill/>
+          <a:ln/>
+        </p:spPr>
+        <p:txBody>
+          <a:bodyPr wrap="square" lIns="0" tIns="0" rIns="0" bIns="0" rtlCol="0" anchor="ctr"/>
+          <a:lstStyle/>
+          <a:p>
+            <a:pPr marL="0" indent="0">
+              <a:buNone/>
+            </a:pPr>
+            <a:r>
+              <a:rPr lang="en-US" sz="1100" b="1" kern="0" spc="200" dirty="0">
+                <a:solidFill>
+                  <a:srgbClr val="5C8A1B"/>
+                </a:solidFill>
+                <a:latin typeface="Calibri" pitchFamily="34" charset="0"/>
+                <a:ea typeface="Calibri" pitchFamily="34" charset="-122"/>
+                <a:cs typeface="Calibri" pitchFamily="34" charset="-120"/>
+              </a:rPr>
+              <a:t>MODULE 3 · GENERATIVE AI &amp; LLMS</a:t>
+            </a:r>
+            <a:endParaRPr lang="en-US" sz="1100" dirty="0"/>
+          </a:p>
+        </p:txBody>
+      </p:sp>
+      <p:sp>
+        <p:nvSpPr>
+          <p:cNvPr id="4" name="Text 2"/>
+          <p:cNvSpPr/>
+          <p:nvPr/>
+        </p:nvSpPr>
+        <p:spPr>
+          <a:xfrm>
+            <a:off x="457200" y="603504"/>
+            <a:ext cx="8229600" cy="640080"/>
+          </a:xfrm>
+          <a:prstGeom prst="rect">
+            <a:avLst/>
+          </a:prstGeom>
+          <a:noFill/>
+          <a:ln/>
+        </p:spPr>
+        <p:txBody>
+          <a:bodyPr wrap="square" lIns="0" tIns="0" rIns="0" bIns="0" rtlCol="0" anchor="ctr"/>
+          <a:lstStyle/>
+          <a:p>
+            <a:pPr marL="0" indent="0">
+              <a:buNone/>
+            </a:pPr>
+            <a:r>
+              <a:rPr lang="en-US" sz="2900" b="1" dirty="0">
+                <a:solidFill>
+                  <a:srgbClr val="26282A"/>
+                </a:solidFill>
+                <a:latin typeface="Cambria" pitchFamily="34" charset="0"/>
+                <a:ea typeface="Cambria" pitchFamily="34" charset="-122"/>
+                <a:cs typeface="Cambria" pitchFamily="34" charset="-120"/>
+              </a:rPr>
+              <a:t>RAG — giving AI real, current knowledge</a:t>
+            </a:r>
+            <a:endParaRPr lang="en-US" sz="2900" dirty="0"/>
+          </a:p>
+        </p:txBody>
+      </p:sp>
+      <p:sp>
+        <p:nvSpPr>
+          <p:cNvPr id="5" name="Text 3"/>
+          <p:cNvSpPr/>
+          <p:nvPr/>
+        </p:nvSpPr>
+        <p:spPr>
+          <a:xfrm>
+            <a:off x="457200" y="1371600"/>
+            <a:ext cx="8229600" cy="457200"/>
+          </a:xfrm>
+          <a:prstGeom prst="rect">
+            <a:avLst/>
+          </a:prstGeom>
+          <a:noFill/>
+          <a:ln/>
+        </p:spPr>
+        <p:txBody>
+          <a:bodyPr wrap="square" lIns="0" tIns="0" rIns="0" bIns="0" rtlCol="0" anchor="ctr"/>
+          <a:lstStyle/>
+          <a:p>
+            <a:pPr marL="0" indent="0">
+              <a:buNone/>
+            </a:pPr>
+            <a:r>
+              <a:rPr lang="en-US" sz="1400" dirty="0">
+                <a:solidFill>
+                  <a:srgbClr val="26282A"/>
+                </a:solidFill>
+                <a:latin typeface="Calibri" pitchFamily="34" charset="0"/>
+                <a:ea typeface="Calibri" pitchFamily="34" charset="-122"/>
+                <a:cs typeface="Calibri" pitchFamily="34" charset="-120"/>
+              </a:rPr>
+              <a:t>On its own, an LLM only knows its training data — and it can confidently make things up. RAG fixes that by letting it look things up first.</a:t>
+            </a:r>
+            <a:endParaRPr lang="en-US" sz="1400" dirty="0"/>
+          </a:p>
+        </p:txBody>
+      </p:sp>
+      <p:sp>
+        <p:nvSpPr>
+          <p:cNvPr id="6" name="Shape 4"/>
+          <p:cNvSpPr/>
+          <p:nvPr/>
+        </p:nvSpPr>
+        <p:spPr>
+          <a:xfrm>
+            <a:off x="457200" y="1874520"/>
+            <a:ext cx="2679192" cy="1417320"/>
+          </a:xfrm>
+          <a:prstGeom prst="roundRect">
+            <a:avLst>
+              <a:gd name="adj" fmla="val 5161"/>
+            </a:avLst>
+          </a:prstGeom>
+          <a:solidFill>
+            <a:srgbClr val="F4F5F6"/>
+          </a:solidFill>
+          <a:ln w="9525">
+            <a:solidFill>
+              <a:srgbClr val="DADDE0"/>
+            </a:solidFill>
+            <a:prstDash val="solid"/>
+          </a:ln>
+          <a:effectLst>
+            <a:outerShdw blurRad="88900" dist="25400" dir="5400000" algn="bl" rotWithShape="0">
+              <a:srgbClr val="000000">
+                <a:alpha val="10000"/>
+              </a:srgbClr>
+            </a:outerShdw>
+          </a:effectLst>
+        </p:spPr>
+      </p:sp>
+      <p:sp>
+        <p:nvSpPr>
+          <p:cNvPr id="7" name="Shape 5"/>
+          <p:cNvSpPr/>
+          <p:nvPr/>
+        </p:nvSpPr>
+        <p:spPr>
+          <a:xfrm>
+            <a:off x="658368" y="2057400"/>
+            <a:ext cx="457200" cy="457200"/>
+          </a:xfrm>
+          <a:prstGeom prst="ellipse">
+            <a:avLst/>
+          </a:prstGeom>
+          <a:solidFill>
+            <a:srgbClr val="86BC25"/>
+          </a:solidFill>
+          <a:ln/>
+        </p:spPr>
+      </p:sp>
+      <p:sp>
+        <p:nvSpPr>
+          <p:cNvPr id="8" name="Text 6"/>
+          <p:cNvSpPr/>
+          <p:nvPr/>
+        </p:nvSpPr>
+        <p:spPr>
+          <a:xfrm>
+            <a:off x="658368" y="2057400"/>
+            <a:ext cx="457200" cy="457200"/>
+          </a:xfrm>
+          <a:prstGeom prst="rect">
+            <a:avLst/>
+          </a:prstGeom>
+          <a:noFill/>
+          <a:ln/>
+        </p:spPr>
+        <p:txBody>
+          <a:bodyPr wrap="square" lIns="0" tIns="0" rIns="0" bIns="0" rtlCol="0" anchor="ctr"/>
+          <a:lstStyle/>
+          <a:p>
+            <a:pPr marL="0" indent="0" algn="ctr">
+              <a:buNone/>
+            </a:pPr>
+            <a:r>
+              <a:rPr lang="en-US" sz="1800" b="1" dirty="0">
+                <a:solidFill>
+                  <a:srgbClr val="FFFFFF"/>
+                </a:solidFill>
+                <a:latin typeface="Cambria" pitchFamily="34" charset="0"/>
+                <a:ea typeface="Cambria" pitchFamily="34" charset="-122"/>
+                <a:cs typeface="Cambria" pitchFamily="34" charset="-120"/>
+              </a:rPr>
+              <a:t>1</a:t>
+            </a:r>
+            <a:endParaRPr lang="en-US" sz="1800" dirty="0"/>
+          </a:p>
+        </p:txBody>
+      </p:sp>
+      <p:sp>
+        <p:nvSpPr>
+          <p:cNvPr id="9" name="Text 7"/>
+          <p:cNvSpPr/>
+          <p:nvPr/>
+        </p:nvSpPr>
+        <p:spPr>
+          <a:xfrm>
+            <a:off x="1234440" y="2121408"/>
+            <a:ext cx="1737360" cy="320040"/>
+          </a:xfrm>
+          <a:prstGeom prst="rect">
+            <a:avLst/>
+          </a:prstGeom>
+          <a:noFill/>
+          <a:ln/>
+        </p:spPr>
+        <p:txBody>
+          <a:bodyPr wrap="square" lIns="0" tIns="0" rIns="0" bIns="0" rtlCol="0" anchor="ctr"/>
+          <a:lstStyle/>
+          <a:p>
+            <a:pPr marL="0" indent="0">
+              <a:buNone/>
+            </a:pPr>
+            <a:r>
+              <a:rPr lang="en-US" sz="1500" b="1" dirty="0">
+                <a:solidFill>
+                  <a:srgbClr val="26282A"/>
+                </a:solidFill>
+                <a:latin typeface="Cambria" pitchFamily="34" charset="0"/>
+                <a:ea typeface="Cambria" pitchFamily="34" charset="-122"/>
+                <a:cs typeface="Cambria" pitchFamily="34" charset="-120"/>
+              </a:rPr>
+              <a:t>Retrieve</a:t>
+            </a:r>
+            <a:endParaRPr lang="en-US" sz="1500" dirty="0"/>
+          </a:p>
+        </p:txBody>
+      </p:sp>
+      <p:sp>
+        <p:nvSpPr>
+          <p:cNvPr id="10" name="Text 8"/>
+          <p:cNvSpPr/>
+          <p:nvPr/>
+        </p:nvSpPr>
+        <p:spPr>
+          <a:xfrm>
+            <a:off x="658368" y="2606040"/>
+            <a:ext cx="2331720" cy="594360"/>
+          </a:xfrm>
+          <a:prstGeom prst="rect">
+            <a:avLst/>
+          </a:prstGeom>
+          <a:noFill/>
+          <a:ln/>
+        </p:spPr>
+        <p:txBody>
+          <a:bodyPr wrap="square" lIns="0" tIns="0" rIns="0" bIns="0" rtlCol="0" anchor="ctr"/>
+          <a:lstStyle/>
+          <a:p>
+            <a:pPr marL="0" indent="0">
+              <a:buNone/>
+            </a:pPr>
+            <a:r>
+              <a:rPr lang="en-US" sz="1100" dirty="0">
+                <a:solidFill>
+                  <a:srgbClr val="44474A"/>
+                </a:solidFill>
+                <a:latin typeface="Calibri" pitchFamily="34" charset="0"/>
+                <a:ea typeface="Calibri" pitchFamily="34" charset="-122"/>
+                <a:cs typeface="Calibri" pitchFamily="34" charset="-120"/>
+              </a:rPr>
+              <a:t>Find relevant, trusted info — your files, policies, knowledge base</a:t>
+            </a:r>
+            <a:endParaRPr lang="en-US" sz="1100" dirty="0"/>
+          </a:p>
+        </p:txBody>
+      </p:sp>
+      <p:sp>
+        <p:nvSpPr>
+          <p:cNvPr id="11" name="Shape 9"/>
+          <p:cNvSpPr/>
+          <p:nvPr/>
+        </p:nvSpPr>
+        <p:spPr>
+          <a:xfrm>
+            <a:off x="3264408" y="1874520"/>
+            <a:ext cx="2679192" cy="1417320"/>
+          </a:xfrm>
+          <a:prstGeom prst="roundRect">
+            <a:avLst>
+              <a:gd name="adj" fmla="val 5161"/>
+            </a:avLst>
+          </a:prstGeom>
+          <a:solidFill>
+            <a:srgbClr val="F4F5F6"/>
+          </a:solidFill>
+          <a:ln w="9525">
+            <a:solidFill>
+              <a:srgbClr val="DADDE0"/>
+            </a:solidFill>
+            <a:prstDash val="solid"/>
+          </a:ln>
+          <a:effectLst>
+            <a:outerShdw blurRad="88900" dist="25400" dir="5400000" algn="bl" rotWithShape="0">
+              <a:srgbClr val="000000">
+                <a:alpha val="10000"/>
+              </a:srgbClr>
+            </a:outerShdw>
+          </a:effectLst>
+        </p:spPr>
+      </p:sp>
+      <p:sp>
+        <p:nvSpPr>
+          <p:cNvPr id="12" name="Shape 10"/>
+          <p:cNvSpPr/>
+          <p:nvPr/>
+        </p:nvSpPr>
+        <p:spPr>
+          <a:xfrm>
+            <a:off x="3465576" y="2057400"/>
+            <a:ext cx="457200" cy="457200"/>
+          </a:xfrm>
+          <a:prstGeom prst="ellipse">
+            <a:avLst/>
+          </a:prstGeom>
+          <a:solidFill>
+            <a:srgbClr val="86BC25"/>
+          </a:solidFill>
+          <a:ln/>
+        </p:spPr>
+      </p:sp>
+      <p:sp>
+        <p:nvSpPr>
+          <p:cNvPr id="13" name="Text 11"/>
+          <p:cNvSpPr/>
+          <p:nvPr/>
+        </p:nvSpPr>
+        <p:spPr>
+          <a:xfrm>
+            <a:off x="3465576" y="2057400"/>
+            <a:ext cx="457200" cy="457200"/>
+          </a:xfrm>
+          <a:prstGeom prst="rect">
+            <a:avLst/>
+          </a:prstGeom>
+          <a:noFill/>
+          <a:ln/>
+        </p:spPr>
+        <p:txBody>
+          <a:bodyPr wrap="square" lIns="0" tIns="0" rIns="0" bIns="0" rtlCol="0" anchor="ctr"/>
+          <a:lstStyle/>
+          <a:p>
+            <a:pPr marL="0" indent="0" algn="ctr">
+              <a:buNone/>
+            </a:pPr>
+            <a:r>
+              <a:rPr lang="en-US" sz="1800" b="1" dirty="0">
+                <a:solidFill>
+                  <a:srgbClr val="FFFFFF"/>
+                </a:solidFill>
+                <a:latin typeface="Cambria" pitchFamily="34" charset="0"/>
+                <a:ea typeface="Cambria" pitchFamily="34" charset="-122"/>
+                <a:cs typeface="Cambria" pitchFamily="34" charset="-120"/>
+              </a:rPr>
+              <a:t>2</a:t>
+            </a:r>
+            <a:endParaRPr lang="en-US" sz="1800" dirty="0"/>
+          </a:p>
+        </p:txBody>
+      </p:sp>
+      <p:sp>
+        <p:nvSpPr>
+          <p:cNvPr id="14" name="Text 12"/>
+          <p:cNvSpPr/>
+          <p:nvPr/>
+        </p:nvSpPr>
+        <p:spPr>
+          <a:xfrm>
+            <a:off x="4041648" y="2121408"/>
+            <a:ext cx="1737360" cy="320040"/>
+          </a:xfrm>
+          <a:prstGeom prst="rect">
+            <a:avLst/>
+          </a:prstGeom>
+          <a:noFill/>
+          <a:ln/>
+        </p:spPr>
+        <p:txBody>
+          <a:bodyPr wrap="square" lIns="0" tIns="0" rIns="0" bIns="0" rtlCol="0" anchor="ctr"/>
+          <a:lstStyle/>
+          <a:p>
+            <a:pPr marL="0" indent="0">
+              <a:buNone/>
+            </a:pPr>
+            <a:r>
+              <a:rPr lang="en-US" sz="1500" b="1" dirty="0">
+                <a:solidFill>
+                  <a:srgbClr val="26282A"/>
+                </a:solidFill>
+                <a:latin typeface="Cambria" pitchFamily="34" charset="0"/>
+                <a:ea typeface="Cambria" pitchFamily="34" charset="-122"/>
+                <a:cs typeface="Cambria" pitchFamily="34" charset="-120"/>
+              </a:rPr>
+              <a:t>Augment</a:t>
+            </a:r>
+            <a:endParaRPr lang="en-US" sz="1500" dirty="0"/>
+          </a:p>
+        </p:txBody>
+      </p:sp>
+      <p:sp>
+        <p:nvSpPr>
+          <p:cNvPr id="15" name="Text 13"/>
+          <p:cNvSpPr/>
+          <p:nvPr/>
+        </p:nvSpPr>
+        <p:spPr>
+          <a:xfrm>
+            <a:off x="3465576" y="2606040"/>
+            <a:ext cx="2331720" cy="594360"/>
+          </a:xfrm>
+          <a:prstGeom prst="rect">
+            <a:avLst/>
+          </a:prstGeom>
+          <a:noFill/>
+          <a:ln/>
+        </p:spPr>
+        <p:txBody>
+          <a:bodyPr wrap="square" lIns="0" tIns="0" rIns="0" bIns="0" rtlCol="0" anchor="ctr"/>
+          <a:lstStyle/>
+          <a:p>
+            <a:pPr marL="0" indent="0">
+              <a:buNone/>
+            </a:pPr>
+            <a:r>
+              <a:rPr lang="en-US" sz="1100" dirty="0">
+                <a:solidFill>
+                  <a:srgbClr val="44474A"/>
+                </a:solidFill>
+                <a:latin typeface="Calibri" pitchFamily="34" charset="0"/>
+                <a:ea typeface="Calibri" pitchFamily="34" charset="-122"/>
+                <a:cs typeface="Calibri" pitchFamily="34" charset="-120"/>
+              </a:rPr>
+              <a:t>Add that info into the prompt as context</a:t>
+            </a:r>
+            <a:endParaRPr lang="en-US" sz="1100" dirty="0"/>
+          </a:p>
+        </p:txBody>
+      </p:sp>
+      <p:sp>
+        <p:nvSpPr>
+          <p:cNvPr id="16" name="Shape 14"/>
+          <p:cNvSpPr/>
+          <p:nvPr/>
+        </p:nvSpPr>
+        <p:spPr>
+          <a:xfrm>
+            <a:off x="6071616" y="1874520"/>
+            <a:ext cx="2679192" cy="1417320"/>
+          </a:xfrm>
+          <a:prstGeom prst="roundRect">
+            <a:avLst>
+              <a:gd name="adj" fmla="val 5161"/>
+            </a:avLst>
+          </a:prstGeom>
+          <a:solidFill>
+            <a:srgbClr val="F4F5F6"/>
+          </a:solidFill>
+          <a:ln w="9525">
+            <a:solidFill>
+              <a:srgbClr val="DADDE0"/>
+            </a:solidFill>
+            <a:prstDash val="solid"/>
+          </a:ln>
+          <a:effectLst>
+            <a:outerShdw blurRad="88900" dist="25400" dir="5400000" algn="bl" rotWithShape="0">
+              <a:srgbClr val="000000">
+                <a:alpha val="10000"/>
+              </a:srgbClr>
+            </a:outerShdw>
+          </a:effectLst>
+        </p:spPr>
+      </p:sp>
+      <p:sp>
+        <p:nvSpPr>
+          <p:cNvPr id="17" name="Shape 15"/>
+          <p:cNvSpPr/>
+          <p:nvPr/>
+        </p:nvSpPr>
+        <p:spPr>
+          <a:xfrm>
+            <a:off x="6272784" y="2057400"/>
+            <a:ext cx="457200" cy="457200"/>
+          </a:xfrm>
+          <a:prstGeom prst="ellipse">
+            <a:avLst/>
+          </a:prstGeom>
+          <a:solidFill>
+            <a:srgbClr val="86BC25"/>
+          </a:solidFill>
+          <a:ln/>
+        </p:spPr>
+      </p:sp>
+      <p:sp>
+        <p:nvSpPr>
+          <p:cNvPr id="18" name="Text 16"/>
+          <p:cNvSpPr/>
+          <p:nvPr/>
+        </p:nvSpPr>
+        <p:spPr>
+          <a:xfrm>
+            <a:off x="6272784" y="2057400"/>
+            <a:ext cx="457200" cy="457200"/>
+          </a:xfrm>
+          <a:prstGeom prst="rect">
+            <a:avLst/>
+          </a:prstGeom>
+          <a:noFill/>
+          <a:ln/>
+        </p:spPr>
+        <p:txBody>
+          <a:bodyPr wrap="square" lIns="0" tIns="0" rIns="0" bIns="0" rtlCol="0" anchor="ctr"/>
+          <a:lstStyle/>
+          <a:p>
+            <a:pPr marL="0" indent="0" algn="ctr">
+              <a:buNone/>
+            </a:pPr>
+            <a:r>
+              <a:rPr lang="en-US" sz="1800" b="1" dirty="0">
+                <a:solidFill>
+                  <a:srgbClr val="FFFFFF"/>
+                </a:solidFill>
+                <a:latin typeface="Cambria" pitchFamily="34" charset="0"/>
+                <a:ea typeface="Cambria" pitchFamily="34" charset="-122"/>
+                <a:cs typeface="Cambria" pitchFamily="34" charset="-120"/>
+              </a:rPr>
+              <a:t>3</a:t>
+            </a:r>
+            <a:endParaRPr lang="en-US" sz="1800" dirty="0"/>
+          </a:p>
+        </p:txBody>
+      </p:sp>
+      <p:sp>
+        <p:nvSpPr>
+          <p:cNvPr id="19" name="Text 17"/>
+          <p:cNvSpPr/>
+          <p:nvPr/>
+        </p:nvSpPr>
+        <p:spPr>
+          <a:xfrm>
+            <a:off x="6848856" y="2121408"/>
+            <a:ext cx="1737360" cy="320040"/>
+          </a:xfrm>
+          <a:prstGeom prst="rect">
+            <a:avLst/>
+          </a:prstGeom>
+          <a:noFill/>
+          <a:ln/>
+        </p:spPr>
+        <p:txBody>
+          <a:bodyPr wrap="square" lIns="0" tIns="0" rIns="0" bIns="0" rtlCol="0" anchor="ctr"/>
+          <a:lstStyle/>
+          <a:p>
+            <a:pPr marL="0" indent="0">
+              <a:buNone/>
+            </a:pPr>
+            <a:r>
+              <a:rPr lang="en-US" sz="1500" b="1" dirty="0">
+                <a:solidFill>
+                  <a:srgbClr val="26282A"/>
+                </a:solidFill>
+                <a:latin typeface="Cambria" pitchFamily="34" charset="0"/>
+                <a:ea typeface="Cambria" pitchFamily="34" charset="-122"/>
+                <a:cs typeface="Cambria" pitchFamily="34" charset="-120"/>
+              </a:rPr>
+              <a:t>Generate</a:t>
+            </a:r>
+            <a:endParaRPr lang="en-US" sz="1500" dirty="0"/>
+          </a:p>
+        </p:txBody>
+      </p:sp>
+      <p:sp>
+        <p:nvSpPr>
+          <p:cNvPr id="20" name="Text 18"/>
+          <p:cNvSpPr/>
+          <p:nvPr/>
+        </p:nvSpPr>
+        <p:spPr>
+          <a:xfrm>
+            <a:off x="6272784" y="2606040"/>
+            <a:ext cx="2331720" cy="594360"/>
+          </a:xfrm>
+          <a:prstGeom prst="rect">
+            <a:avLst/>
+          </a:prstGeom>
+          <a:noFill/>
+          <a:ln/>
+        </p:spPr>
+        <p:txBody>
+          <a:bodyPr wrap="square" lIns="0" tIns="0" rIns="0" bIns="0" rtlCol="0" anchor="ctr"/>
+          <a:lstStyle/>
+          <a:p>
+            <a:pPr marL="0" indent="0">
+              <a:buNone/>
+            </a:pPr>
+            <a:r>
+              <a:rPr lang="en-US" sz="1100" dirty="0">
+                <a:solidFill>
+                  <a:srgbClr val="44474A"/>
+                </a:solidFill>
+                <a:latin typeface="Calibri" pitchFamily="34" charset="0"/>
+                <a:ea typeface="Calibri" pitchFamily="34" charset="-122"/>
+                <a:cs typeface="Calibri" pitchFamily="34" charset="-120"/>
+              </a:rPr>
+              <a:t>Answer grounded in the retrieved facts</a:t>
+            </a:r>
+            <a:endParaRPr lang="en-US" sz="1100" dirty="0"/>
+          </a:p>
+        </p:txBody>
+      </p:sp>
+      <p:sp>
+        <p:nvSpPr>
+          <p:cNvPr id="21" name="Shape 19"/>
+          <p:cNvSpPr/>
+          <p:nvPr/>
+        </p:nvSpPr>
+        <p:spPr>
+          <a:xfrm>
+            <a:off x="457200" y="3429000"/>
+            <a:ext cx="8229600" cy="566928"/>
+          </a:xfrm>
+          <a:prstGeom prst="roundRect">
+            <a:avLst>
+              <a:gd name="adj" fmla="val 12903"/>
+            </a:avLst>
+          </a:prstGeom>
+          <a:solidFill>
+            <a:srgbClr val="EDF4DF"/>
+          </a:solidFill>
+          <a:ln w="9525">
+            <a:solidFill>
+              <a:srgbClr val="DADDE0"/>
+            </a:solidFill>
+            <a:prstDash val="solid"/>
+          </a:ln>
+          <a:effectLst>
+            <a:outerShdw blurRad="88900" dist="25400" dir="5400000" algn="bl" rotWithShape="0">
+              <a:srgbClr val="000000">
+                <a:alpha val="10000"/>
+              </a:srgbClr>
+            </a:outerShdw>
+          </a:effectLst>
+        </p:spPr>
+      </p:sp>
+      <p:sp>
+        <p:nvSpPr>
+          <p:cNvPr id="22" name="Text 20"/>
+          <p:cNvSpPr/>
+          <p:nvPr/>
+        </p:nvSpPr>
+        <p:spPr>
+          <a:xfrm>
+            <a:off x="685800" y="3529584"/>
+            <a:ext cx="7772400" cy="365760"/>
+          </a:xfrm>
+          <a:prstGeom prst="rect">
+            <a:avLst/>
+          </a:prstGeom>
+          <a:noFill/>
+          <a:ln/>
+        </p:spPr>
+        <p:txBody>
+          <a:bodyPr wrap="square" lIns="0" tIns="0" rIns="0" bIns="0" rtlCol="0" anchor="ctr"/>
+          <a:lstStyle/>
+          <a:p>
+            <a:pPr marL="0" indent="0">
+              <a:buNone/>
+            </a:pPr>
+            <a:r>
+              <a:rPr lang="en-US" sz="1200" b="1" dirty="0">
+                <a:solidFill>
+                  <a:srgbClr val="5C8A1B"/>
+                </a:solidFill>
+                <a:latin typeface="Calibri" pitchFamily="34" charset="0"/>
+                <a:ea typeface="Calibri" pitchFamily="34" charset="-122"/>
+                <a:cs typeface="Calibri" pitchFamily="34" charset="-120"/>
+              </a:rPr>
+              <a:t>Why it matters:  </a:t>
+            </a:r>
+            <a:r>
+              <a:rPr lang="en-US" sz="1200" dirty="0">
+                <a:solidFill>
+                  <a:srgbClr val="26282A"/>
+                </a:solidFill>
+                <a:latin typeface="Calibri" pitchFamily="34" charset="0"/>
+                <a:ea typeface="Calibri" pitchFamily="34" charset="-122"/>
+                <a:cs typeface="Calibri" pitchFamily="34" charset="-120"/>
+              </a:rPr>
+              <a:t>answers grounded in your approved, current data  ·  far fewer hallucinations  ·  sources you can actually check.</a:t>
+            </a:r>
+            <a:endParaRPr lang="en-US" sz="1200" dirty="0"/>
+          </a:p>
+        </p:txBody>
+      </p:sp>
+      <p:sp>
+        <p:nvSpPr>
+          <p:cNvPr id="23" name="Shape 21"/>
+          <p:cNvSpPr/>
+          <p:nvPr/>
+        </p:nvSpPr>
+        <p:spPr>
+          <a:xfrm>
+            <a:off x="457200" y="4114800"/>
+            <a:ext cx="8229600" cy="502920"/>
+          </a:xfrm>
+          <a:prstGeom prst="roundRect">
+            <a:avLst>
+              <a:gd name="adj" fmla="val 14545"/>
+            </a:avLst>
+          </a:prstGeom>
+          <a:solidFill>
+            <a:srgbClr val="F4F5F6"/>
+          </a:solidFill>
+          <a:ln w="9525">
+            <a:solidFill>
+              <a:srgbClr val="DADDE0"/>
+            </a:solidFill>
+            <a:prstDash val="solid"/>
+          </a:ln>
+          <a:effectLst>
+            <a:outerShdw blurRad="88900" dist="25400" dir="5400000" algn="bl" rotWithShape="0">
+              <a:srgbClr val="000000">
+                <a:alpha val="10000"/>
+              </a:srgbClr>
+            </a:outerShdw>
+          </a:effectLst>
+        </p:spPr>
+      </p:sp>
+      <p:sp>
+        <p:nvSpPr>
+          <p:cNvPr id="24" name="Text 22"/>
+          <p:cNvSpPr/>
+          <p:nvPr/>
+        </p:nvSpPr>
+        <p:spPr>
+          <a:xfrm>
+            <a:off x="685800" y="4206240"/>
+            <a:ext cx="7772400" cy="329184"/>
+          </a:xfrm>
+          <a:prstGeom prst="rect">
+            <a:avLst/>
+          </a:prstGeom>
+          <a:noFill/>
+          <a:ln/>
+        </p:spPr>
+        <p:txBody>
+          <a:bodyPr wrap="square" lIns="0" tIns="0" rIns="0" bIns="0" rtlCol="0" anchor="ctr"/>
+          <a:lstStyle/>
+          <a:p>
+            <a:pPr marL="0" indent="0">
+              <a:buNone/>
+            </a:pPr>
+            <a:r>
+              <a:rPr lang="en-US" sz="1200" b="1" i="1" dirty="0">
+                <a:solidFill>
+                  <a:srgbClr val="26282A"/>
+                </a:solidFill>
+                <a:latin typeface="Calibri" pitchFamily="34" charset="0"/>
+                <a:ea typeface="Calibri" pitchFamily="34" charset="-122"/>
+                <a:cs typeface="Calibri" pitchFamily="34" charset="-120"/>
+              </a:rPr>
+              <a:t>Analogy:  </a:t>
+            </a:r>
+            <a:r>
+              <a:rPr lang="en-US" sz="1200" i="1" dirty="0">
+                <a:solidFill>
+                  <a:srgbClr val="44474A"/>
+                </a:solidFill>
+                <a:latin typeface="Calibri" pitchFamily="34" charset="0"/>
+                <a:ea typeface="Calibri" pitchFamily="34" charset="-122"/>
+                <a:cs typeface="Calibri" pitchFamily="34" charset="-120"/>
+              </a:rPr>
+              <a:t>closed-book vs open-book exam. A plain LLM answers from memory; RAG lets it check the textbook first.</a:t>
+            </a:r>
+            <a:endParaRPr lang="en-US" sz="1200" dirty="0"/>
+          </a:p>
+        </p:txBody>
+      </p:sp>
+      <p:sp>
+        <p:nvSpPr>
+          <p:cNvPr id="25" name="Text 23"/>
+          <p:cNvSpPr/>
+          <p:nvPr/>
+        </p:nvSpPr>
+        <p:spPr>
+          <a:xfrm>
+            <a:off x="457200" y="4873752"/>
+            <a:ext cx="5486400" cy="228600"/>
+          </a:xfrm>
+          <a:prstGeom prst="rect">
+            <a:avLst/>
+          </a:prstGeom>
+          <a:noFill/>
+          <a:ln/>
+        </p:spPr>
+        <p:txBody>
+          <a:bodyPr wrap="square" lIns="0" tIns="0" rIns="0" bIns="0" rtlCol="0" anchor="ctr"/>
+          <a:lstStyle/>
+          <a:p>
+            <a:pPr marL="0" indent="0">
+              <a:buNone/>
+            </a:pPr>
+            <a:r>
+              <a:rPr lang="en-US" sz="800" dirty="0">
+                <a:solidFill>
+                  <a:srgbClr val="7A7D81"/>
+                </a:solidFill>
+                <a:latin typeface="Calibri" pitchFamily="34" charset="0"/>
+                <a:ea typeface="Calibri" pitchFamily="34" charset="-122"/>
+                <a:cs typeface="Calibri" pitchFamily="34" charset="-120"/>
+              </a:rPr>
+              <a:t>Basics of AI/ML &amp; Prompt Engineering</a:t>
+            </a:r>
+            <a:endParaRPr lang="en-US" sz="800" dirty="0"/>
+          </a:p>
+        </p:txBody>
+      </p:sp>
+      <p:sp>
+        <p:nvSpPr>
+          <p:cNvPr id="26" name="Text 24"/>
+          <p:cNvSpPr/>
+          <p:nvPr/>
+        </p:nvSpPr>
+        <p:spPr>
+          <a:xfrm>
+            <a:off x="8321040" y="4873752"/>
+            <a:ext cx="365760" cy="228600"/>
+          </a:xfrm>
+          <a:prstGeom prst="rect">
+            <a:avLst/>
+          </a:prstGeom>
+          <a:noFill/>
+          <a:ln/>
+        </p:spPr>
+        <p:txBody>
+          <a:bodyPr wrap="square" lIns="0" tIns="0" rIns="0" bIns="0" rtlCol="0" anchor="ctr"/>
+          <a:lstStyle/>
+          <a:p>
+            <a:pPr marL="0" indent="0" algn="r">
+              <a:buNone/>
+            </a:pPr>
+            <a:r>
+              <a:rPr lang="en-US" sz="800" dirty="0">
+                <a:solidFill>
+                  <a:srgbClr val="7A7D81"/>
+                </a:solidFill>
+                <a:latin typeface="Calibri" pitchFamily="34" charset="0"/>
+                <a:ea typeface="Calibri" pitchFamily="34" charset="-122"/>
+                <a:cs typeface="Calibri" pitchFamily="34" charset="-120"/>
+              </a:rPr>
+              <a:t>4</a:t>
+            </a:r>
+            <a:endParaRPr lang="en-US" sz="800" dirty="0"/>
+          </a:p>
+        </p:txBody>
+      </p:sp>
+    </p:spTree>
+    <p:extLst>
+      <p:ext uri="{BB962C8B-B14F-4D97-AF65-F5344CB8AC3E}">
+        <p14:creationId xmlns:p14="http://schemas.microsoft.com/office/powerpoint/2010/main" val="703147089"/>
+      </p:ext>
+    </p:extLst>
+  </p:cSld>
+  <p:clrMapOvr>
+    <a:masterClrMapping/>
+  </p:clrMapOvr>
+</p:sld>
+</file>
+
+<file path=ppt/slides/slide35.xml><?xml version="1.0" encoding="utf-8"?>
+<p:sld xmlns:a="http://schemas.openxmlformats.org/drawingml/2006/main" xmlns:r="http://schemas.openxmlformats.org/officeDocument/2006/relationships" xmlns:p="http://schemas.openxmlformats.org/presentationml/2006/main">
+  <p:cSld>
+    <p:spTree>
+      <p:nvGrpSpPr>
+        <p:cNvPr id="1" name=""/>
+        <p:cNvGrpSpPr/>
+        <p:nvPr/>
+      </p:nvGrpSpPr>
+      <p:grpSpPr>
+        <a:xfrm>
+          <a:off x="0" y="0"/>
+          <a:ext cx="0" cy="0"/>
+          <a:chOff x="0" y="0"/>
+          <a:chExt cx="0" cy="0"/>
+        </a:xfrm>
+      </p:grpSpPr>
+      <p:sp>
+        <p:nvSpPr>
+          <p:cNvPr id="2" name="Shape 0"/>
+          <p:cNvSpPr/>
+          <p:nvPr/>
+        </p:nvSpPr>
+        <p:spPr>
+          <a:xfrm>
+            <a:off x="457200" y="402336"/>
+            <a:ext cx="109728" cy="109728"/>
+          </a:xfrm>
+          <a:prstGeom prst="ellipse">
+            <a:avLst/>
+          </a:prstGeom>
+          <a:solidFill>
+            <a:srgbClr val="86BC25"/>
+          </a:solidFill>
+          <a:ln/>
+        </p:spPr>
+      </p:sp>
+      <p:sp>
+        <p:nvSpPr>
+          <p:cNvPr id="3" name="Text 1"/>
+          <p:cNvSpPr/>
+          <p:nvPr/>
+        </p:nvSpPr>
+        <p:spPr>
+          <a:xfrm>
+            <a:off x="658368" y="329184"/>
+            <a:ext cx="7955280" cy="256032"/>
+          </a:xfrm>
+          <a:prstGeom prst="rect">
+            <a:avLst/>
+          </a:prstGeom>
+          <a:noFill/>
+          <a:ln/>
+        </p:spPr>
+        <p:txBody>
+          <a:bodyPr wrap="square" lIns="0" tIns="0" rIns="0" bIns="0" rtlCol="0" anchor="ctr"/>
+          <a:lstStyle/>
+          <a:p>
+            <a:pPr marL="0" indent="0">
+              <a:buNone/>
+            </a:pPr>
+            <a:r>
+              <a:rPr lang="en-US" sz="1100" b="1" kern="0" spc="200" dirty="0">
+                <a:solidFill>
+                  <a:srgbClr val="5C8A1B"/>
+                </a:solidFill>
+                <a:latin typeface="Calibri" pitchFamily="34" charset="0"/>
+                <a:ea typeface="Calibri" pitchFamily="34" charset="-122"/>
+                <a:cs typeface="Calibri" pitchFamily="34" charset="-120"/>
+              </a:rPr>
+              <a:t>MODULE 4 · PROMPT ENGINEERING</a:t>
+            </a:r>
+            <a:endParaRPr lang="en-US" sz="1100" dirty="0"/>
+          </a:p>
+        </p:txBody>
+      </p:sp>
+      <p:sp>
+        <p:nvSpPr>
+          <p:cNvPr id="4" name="Text 2"/>
+          <p:cNvSpPr/>
+          <p:nvPr/>
+        </p:nvSpPr>
+        <p:spPr>
+          <a:xfrm>
+            <a:off x="457200" y="603504"/>
+            <a:ext cx="8229600" cy="640080"/>
+          </a:xfrm>
+          <a:prstGeom prst="rect">
+            <a:avLst/>
+          </a:prstGeom>
+          <a:noFill/>
+          <a:ln/>
+        </p:spPr>
+        <p:txBody>
+          <a:bodyPr wrap="square" lIns="0" tIns="0" rIns="0" bIns="0" rtlCol="0" anchor="ctr"/>
+          <a:lstStyle/>
+          <a:p>
+            <a:pPr marL="0" indent="0">
+              <a:buNone/>
+            </a:pPr>
+            <a:r>
+              <a:rPr lang="en-US" sz="2900" b="1" dirty="0">
+                <a:solidFill>
+                  <a:srgbClr val="26282A"/>
+                </a:solidFill>
+                <a:latin typeface="Cambria" pitchFamily="34" charset="0"/>
+                <a:ea typeface="Cambria" pitchFamily="34" charset="-122"/>
+                <a:cs typeface="Cambria" pitchFamily="34" charset="-120"/>
+              </a:rPr>
+              <a:t>Bad vs good prompt — a worked example</a:t>
+            </a:r>
+            <a:endParaRPr lang="en-US" sz="2900" dirty="0"/>
+          </a:p>
+        </p:txBody>
+      </p:sp>
+      <p:sp>
+        <p:nvSpPr>
+          <p:cNvPr id="5" name="Shape 3"/>
+          <p:cNvSpPr/>
+          <p:nvPr/>
+        </p:nvSpPr>
+        <p:spPr>
+          <a:xfrm>
+            <a:off x="457200" y="1371600"/>
+            <a:ext cx="8229600" cy="1051560"/>
+          </a:xfrm>
+          <a:prstGeom prst="roundRect">
+            <a:avLst>
+              <a:gd name="adj" fmla="val 6957"/>
+            </a:avLst>
+          </a:prstGeom>
+          <a:solidFill>
+            <a:srgbClr val="F6E7E4"/>
+          </a:solidFill>
+          <a:ln w="9525">
+            <a:solidFill>
+              <a:srgbClr val="DADDE0"/>
+            </a:solidFill>
+            <a:prstDash val="solid"/>
+          </a:ln>
+          <a:effectLst>
+            <a:outerShdw blurRad="88900" dist="25400" dir="5400000" algn="bl" rotWithShape="0">
+              <a:srgbClr val="000000">
+                <a:alpha val="10000"/>
+              </a:srgbClr>
+            </a:outerShdw>
+          </a:effectLst>
+        </p:spPr>
+      </p:sp>
+      <p:sp>
+        <p:nvSpPr>
+          <p:cNvPr id="6" name="Text 4"/>
+          <p:cNvSpPr/>
+          <p:nvPr/>
+        </p:nvSpPr>
+        <p:spPr>
+          <a:xfrm>
+            <a:off x="685800" y="1463040"/>
+            <a:ext cx="2743200" cy="256032"/>
+          </a:xfrm>
+          <a:prstGeom prst="rect">
+            <a:avLst/>
+          </a:prstGeom>
+          <a:noFill/>
+          <a:ln/>
+        </p:spPr>
+        <p:txBody>
+          <a:bodyPr wrap="square" lIns="0" tIns="0" rIns="0" bIns="0" rtlCol="0" anchor="ctr"/>
+          <a:lstStyle/>
+          <a:p>
+            <a:pPr marL="0" indent="0">
+              <a:buNone/>
+            </a:pPr>
+            <a:r>
+              <a:rPr lang="en-US" sz="1100" b="1" kern="0" spc="100" dirty="0">
+                <a:solidFill>
+                  <a:srgbClr val="B23A2E"/>
+                </a:solidFill>
+                <a:latin typeface="Calibri" pitchFamily="34" charset="0"/>
+                <a:ea typeface="Calibri" pitchFamily="34" charset="-122"/>
+                <a:cs typeface="Calibri" pitchFamily="34" charset="-120"/>
+              </a:rPr>
+              <a:t>✗  BAD PROMPT</a:t>
+            </a:r>
+            <a:endParaRPr lang="en-US" sz="1100" dirty="0"/>
+          </a:p>
+        </p:txBody>
+      </p:sp>
+      <p:sp>
+        <p:nvSpPr>
+          <p:cNvPr id="7" name="Text 5"/>
+          <p:cNvSpPr/>
+          <p:nvPr/>
+        </p:nvSpPr>
+        <p:spPr>
+          <a:xfrm>
+            <a:off x="685800" y="1737360"/>
+            <a:ext cx="7772400" cy="365760"/>
+          </a:xfrm>
+          <a:prstGeom prst="rect">
+            <a:avLst/>
+          </a:prstGeom>
+          <a:noFill/>
+          <a:ln/>
+        </p:spPr>
+        <p:txBody>
+          <a:bodyPr wrap="square" lIns="0" tIns="0" rIns="0" bIns="0" rtlCol="0" anchor="ctr"/>
+          <a:lstStyle/>
+          <a:p>
+            <a:pPr marL="0" indent="0">
+              <a:buNone/>
+            </a:pPr>
+            <a:r>
+              <a:rPr lang="en-US" sz="1200" b="1" dirty="0">
+                <a:solidFill>
+                  <a:srgbClr val="26282A"/>
+                </a:solidFill>
+                <a:latin typeface="Calibri" pitchFamily="34" charset="0"/>
+                <a:ea typeface="Calibri" pitchFamily="34" charset="-122"/>
+                <a:cs typeface="Calibri" pitchFamily="34" charset="-120"/>
+              </a:rPr>
+              <a:t>“Summarize this client's data.”     →  Output: </a:t>
+            </a:r>
+            <a:r>
+              <a:rPr lang="en-US" sz="1200" dirty="0">
+                <a:solidFill>
+                  <a:srgbClr val="44474A"/>
+                </a:solidFill>
+                <a:latin typeface="Calibri" pitchFamily="34" charset="0"/>
+                <a:ea typeface="Calibri" pitchFamily="34" charset="-122"/>
+                <a:cs typeface="Calibri" pitchFamily="34" charset="-120"/>
+              </a:rPr>
+              <a:t>“The client operates in the consumer goods sector and sells multiple products globally.”</a:t>
+            </a:r>
+            <a:endParaRPr lang="en-US" sz="1200" dirty="0"/>
+          </a:p>
+        </p:txBody>
+      </p:sp>
+      <p:sp>
+        <p:nvSpPr>
+          <p:cNvPr id="8" name="Text 6"/>
+          <p:cNvSpPr/>
+          <p:nvPr/>
+        </p:nvSpPr>
+        <p:spPr>
+          <a:xfrm>
+            <a:off x="685800" y="2103120"/>
+            <a:ext cx="7772400" cy="256032"/>
+          </a:xfrm>
+          <a:prstGeom prst="rect">
+            <a:avLst/>
+          </a:prstGeom>
+          <a:noFill/>
+          <a:ln/>
+        </p:spPr>
+        <p:txBody>
+          <a:bodyPr wrap="square" lIns="0" tIns="0" rIns="0" bIns="0" rtlCol="0" anchor="ctr"/>
+          <a:lstStyle/>
+          <a:p>
+            <a:pPr marL="0" indent="0">
+              <a:buNone/>
+            </a:pPr>
+            <a:r>
+              <a:rPr lang="en-US" sz="1100" i="1" dirty="0">
+                <a:solidFill>
+                  <a:srgbClr val="B23A2E"/>
+                </a:solidFill>
+                <a:latin typeface="Calibri" pitchFamily="34" charset="0"/>
+                <a:ea typeface="Calibri" pitchFamily="34" charset="-122"/>
+                <a:cs typeface="Calibri" pitchFamily="34" charset="-120"/>
+              </a:rPr>
+              <a:t>Generic — lacks focus and business insight.</a:t>
+            </a:r>
+            <a:endParaRPr lang="en-US" sz="1100" dirty="0"/>
+          </a:p>
+        </p:txBody>
+      </p:sp>
+      <p:sp>
+        <p:nvSpPr>
+          <p:cNvPr id="9" name="Shape 7"/>
+          <p:cNvSpPr/>
+          <p:nvPr/>
+        </p:nvSpPr>
+        <p:spPr>
+          <a:xfrm>
+            <a:off x="457200" y="2560320"/>
+            <a:ext cx="8229600" cy="2194560"/>
+          </a:xfrm>
+          <a:prstGeom prst="roundRect">
+            <a:avLst>
+              <a:gd name="adj" fmla="val 3333"/>
+            </a:avLst>
+          </a:prstGeom>
+          <a:solidFill>
+            <a:srgbClr val="EDF4DF"/>
+          </a:solidFill>
+          <a:ln w="9525">
+            <a:solidFill>
+              <a:srgbClr val="DADDE0"/>
+            </a:solidFill>
+            <a:prstDash val="solid"/>
+          </a:ln>
+          <a:effectLst>
+            <a:outerShdw blurRad="88900" dist="25400" dir="5400000" algn="bl" rotWithShape="0">
+              <a:srgbClr val="000000">
+                <a:alpha val="10000"/>
+              </a:srgbClr>
+            </a:outerShdw>
+          </a:effectLst>
+        </p:spPr>
+      </p:sp>
+      <p:sp>
+        <p:nvSpPr>
+          <p:cNvPr id="10" name="Text 8"/>
+          <p:cNvSpPr/>
+          <p:nvPr/>
+        </p:nvSpPr>
+        <p:spPr>
+          <a:xfrm>
+            <a:off x="685800" y="2651760"/>
+            <a:ext cx="2743200" cy="256032"/>
+          </a:xfrm>
+          <a:prstGeom prst="rect">
+            <a:avLst/>
+          </a:prstGeom>
+          <a:noFill/>
+          <a:ln/>
+        </p:spPr>
+        <p:txBody>
+          <a:bodyPr wrap="square" lIns="0" tIns="0" rIns="0" bIns="0" rtlCol="0" anchor="ctr"/>
+          <a:lstStyle/>
+          <a:p>
+            <a:pPr marL="0" indent="0">
+              <a:buNone/>
+            </a:pPr>
+            <a:r>
+              <a:rPr lang="en-US" sz="1100" b="1" kern="0" spc="100" dirty="0">
+                <a:solidFill>
+                  <a:srgbClr val="5C8A1B"/>
+                </a:solidFill>
+                <a:latin typeface="Calibri" pitchFamily="34" charset="0"/>
+                <a:ea typeface="Calibri" pitchFamily="34" charset="-122"/>
+                <a:cs typeface="Calibri" pitchFamily="34" charset="-120"/>
+              </a:rPr>
+              <a:t>✓  GOOD PROMPT</a:t>
+            </a:r>
+            <a:endParaRPr lang="en-US" sz="1100" dirty="0"/>
+          </a:p>
+        </p:txBody>
+      </p:sp>
+      <p:sp>
+        <p:nvSpPr>
+          <p:cNvPr id="11" name="Text 9"/>
+          <p:cNvSpPr/>
+          <p:nvPr/>
+        </p:nvSpPr>
+        <p:spPr>
+          <a:xfrm>
+            <a:off x="685800" y="2907792"/>
+            <a:ext cx="7772400" cy="502920"/>
+          </a:xfrm>
+          <a:prstGeom prst="rect">
+            <a:avLst/>
+          </a:prstGeom>
+          <a:noFill/>
+          <a:ln/>
+        </p:spPr>
+        <p:txBody>
+          <a:bodyPr wrap="square" lIns="0" tIns="0" rIns="0" bIns="0" rtlCol="0" anchor="ctr"/>
+          <a:lstStyle/>
+          <a:p>
+            <a:pPr marL="0" indent="0">
+              <a:buNone/>
+            </a:pPr>
+            <a:r>
+              <a:rPr lang="en-US" sz="1200" b="1" dirty="0">
+                <a:solidFill>
+                  <a:srgbClr val="26282A"/>
+                </a:solidFill>
+                <a:latin typeface="Calibri" pitchFamily="34" charset="0"/>
+                <a:ea typeface="Calibri" pitchFamily="34" charset="-122"/>
+                <a:cs typeface="Calibri" pitchFamily="34" charset="-120"/>
+              </a:rPr>
+              <a:t>“Analyze this client's quarterly sales data and summarize the top three performance trends. Highlight potential business risks and recommend two data-driven actions to improve revenue growth.”</a:t>
+            </a:r>
+            <a:endParaRPr lang="en-US" sz="1200" dirty="0"/>
+          </a:p>
+        </p:txBody>
+      </p:sp>
+      <p:sp>
+        <p:nvSpPr>
+          <p:cNvPr id="12" name="Text 10"/>
+          <p:cNvSpPr/>
+          <p:nvPr/>
+        </p:nvSpPr>
+        <p:spPr>
+          <a:xfrm>
+            <a:off x="685800" y="3401568"/>
+            <a:ext cx="7772400" cy="1051560"/>
+          </a:xfrm>
+          <a:prstGeom prst="rect">
+            <a:avLst/>
+          </a:prstGeom>
+          <a:noFill/>
+          <a:ln/>
+        </p:spPr>
+        <p:txBody>
+          <a:bodyPr wrap="square" lIns="0" tIns="0" rIns="0" bIns="0" rtlCol="0" anchor="ctr"/>
+          <a:lstStyle/>
+          <a:p>
+            <a:pPr marL="0" indent="0">
+              <a:spcAft>
+                <a:spcPts val="300"/>
+              </a:spcAft>
+              <a:buNone/>
+            </a:pPr>
+            <a:r>
+              <a:rPr lang="en-US" sz="1100" b="1" dirty="0">
+                <a:solidFill>
+                  <a:srgbClr val="26282A"/>
+                </a:solidFill>
+                <a:latin typeface="Calibri" pitchFamily="34" charset="0"/>
+                <a:ea typeface="Calibri" pitchFamily="34" charset="-122"/>
+                <a:cs typeface="Calibri" pitchFamily="34" charset="-120"/>
+              </a:rPr>
+              <a:t>→ Output:</a:t>
+            </a:r>
+            <a:endParaRPr lang="en-US" sz="1100" dirty="0"/>
+          </a:p>
+          <a:p>
+            <a:pPr marL="0" indent="0">
+              <a:spcAft>
+                <a:spcPts val="200"/>
+              </a:spcAft>
+              <a:buNone/>
+            </a:pPr>
+            <a:r>
+              <a:rPr lang="en-US" sz="1100" dirty="0">
+                <a:solidFill>
+                  <a:srgbClr val="26282A"/>
+                </a:solidFill>
+                <a:latin typeface="Calibri" pitchFamily="34" charset="0"/>
+                <a:ea typeface="Calibri" pitchFamily="34" charset="-122"/>
+                <a:cs typeface="Calibri" pitchFamily="34" charset="-120"/>
+              </a:rPr>
+              <a:t>1.  Sales growth concentration: 70% of revenue from two SKUs — over-dependence risk.</a:t>
+            </a:r>
+            <a:endParaRPr lang="en-US" sz="1100" dirty="0"/>
+          </a:p>
+          <a:p>
+            <a:pPr marL="0" indent="0">
+              <a:spcAft>
+                <a:spcPts val="200"/>
+              </a:spcAft>
+              <a:buNone/>
+            </a:pPr>
+            <a:r>
+              <a:rPr lang="en-US" sz="1100" dirty="0">
+                <a:solidFill>
+                  <a:srgbClr val="26282A"/>
+                </a:solidFill>
+                <a:latin typeface="Calibri" pitchFamily="34" charset="0"/>
+                <a:ea typeface="Calibri" pitchFamily="34" charset="-122"/>
+                <a:cs typeface="Calibri" pitchFamily="34" charset="-120"/>
+              </a:rPr>
+              <a:t>2.  Declining market share: 5% drop in Tier-2 cities — needs regional re-engagement.</a:t>
+            </a:r>
+            <a:endParaRPr lang="en-US" sz="1100" dirty="0"/>
+          </a:p>
+          <a:p>
+            <a:pPr marL="0" indent="0">
+              <a:spcAft>
+                <a:spcPts val="300"/>
+              </a:spcAft>
+              <a:buNone/>
+            </a:pPr>
+            <a:r>
+              <a:rPr lang="en-US" sz="1100" dirty="0">
+                <a:solidFill>
+                  <a:srgbClr val="26282A"/>
+                </a:solidFill>
+                <a:latin typeface="Calibri" pitchFamily="34" charset="0"/>
+                <a:ea typeface="Calibri" pitchFamily="34" charset="-122"/>
+                <a:cs typeface="Calibri" pitchFamily="34" charset="-120"/>
+              </a:rPr>
+              <a:t>3.  Inventory turnover 20% slower than industry average — optimisation opportunity.</a:t>
+            </a:r>
+            <a:endParaRPr lang="en-US" sz="1100" dirty="0"/>
+          </a:p>
+          <a:p>
+            <a:pPr marL="0" indent="0">
+              <a:buNone/>
+            </a:pPr>
+            <a:r>
+              <a:rPr lang="en-US" sz="1100" b="1" dirty="0">
+                <a:solidFill>
+                  <a:srgbClr val="26282A"/>
+                </a:solidFill>
+                <a:latin typeface="Calibri" pitchFamily="34" charset="0"/>
+                <a:ea typeface="Calibri" pitchFamily="34" charset="-122"/>
+                <a:cs typeface="Calibri" pitchFamily="34" charset="-120"/>
+              </a:rPr>
+              <a:t>Recommend: </a:t>
+            </a:r>
+            <a:r>
+              <a:rPr lang="en-US" sz="1100" dirty="0">
+                <a:solidFill>
+                  <a:srgbClr val="26282A"/>
+                </a:solidFill>
+                <a:latin typeface="Calibri" pitchFamily="34" charset="0"/>
+                <a:ea typeface="Calibri" pitchFamily="34" charset="-122"/>
+                <a:cs typeface="Calibri" pitchFamily="34" charset="-120"/>
+              </a:rPr>
+              <a:t>targeted promotions in Tier-2 regions  ·  predictive demand planning for top SKUs.</a:t>
+            </a:r>
+            <a:endParaRPr lang="en-US" sz="1100" dirty="0"/>
+          </a:p>
+        </p:txBody>
+      </p:sp>
+      <p:sp>
+        <p:nvSpPr>
+          <p:cNvPr id="13" name="Text 11"/>
+          <p:cNvSpPr/>
+          <p:nvPr/>
+        </p:nvSpPr>
+        <p:spPr>
+          <a:xfrm>
+            <a:off x="685800" y="4480560"/>
+            <a:ext cx="7772400" cy="256032"/>
+          </a:xfrm>
+          <a:prstGeom prst="rect">
+            <a:avLst/>
+          </a:prstGeom>
+          <a:noFill/>
+          <a:ln/>
+        </p:spPr>
+        <p:txBody>
+          <a:bodyPr wrap="square" lIns="0" tIns="0" rIns="0" bIns="0" rtlCol="0" anchor="ctr"/>
+          <a:lstStyle/>
+          <a:p>
+            <a:pPr marL="0" indent="0">
+              <a:buNone/>
+            </a:pPr>
+            <a:r>
+              <a:rPr lang="en-US" sz="1100" i="1" dirty="0">
+                <a:solidFill>
+                  <a:srgbClr val="5C8A1B"/>
+                </a:solidFill>
+                <a:latin typeface="Calibri" pitchFamily="34" charset="0"/>
+                <a:ea typeface="Calibri" pitchFamily="34" charset="-122"/>
+                <a:cs typeface="Calibri" pitchFamily="34" charset="-120"/>
+              </a:rPr>
+              <a:t>Precise, reasoned, controlled — how GenAI is actually used in consulting.</a:t>
+            </a:r>
+            <a:endParaRPr lang="en-US" sz="1100" dirty="0"/>
+          </a:p>
+        </p:txBody>
+      </p:sp>
+      <p:sp>
+        <p:nvSpPr>
+          <p:cNvPr id="14" name="Text 12"/>
+          <p:cNvSpPr/>
+          <p:nvPr/>
+        </p:nvSpPr>
+        <p:spPr>
+          <a:xfrm>
+            <a:off x="457200" y="4873752"/>
+            <a:ext cx="5486400" cy="228600"/>
+          </a:xfrm>
+          <a:prstGeom prst="rect">
+            <a:avLst/>
+          </a:prstGeom>
+          <a:noFill/>
+          <a:ln/>
+        </p:spPr>
+        <p:txBody>
+          <a:bodyPr wrap="square" lIns="0" tIns="0" rIns="0" bIns="0" rtlCol="0" anchor="ctr"/>
+          <a:lstStyle/>
+          <a:p>
+            <a:pPr marL="0" indent="0">
+              <a:buNone/>
+            </a:pPr>
+            <a:r>
+              <a:rPr lang="en-US" sz="800" dirty="0">
+                <a:solidFill>
+                  <a:srgbClr val="7A7D81"/>
+                </a:solidFill>
+                <a:latin typeface="Calibri" pitchFamily="34" charset="0"/>
+                <a:ea typeface="Calibri" pitchFamily="34" charset="-122"/>
+                <a:cs typeface="Calibri" pitchFamily="34" charset="-120"/>
+              </a:rPr>
+              <a:t>Basics of AI/ML &amp; Prompt Engineering</a:t>
+            </a:r>
+            <a:endParaRPr lang="en-US" sz="800" dirty="0"/>
+          </a:p>
+        </p:txBody>
+      </p:sp>
+      <p:sp>
+        <p:nvSpPr>
+          <p:cNvPr id="15" name="Text 13"/>
+          <p:cNvSpPr/>
+          <p:nvPr/>
+        </p:nvSpPr>
+        <p:spPr>
+          <a:xfrm>
+            <a:off x="8321040" y="4873752"/>
+            <a:ext cx="365760" cy="228600"/>
+          </a:xfrm>
+          <a:prstGeom prst="rect">
+            <a:avLst/>
+          </a:prstGeom>
+          <a:noFill/>
+          <a:ln/>
+        </p:spPr>
+        <p:txBody>
+          <a:bodyPr wrap="square" lIns="0" tIns="0" rIns="0" bIns="0" rtlCol="0" anchor="ctr"/>
+          <a:lstStyle/>
+          <a:p>
+            <a:pPr marL="0" indent="0" algn="r">
+              <a:buNone/>
+            </a:pPr>
+            <a:r>
+              <a:rPr lang="en-US" sz="800" dirty="0">
+                <a:solidFill>
+                  <a:srgbClr val="7A7D81"/>
+                </a:solidFill>
+                <a:latin typeface="Calibri" pitchFamily="34" charset="0"/>
+                <a:ea typeface="Calibri" pitchFamily="34" charset="-122"/>
+                <a:cs typeface="Calibri" pitchFamily="34" charset="-120"/>
+              </a:rPr>
+              <a:t>5</a:t>
+            </a:r>
+            <a:endParaRPr lang="en-US" sz="800" dirty="0"/>
+          </a:p>
+        </p:txBody>
+      </p:sp>
+    </p:spTree>
+    <p:extLst>
+      <p:ext uri="{BB962C8B-B14F-4D97-AF65-F5344CB8AC3E}">
+        <p14:creationId xmlns:p14="http://schemas.microsoft.com/office/powerpoint/2010/main" val="1260725726"/>
+      </p:ext>
+    </p:extLst>
+  </p:cSld>
+  <p:clrMapOvr>
+    <a:masterClrMapping/>
+  </p:clrMapOvr>
+</p:sld>
+</file>
+
 <file path=ppt/slides/slide4.xml><?xml version="1.0" encoding="utf-8"?>
 <p:sld xmlns:a="http://schemas.openxmlformats.org/drawingml/2006/main" xmlns:r="http://schemas.openxmlformats.org/officeDocument/2006/relationships" xmlns:p="http://schemas.openxmlformats.org/presentationml/2006/main">
   <p:cSld name="Slide 4">
